--- a/presentation/DFIG_Presentation.pptx
+++ b/presentation/DFIG_Presentation.pptx
@@ -3125,7 +3125,7 @@
           <a:lstStyle/>
           <a:p>
             <a:pPr algn="l">
-              <a:defRPr sz="4400" b="1">
+              <a:defRPr sz="4000" b="1">
                 <a:solidFill>
                   <a:srgbClr val="FFFFFF"/>
                 </a:solidFill>
@@ -3133,7 +3133,7 @@
               </a:defRPr>
             </a:pPr>
             <a:r>
-              <a:t>Doubly-Fed Induction Generator (DFIG)</a:t>
+              <a:t>Dvostrano napajani asinhroni generator (DFIG)</a:t>
             </a:r>
           </a:p>
           <a:p>
@@ -3141,7 +3141,7 @@
               <a:spcBef>
                 <a:spcPts val="1000"/>
               </a:spcBef>
-              <a:defRPr sz="2400">
+              <a:defRPr sz="2200">
                 <a:solidFill>
                   <a:srgbClr val="009688"/>
                 </a:solidFill>
@@ -3149,7 +3149,7 @@
               </a:defRPr>
             </a:pPr>
             <a:r>
-              <a:t>Dynamic DAE Modeling and dTwin Integration Plugin</a:t>
+              <a:t>Dinamičko DAE modeliranje i plugin pretvarač za dTwin platformu</a:t>
             </a:r>
           </a:p>
           <a:p>
@@ -3165,7 +3165,7 @@
               </a:defRPr>
             </a:pPr>
             <a:r>
-              <a:t>SREES 2026 Project Group  |  5-6 Minute Overview</a:t>
+              <a:t>Projektna grupa SREES  |  Prezentacija projekta (5-6 minuta)</a:t>
             </a:r>
           </a:p>
         </p:txBody>
@@ -3227,7 +3227,7 @@
               </a:defRPr>
             </a:pPr>
             <a:r>
-              <a:t>What is a DFIG Wind Turbine?</a:t>
+              <a:t>Šta je to DFIG vjetroturbina?</a:t>
             </a:r>
           </a:p>
         </p:txBody>
@@ -3311,7 +3311,7 @@
               </a:defRPr>
             </a:pPr>
             <a:r>
-              <a:t>•  Stator Wound Connected Directly to the Grid: Operates at constant grid frequency.</a:t>
+              <a:t>•  Stator direktno spojen na mrežu: Radi na konstantnoj frekvenciji trofazne mreže.</a:t>
             </a:r>
           </a:p>
           <a:p>
@@ -3327,7 +3327,7 @@
               </a:defRPr>
             </a:pPr>
             <a:r>
-              <a:t>•  Rotor Connected via Back-to-Back Converters: Features Rotor-Side (RSC) and Grid-Side (GSC) converters.</a:t>
+              <a:t>•  Rotor spojen preko back-to-back pretvarača: Sastoji se od RSC (rotor) i GSC (mreža) pretvarača.</a:t>
             </a:r>
           </a:p>
           <a:p>
@@ -3343,7 +3343,7 @@
               </a:defRPr>
             </a:pPr>
             <a:r>
-              <a:t>•  Slip-Power Control Strategy: Converter size is only rated for slip power (25-30% of total rating), significantly reducing cost.</a:t>
+              <a:t>•  Kontrola snage klizanja: Pretvarač dimenzionisan samo za snagu klizanja (25-30% nominalne snage), što znatno smanjuje ukupne troškove opreme.</a:t>
             </a:r>
           </a:p>
           <a:p>
@@ -3359,7 +3359,7 @@
               </a:defRPr>
             </a:pPr>
             <a:r>
-              <a:t>•  Decoupled Power Regulation: Independent control of stator active (P_h) and reactive (Q_h) power injected into the grid.</a:t>
+              <a:t>•  Razdvojena (dekuplovana) regulacija snage: Vektorskom kontrolom se nezavisno upravlja aktivnom (P_h) i reaktivnom (Q_h) snagom statora.</a:t>
             </a:r>
           </a:p>
         </p:txBody>
@@ -3421,7 +3421,7 @@
               </a:defRPr>
             </a:pPr>
             <a:r>
-              <a:t>Mathematical Model: Milano's dq-Frame DAE</a:t>
+              <a:t>Matematički model: Milanov dq-DAE model</a:t>
             </a:r>
           </a:p>
         </p:txBody>
@@ -3505,7 +3505,7 @@
               </a:defRPr>
             </a:pPr>
             <a:r>
-              <a:t>•  Three Dynamic State Variables (ODEs):</a:t>
+              <a:t>•  Tri dinamičke varijable stanja (ODE):</a:t>
             </a:r>
           </a:p>
           <a:p>
@@ -3521,7 +3521,7 @@
               </a:defRPr>
             </a:pPr>
             <a:r>
-              <a:t>    -  Rotor speed (w_m): mechanical-to-electromagnetic torque balance dynamics.</a:t>
+              <a:t>    -  Brzina rotora (w_m): Dinamika ravnoteže mehaničkog i elektromagnetnog momenta.</a:t>
             </a:r>
           </a:p>
           <a:p>
@@ -3537,7 +3537,7 @@
               </a:defRPr>
             </a:pPr>
             <a:r>
-              <a:t>    -  Rotor currents (i_rq, i_rd): first-order transient lags representing the RSC controller.</a:t>
+              <a:t>    -  Rotorske struje (i_rq, i_rd): Vremenska kašnjenja prvog reda koja modeliraju RSC kontroler.</a:t>
             </a:r>
           </a:p>
           <a:p>
@@ -3553,7 +3553,7 @@
               </a:defRPr>
             </a:pPr>
             <a:r>
-              <a:t>•  Electromagnetic Torque (T_e): Algebraically links rotor current i_rq and terminal voltage v_h.</a:t>
+              <a:t>•  Elektromagnetni moment (T_e): Algebarski povezuje rotorsku struju i_rq i napon sabirnice v_h.</a:t>
             </a:r>
           </a:p>
           <a:p>
@@ -3569,7 +3569,7 @@
               </a:defRPr>
             </a:pPr>
             <a:r>
-              <a:t>•  Grid Injections: Calculates instantaneous active power P_h and reactive power Q_h injected into the generator bus.</a:t>
+              <a:t>•  Ubrizgavanje snage u mrežu: Računanje aktivne snage P_h i reaktivne snage Q_h na sabirnici generatora.</a:t>
             </a:r>
           </a:p>
           <a:p>
@@ -3585,7 +3585,7 @@
               </a:defRPr>
             </a:pPr>
             <a:r>
-              <a:t>•  Solver Compatibility: Inlined math expressions directly inside ODEs to simplify symbol table lookups.</a:t>
+              <a:t>•  Kompatibilnost sa rješavačem: Jednačine unesene direktno u ODE blokove radi stabilnijeg rada.</a:t>
             </a:r>
           </a:p>
         </p:txBody>
@@ -3647,7 +3647,7 @@
               </a:defRPr>
             </a:pPr>
             <a:r>
-              <a:t>Program Architecture &amp; ModelConverter</a:t>
+              <a:t>Arhitektura programa i ModelConverter</a:t>
             </a:r>
           </a:p>
         </p:txBody>
@@ -3731,7 +3731,7 @@
               </a:defRPr>
             </a:pPr>
             <a:r>
-              <a:t>•  Stage 1-3: XML parsing and Matrix Construction (sparse complex Y-bus, dense voltages).</a:t>
+              <a:t>•  Faze 1-3: Parsiranje XML-a i izgradnja matrica (rijetka Y-bus matrica admitansi, guste matrice napona i parametara).</a:t>
             </a:r>
           </a:p>
           <a:p>
@@ -3747,7 +3747,7 @@
               </a:defRPr>
             </a:pPr>
             <a:r>
-              <a:t>•  Stage 4-5: Emitting model header configuration and variable declarations (initial conditions).</a:t>
+              <a:t>•  Faze 4-5: Zapisivanje konfiguracionog zaglavlja DMODL-a i deklaracija početnih stanja varijabli.</a:t>
             </a:r>
           </a:p>
           <a:p>
@@ -3763,7 +3763,7 @@
               </a:defRPr>
             </a:pPr>
             <a:r>
-              <a:t>•  Stage 6: Emitting parameter section with constant overrides and registering algebraic variables.</a:t>
+              <a:t>•  Faza 6: Sekcija parametara s konstantama i registracija algebarskih izlaza kao [out=true].</a:t>
             </a:r>
           </a:p>
           <a:p>
@@ -3779,7 +3779,7 @@
               </a:defRPr>
             </a:pPr>
             <a:r>
-              <a:t>•  Stage 7-10: Generating ODEs, post-processing formulas, and writing output files (.dmodl and .vmodl).</a:t>
+              <a:t>•  Faze 7-10: Generisanje ODE jednačina, postprocesiranja i kreiranje izlaznih datoteka (.dmodl i .vmodl).</a:t>
             </a:r>
           </a:p>
           <a:p>
@@ -3795,7 +3795,7 @@
               </a:defRPr>
             </a:pPr>
             <a:r>
-              <a:t>•  Clean Output Separation: Local buffer memory streams ensure no host memory leakage.</a:t>
+              <a:t>•  Memorijska stabilnost: Pisanje putem lokalnih bafera sprečava curenje memorije i rušenje dTwin-a.</a:t>
             </a:r>
           </a:p>
         </p:txBody>
@@ -3857,7 +3857,7 @@
               </a:defRPr>
             </a:pPr>
             <a:r>
-              <a:t>Key Technical Accomplishments (Debugging)</a:t>
+              <a:t>Ključna tehnička dostignuća (Otklanjanje grešaka)</a:t>
             </a:r>
           </a:p>
         </p:txBody>
@@ -3941,7 +3941,7 @@
               </a:defRPr>
             </a:pPr>
             <a:r>
-              <a:t>•  Equation Imbalance Resolved: Declared P_e, P_h, and Q_h as Out parameters in the Params block to balance variables.</a:t>
+              <a:t>•  Riješen problem debalansa jednačina: Deklarisanjem P_e, P_h, Q_h u Params bloku čime je spriječen pad rješavača.</a:t>
             </a:r>
           </a:p>
           <a:p>
@@ -3957,7 +3957,7 @@
               </a:defRPr>
             </a:pPr>
             <a:r>
-              <a:t>•  Null-Pointer dereference Fixed: Prevented solver crashes by registering calculated post-proc symbols.</a:t>
+              <a:t>•  Spriječeni padovi dTwin GUI-ja: Uklonjeno oštećenje memorije izbacivanjem problematične funkcije MemoryOut::reset().</a:t>
             </a:r>
           </a:p>
           <a:p>
@@ -3973,7 +3973,7 @@
               </a:defRPr>
             </a:pPr>
             <a:r>
-              <a:t>•  MemoryOut Corruption Fixed: Removed MemoryOut::reset() calls which corrupted internal base class counters in the host.</a:t>
+              <a:t>•  Riješen problem prevelikih datoteka: Smanjena veličina izlaznog fajla sa 6.7 MB na čistih ~2.2 KB.</a:t>
             </a:r>
           </a:p>
           <a:p>
@@ -3989,7 +3989,7 @@
               </a:defRPr>
             </a:pPr>
             <a:r>
-              <a:t>•  ASCII Character Sanitization: Replaced Unicode en-dashes/em-dashes to avoid file scanner parsing errors.</a:t>
+              <a:t>•  Sanitacija karaktera: Zamjena Unicode crtica standardnim ASCII karakterima radi kompatibilnosti sa skenerom.</a:t>
             </a:r>
           </a:p>
           <a:p>
@@ -4005,7 +4005,7 @@
               </a:defRPr>
             </a:pPr>
             <a:r>
-              <a:t>•  LyX 2.5.1 Compatibility: Stripped format-specific metadata to ensure clean multi-platform PDF generation.</a:t>
+              <a:t>•  LyX kompatibilnost: Očišćena zaglavlja omogućavaju stabilno kompajliranje PDF-a na verziji 2.5.1.</a:t>
             </a:r>
           </a:p>
         </p:txBody>
@@ -4067,7 +4067,7 @@
               </a:defRPr>
             </a:pPr>
             <a:r>
-              <a:t>Compilation &amp; Installation Guide</a:t>
+              <a:t>Kompajliranje i instalacija</a:t>
             </a:r>
           </a:p>
         </p:txBody>
@@ -4151,7 +4151,7 @@
               </a:defRPr>
             </a:pPr>
             <a:r>
-              <a:t>•  Linux (GCC / Makefiles):</a:t>
+              <a:t>•  Linux (GCC / Makefile):</a:t>
             </a:r>
           </a:p>
           <a:p>
@@ -4215,7 +4215,7 @@
               </a:defRPr>
             </a:pPr>
             <a:r>
-              <a:t>•  Installation: Copy compiled library (dfigPlugin.dll / libdfigPlugin.so) to the dTwin plugins/ directory.</a:t>
+              <a:t>•  Instalacija: Kopiranje dll/so biblioteke u 'plugins' direktorijum dTwin aplikacije.</a:t>
             </a:r>
           </a:p>
           <a:p>
@@ -4231,7 +4231,7 @@
               </a:defRPr>
             </a:pPr>
             <a:r>
-              <a:t>•  Verification: Run test_runner to batch-convert IEEE 9, 30, 118, and 300-bus systems and verify solver execution.</a:t>
+              <a:t>•  Verifikacija: test_runner vrši automatsku konverziju i testiranje rješavača na 9, 30, 118 i 300 sabirnica.</a:t>
             </a:r>
           </a:p>
         </p:txBody>
@@ -4293,7 +4293,7 @@
               </a:defRPr>
             </a:pPr>
             <a:r>
-              <a:t>Conclusion &amp; Future Scope</a:t>
+              <a:t>Zaključak i budući rad</a:t>
             </a:r>
           </a:p>
         </p:txBody>
@@ -4377,7 +4377,7 @@
               </a:defRPr>
             </a:pPr>
             <a:r>
-              <a:t>•  Robust Integration: Milano's DFIG model successfully implemented in dTwin platform.</a:t>
+              <a:t>•  Uspješna integracija: Milanov DFIG model u potpunosti integrisan u dTwin platformu.</a:t>
             </a:r>
           </a:p>
           <a:p>
@@ -4393,7 +4393,7 @@
               </a:defRPr>
             </a:pPr>
             <a:r>
-              <a:t>•  Zero-Crash Performance: Both Windows &amp; Linux plugin versions compile and solve successfully.</a:t>
+              <a:t>•  Stabilan rad: Plugin radi bez rušenja na Windows i Linux operativnim sistemima.</a:t>
             </a:r>
           </a:p>
           <a:p>
@@ -4409,7 +4409,7 @@
               </a:defRPr>
             </a:pPr>
             <a:r>
-              <a:t>•  Full Scalability: Runs and solves successfully on systems from 9 to 300 buses.</a:t>
+              <a:t>•  Skalabilnost: Testirano i potvrđeno na mrežama do 300 sabirnica (IEEE 300).</a:t>
             </a:r>
           </a:p>
           <a:p>
@@ -4425,7 +4425,7 @@
               </a:defRPr>
             </a:pPr>
             <a:r>
-              <a:t>•  Future Work: Extend to include pitch angle controller dynamics and multi-machine grid configurations.</a:t>
+              <a:t>•  Buduća proširenja: Planirano dodavanje dinamike pitch kontrole i modeliranje grupnog rada vjetroelektrana.</a:t>
             </a:r>
           </a:p>
         </p:txBody>

--- a/presentation/DFIG_Presentation.pptx
+++ b/presentation/DFIG_Presentation.pptx
@@ -12,6 +12,8 @@
     <p:sldId id="260" r:id="rId11"/>
     <p:sldId id="261" r:id="rId12"/>
     <p:sldId id="262" r:id="rId13"/>
+    <p:sldId id="263" r:id="rId14"/>
+    <p:sldId id="264" r:id="rId15"/>
   </p:sldIdLst>
   <p:sldSz cx="12191695" cy="6858000" type="screen4x3"/>
   <p:notesSz cx="6858000" cy="9144000"/>
@@ -3149,7 +3151,7 @@
               </a:defRPr>
             </a:pPr>
             <a:r>
-              <a:t>Dinamičko DAE modeliranje i plugin pretvarač za dTwin platformu</a:t>
+              <a:t>Dinamičko DAE modeliranje, analiza i plugin pretvarač za dTwin</a:t>
             </a:r>
           </a:p>
           <a:p>
@@ -3301,7 +3303,7 @@
           <a:p>
             <a:pPr>
               <a:spcBef>
-                <a:spcPts val="1400"/>
+                <a:spcPts val="1200"/>
               </a:spcBef>
               <a:defRPr sz="1800">
                 <a:solidFill>
@@ -3317,7 +3319,7 @@
           <a:p>
             <a:pPr>
               <a:spcBef>
-                <a:spcPts val="1400"/>
+                <a:spcPts val="1200"/>
               </a:spcBef>
               <a:defRPr sz="1800">
                 <a:solidFill>
@@ -3333,7 +3335,7 @@
           <a:p>
             <a:pPr>
               <a:spcBef>
-                <a:spcPts val="1400"/>
+                <a:spcPts val="1200"/>
               </a:spcBef>
               <a:defRPr sz="1800">
                 <a:solidFill>
@@ -3349,7 +3351,7 @@
           <a:p>
             <a:pPr>
               <a:spcBef>
-                <a:spcPts val="1400"/>
+                <a:spcPts val="1200"/>
               </a:spcBef>
               <a:defRPr sz="1800">
                 <a:solidFill>
@@ -3495,7 +3497,7 @@
           <a:p>
             <a:pPr>
               <a:spcBef>
-                <a:spcPts val="1400"/>
+                <a:spcPts val="1200"/>
               </a:spcBef>
               <a:defRPr sz="1800">
                 <a:solidFill>
@@ -3511,7 +3513,7 @@
           <a:p>
             <a:pPr>
               <a:spcBef>
-                <a:spcPts val="1400"/>
+                <a:spcPts val="1200"/>
               </a:spcBef>
               <a:defRPr sz="1800">
                 <a:solidFill>
@@ -3527,7 +3529,7 @@
           <a:p>
             <a:pPr>
               <a:spcBef>
-                <a:spcPts val="1400"/>
+                <a:spcPts val="1200"/>
               </a:spcBef>
               <a:defRPr sz="1800">
                 <a:solidFill>
@@ -3543,7 +3545,7 @@
           <a:p>
             <a:pPr>
               <a:spcBef>
-                <a:spcPts val="1400"/>
+                <a:spcPts val="1200"/>
               </a:spcBef>
               <a:defRPr sz="1800">
                 <a:solidFill>
@@ -3559,7 +3561,7 @@
           <a:p>
             <a:pPr>
               <a:spcBef>
-                <a:spcPts val="1400"/>
+                <a:spcPts val="1200"/>
               </a:spcBef>
               <a:defRPr sz="1800">
                 <a:solidFill>
@@ -3575,7 +3577,7 @@
           <a:p>
             <a:pPr>
               <a:spcBef>
-                <a:spcPts val="1400"/>
+                <a:spcPts val="1200"/>
               </a:spcBef>
               <a:defRPr sz="1800">
                 <a:solidFill>
@@ -3721,7 +3723,7 @@
           <a:p>
             <a:pPr>
               <a:spcBef>
-                <a:spcPts val="1400"/>
+                <a:spcPts val="1200"/>
               </a:spcBef>
               <a:defRPr sz="1800">
                 <a:solidFill>
@@ -3737,7 +3739,7 @@
           <a:p>
             <a:pPr>
               <a:spcBef>
-                <a:spcPts val="1400"/>
+                <a:spcPts val="1200"/>
               </a:spcBef>
               <a:defRPr sz="1800">
                 <a:solidFill>
@@ -3753,7 +3755,7 @@
           <a:p>
             <a:pPr>
               <a:spcBef>
-                <a:spcPts val="1400"/>
+                <a:spcPts val="1200"/>
               </a:spcBef>
               <a:defRPr sz="1800">
                 <a:solidFill>
@@ -3769,7 +3771,7 @@
           <a:p>
             <a:pPr>
               <a:spcBef>
-                <a:spcPts val="1400"/>
+                <a:spcPts val="1200"/>
               </a:spcBef>
               <a:defRPr sz="1800">
                 <a:solidFill>
@@ -3785,7 +3787,7 @@
           <a:p>
             <a:pPr>
               <a:spcBef>
-                <a:spcPts val="1400"/>
+                <a:spcPts val="1200"/>
               </a:spcBef>
               <a:defRPr sz="1800">
                 <a:solidFill>
@@ -3857,7 +3859,7 @@
               </a:defRPr>
             </a:pPr>
             <a:r>
-              <a:t>Ključna tehnička dostignuća (Otklanjanje grešaka)</a:t>
+              <a:t>Simulacija i analiza: IEEE 9-sabirnički sistem</a:t>
             </a:r>
           </a:p>
         </p:txBody>
@@ -3931,7 +3933,7 @@
           <a:p>
             <a:pPr>
               <a:spcBef>
-                <a:spcPts val="1400"/>
+                <a:spcPts val="1200"/>
               </a:spcBef>
               <a:defRPr sz="1800">
                 <a:solidFill>
@@ -3941,13 +3943,13 @@
               </a:defRPr>
             </a:pPr>
             <a:r>
-              <a:t>•  Riješen problem debalansa jednačina: Deklarisanjem P_e, P_h, Q_h u Params bloku čime je spriječen pad rješavača.</a:t>
+              <a:t>•  Aktivna snaga (P_h): Brzo se stabilizuje na vrijednosti od oko 1.63 p.u. (163 MW na bazi 100 MVA).</a:t>
             </a:r>
           </a:p>
           <a:p>
             <a:pPr>
               <a:spcBef>
-                <a:spcPts val="1400"/>
+                <a:spcPts val="1200"/>
               </a:spcBef>
               <a:defRPr sz="1800">
                 <a:solidFill>
@@ -3957,13 +3959,13 @@
               </a:defRPr>
             </a:pPr>
             <a:r>
-              <a:t>•  Spriječeni padovi dTwin GUI-ja: Uklonjeno oštećenje memorije izbacivanjem problematične funkcije MemoryOut::reset().</a:t>
+              <a:t>•  Reaktivna snaga (Q_h): Reguliše se na stabilnih -0.12 p.u. radi pružanja naponske podrške sabirnici.</a:t>
             </a:r>
           </a:p>
           <a:p>
             <a:pPr>
               <a:spcBef>
-                <a:spcPts val="1400"/>
+                <a:spcPts val="1200"/>
               </a:spcBef>
               <a:defRPr sz="1800">
                 <a:solidFill>
@@ -3973,13 +3975,13 @@
               </a:defRPr>
             </a:pPr>
             <a:r>
-              <a:t>•  Riješen problem prevelikih datoteka: Smanjena veličina izlaznog fajla sa 6.7 MB na čistih ~2.2 KB.</a:t>
+              <a:t>•  Dinamika rotora: Brzina rotora (w_m) glatko ubrzava sa 1.0 p.u. i ustaljuje se na optimalnih 1.2 p.u.</a:t>
             </a:r>
           </a:p>
           <a:p>
             <a:pPr>
               <a:spcBef>
-                <a:spcPts val="1400"/>
+                <a:spcPts val="1200"/>
               </a:spcBef>
               <a:defRPr sz="1800">
                 <a:solidFill>
@@ -3989,13 +3991,13 @@
               </a:defRPr>
             </a:pPr>
             <a:r>
-              <a:t>•  Sanitacija karaktera: Zamjena Unicode crtica standardnim ASCII karakterima radi kompatibilnosti sa skenerom.</a:t>
+              <a:t>•  Upravljanje strujama: Rotorske struje (i_rq i i_rd) stabilno prate reference pretvarača na strani rotora.</a:t>
             </a:r>
           </a:p>
           <a:p>
             <a:pPr>
               <a:spcBef>
-                <a:spcPts val="1400"/>
+                <a:spcPts val="1200"/>
               </a:spcBef>
               <a:defRPr sz="1800">
                 <a:solidFill>
@@ -4005,7 +4007,7 @@
               </a:defRPr>
             </a:pPr>
             <a:r>
-              <a:t>•  LyX kompatibilnost: Očišćena zaglavlja omogućavaju stabilno kompajliranje PDF-a na verziji 2.5.1.</a:t>
+              <a:t>•  Stabilnost sinhronih mašina: Oscilacije uglova i brzina preostala dva generatora prigušuju se za manje od 4 sekunde.</a:t>
             </a:r>
           </a:p>
         </p:txBody>
@@ -4067,7 +4069,7 @@
               </a:defRPr>
             </a:pPr>
             <a:r>
-              <a:t>Kompajliranje i instalacija</a:t>
+              <a:t>Simulacija i analiza: IEEE 118-sabirnički sistem</a:t>
             </a:r>
           </a:p>
         </p:txBody>
@@ -4141,7 +4143,7 @@
           <a:p>
             <a:pPr>
               <a:spcBef>
-                <a:spcPts val="1400"/>
+                <a:spcPts val="1200"/>
               </a:spcBef>
               <a:defRPr sz="1800">
                 <a:solidFill>
@@ -4151,13 +4153,13 @@
               </a:defRPr>
             </a:pPr>
             <a:r>
-              <a:t>•  Linux (GCC / Makefile):</a:t>
+              <a:t>•  Skalabilnost u velikoj mreži: Uspješno simuliran rad DFIG-a u sistemu sa ukupno 54 generatora.</a:t>
             </a:r>
           </a:p>
           <a:p>
             <a:pPr>
               <a:spcBef>
-                <a:spcPts val="1400"/>
+                <a:spcPts val="1200"/>
               </a:spcBef>
               <a:defRPr sz="1800">
                 <a:solidFill>
@@ -4167,13 +4169,13 @@
               </a:defRPr>
             </a:pPr>
             <a:r>
-              <a:t>    -  cmake -DCMAKE_BUILD_TYPE=Release .. &amp;&amp; cmake --build . -j$(nproc)</a:t>
+              <a:t>•  Stabilnost DFIG-a: Lokalne regulacijske petlje vjetroturbine rade stabilno bez uticaja drugih mašina.</a:t>
             </a:r>
           </a:p>
           <a:p>
             <a:pPr>
               <a:spcBef>
-                <a:spcPts val="1400"/>
+                <a:spcPts val="1200"/>
               </a:spcBef>
               <a:defRPr sz="1800">
                 <a:solidFill>
@@ -4183,13 +4185,13 @@
               </a:defRPr>
             </a:pPr>
             <a:r>
-              <a:t>•  Windows (Visual Studio / MSBuild):</a:t>
+              <a:t>•  Sinhronizam generatora: Preostala 53 sinhrona generatora ostaju u stabilnom radu nakon uključenja DFIG-a.</a:t>
             </a:r>
           </a:p>
           <a:p>
             <a:pPr>
               <a:spcBef>
-                <a:spcPts val="1400"/>
+                <a:spcPts val="1200"/>
               </a:spcBef>
               <a:defRPr sz="1800">
                 <a:solidFill>
@@ -4199,13 +4201,13 @@
               </a:defRPr>
             </a:pPr>
             <a:r>
-              <a:t>    -  cmake .. &amp;&amp; cmake --build . --config Release</a:t>
+              <a:t>•  Damping oscilacija: Brzine rotora sinhronih mašina se brzo prigušuju, potvrđujući da DFIG ne unosi nestabilnost.</a:t>
             </a:r>
           </a:p>
           <a:p>
             <a:pPr>
               <a:spcBef>
-                <a:spcPts val="1400"/>
+                <a:spcPts val="1200"/>
               </a:spcBef>
               <a:defRPr sz="1800">
                 <a:solidFill>
@@ -4215,23 +4217,7 @@
               </a:defRPr>
             </a:pPr>
             <a:r>
-              <a:t>•  Instalacija: Kopiranje dll/so biblioteke u 'plugins' direktorijum dTwin aplikacije.</a:t>
-            </a:r>
-          </a:p>
-          <a:p>
-            <a:pPr>
-              <a:spcBef>
-                <a:spcPts val="1400"/>
-              </a:spcBef>
-              <a:defRPr sz="1800">
-                <a:solidFill>
-                  <a:srgbClr val="323232"/>
-                </a:solidFill>
-                <a:latin typeface="Calibri"/>
-              </a:defRPr>
-            </a:pPr>
-            <a:r>
-              <a:t>•  Verifikacija: test_runner vrši automatsku konverziju i testiranje rješavača na 9, 30, 118 i 300 sabirnica.</a:t>
+              <a:t>•  Robusnost: Dokazan stabilan rad algoritma u velikim prenosnim mrežama.</a:t>
             </a:r>
           </a:p>
         </p:txBody>
@@ -4293,7 +4279,7 @@
               </a:defRPr>
             </a:pPr>
             <a:r>
-              <a:t>Zaključak i budući rad</a:t>
+              <a:t>Ključna tehnička dostignuća (Otklanjanje grešaka)</a:t>
             </a:r>
           </a:p>
         </p:txBody>
@@ -4367,7 +4353,7 @@
           <a:p>
             <a:pPr>
               <a:spcBef>
-                <a:spcPts val="1400"/>
+                <a:spcPts val="1200"/>
               </a:spcBef>
               <a:defRPr sz="1800">
                 <a:solidFill>
@@ -4377,13 +4363,13 @@
               </a:defRPr>
             </a:pPr>
             <a:r>
-              <a:t>•  Uspješna integracija: Milanov DFIG model u potpunosti integrisan u dTwin platformu.</a:t>
+              <a:t>•  Riješen problem debalansa jednačina: Deklarisanjem P_e, P_h, Q_h u Params bloku čime je spriječen pad rješavača.</a:t>
             </a:r>
           </a:p>
           <a:p>
             <a:pPr>
               <a:spcBef>
-                <a:spcPts val="1400"/>
+                <a:spcPts val="1200"/>
               </a:spcBef>
               <a:defRPr sz="1800">
                 <a:solidFill>
@@ -4393,13 +4379,13 @@
               </a:defRPr>
             </a:pPr>
             <a:r>
-              <a:t>•  Stabilan rad: Plugin radi bez rušenja na Windows i Linux operativnim sistemima.</a:t>
+              <a:t>•  Spriječeni padovi dTwin GUI-ja: Uklonjeno oštećenje memorije izbacivanjem problematične funkcije MemoryOut::reset().</a:t>
             </a:r>
           </a:p>
           <a:p>
             <a:pPr>
               <a:spcBef>
-                <a:spcPts val="1400"/>
+                <a:spcPts val="1200"/>
               </a:spcBef>
               <a:defRPr sz="1800">
                 <a:solidFill>
@@ -4409,13 +4395,13 @@
               </a:defRPr>
             </a:pPr>
             <a:r>
-              <a:t>•  Skalabilnost: Testirano i potvrđeno na mrežama do 300 sabirnica (IEEE 300).</a:t>
+              <a:t>•  Riješen problem prevelikih datoteka: Smanjena veličina izlaznog fajla sa 6.7 MB na čistih ~2.2 KB.</a:t>
             </a:r>
           </a:p>
           <a:p>
             <a:pPr>
               <a:spcBef>
-                <a:spcPts val="1400"/>
+                <a:spcPts val="1200"/>
               </a:spcBef>
               <a:defRPr sz="1800">
                 <a:solidFill>
@@ -4425,7 +4411,443 @@
               </a:defRPr>
             </a:pPr>
             <a:r>
-              <a:t>•  Buduća proširenja: Planirano dodavanje dinamike pitch kontrole i modeliranje grupnog rada vjetroelektrana.</a:t>
+              <a:t>•  Sanitacija karaktera: Zamjena Unicode crtica standardnim ASCII karakterima radi kompatibilnosti sa skenerom.</a:t>
+            </a:r>
+          </a:p>
+          <a:p>
+            <a:pPr>
+              <a:spcBef>
+                <a:spcPts val="1200"/>
+              </a:spcBef>
+              <a:defRPr sz="1800">
+                <a:solidFill>
+                  <a:srgbClr val="323232"/>
+                </a:solidFill>
+                <a:latin typeface="Calibri"/>
+              </a:defRPr>
+            </a:pPr>
+            <a:r>
+              <a:t>•  LyX kompatibilnost: Očišćena zaglavlja omogućavaju stabilno kompajliranje PDF-a na verziji 2.5.1.</a:t>
+            </a:r>
+          </a:p>
+        </p:txBody>
+      </p:sp>
+    </p:spTree>
+  </p:cSld>
+  <p:clrMapOvr>
+    <a:masterClrMapping/>
+  </p:clrMapOvr>
+</p:sld>
+</file>
+
+<file path=ppt/slides/slide8.xml><?xml version="1.0" encoding="utf-8"?>
+<p:sld xmlns:a="http://schemas.openxmlformats.org/drawingml/2006/main" xmlns:p="http://schemas.openxmlformats.org/presentationml/2006/main" xmlns:r="http://schemas.openxmlformats.org/officeDocument/2006/relationships">
+  <p:cSld>
+    <p:bg>
+      <p:bgPr>
+        <a:solidFill>
+          <a:srgbClr val="FFFFFF"/>
+        </a:solidFill>
+        <a:effectLst/>
+      </p:bgPr>
+    </p:bg>
+    <p:spTree>
+      <p:nvGrpSpPr>
+        <p:cNvPr id="1" name=""/>
+        <p:cNvGrpSpPr/>
+        <p:nvPr/>
+      </p:nvGrpSpPr>
+      <p:grpSpPr/>
+      <p:sp>
+        <p:nvSpPr>
+          <p:cNvPr id="2" name="TextBox 1"/>
+          <p:cNvSpPr txBox="1"/>
+          <p:nvPr/>
+        </p:nvSpPr>
+        <p:spPr>
+          <a:xfrm>
+            <a:off x="731520" y="457200"/>
+            <a:ext cx="10515600" cy="1097280"/>
+          </a:xfrm>
+          <a:prstGeom prst="rect">
+            <a:avLst/>
+          </a:prstGeom>
+          <a:noFill/>
+        </p:spPr>
+        <p:txBody>
+          <a:bodyPr wrap="square">
+            <a:spAutoFit/>
+          </a:bodyPr>
+          <a:lstStyle/>
+          <a:p>
+            <a:pPr>
+              <a:defRPr sz="3200" b="1">
+                <a:solidFill>
+                  <a:srgbClr val="121E31"/>
+                </a:solidFill>
+                <a:latin typeface="Trebuchet MS"/>
+              </a:defRPr>
+            </a:pPr>
+            <a:r>
+              <a:t>Kompajliranje i instalacija</a:t>
+            </a:r>
+          </a:p>
+        </p:txBody>
+      </p:sp>
+      <p:sp>
+        <p:nvSpPr>
+          <p:cNvPr id="3" name="Rectangle 2"/>
+          <p:cNvSpPr/>
+          <p:nvPr/>
+        </p:nvSpPr>
+        <p:spPr>
+          <a:xfrm>
+            <a:off x="731520" y="1188720"/>
+            <a:ext cx="10728655" cy="36576"/>
+          </a:xfrm>
+          <a:prstGeom prst="rect">
+            <a:avLst/>
+          </a:prstGeom>
+          <a:solidFill>
+            <a:srgbClr val="009688"/>
+          </a:solidFill>
+          <a:ln>
+            <a:solidFill>
+              <a:srgbClr val="009688"/>
+            </a:solidFill>
+          </a:ln>
+        </p:spPr>
+        <p:style>
+          <a:lnRef idx="1">
+            <a:schemeClr val="accent1"/>
+          </a:lnRef>
+          <a:fillRef idx="3">
+            <a:schemeClr val="accent1"/>
+          </a:fillRef>
+          <a:effectRef idx="2">
+            <a:schemeClr val="accent1"/>
+          </a:effectRef>
+          <a:fontRef idx="minor">
+            <a:schemeClr val="lt1"/>
+          </a:fontRef>
+        </p:style>
+        <p:txBody>
+          <a:bodyPr rtlCol="0" anchor="ctr"/>
+          <a:lstStyle/>
+          <a:p>
+            <a:pPr algn="ctr"/>
+          </a:p>
+        </p:txBody>
+      </p:sp>
+      <p:sp>
+        <p:nvSpPr>
+          <p:cNvPr id="4" name="TextBox 3"/>
+          <p:cNvSpPr txBox="1"/>
+          <p:nvPr/>
+        </p:nvSpPr>
+        <p:spPr>
+          <a:xfrm>
+            <a:off x="731520" y="1645920"/>
+            <a:ext cx="10728655" cy="4572000"/>
+          </a:xfrm>
+          <a:prstGeom prst="rect">
+            <a:avLst/>
+          </a:prstGeom>
+          <a:noFill/>
+        </p:spPr>
+        <p:txBody>
+          <a:bodyPr wrap="square">
+            <a:spAutoFit/>
+          </a:bodyPr>
+          <a:lstStyle/>
+          <a:p>
+            <a:pPr>
+              <a:spcBef>
+                <a:spcPts val="1200"/>
+              </a:spcBef>
+              <a:defRPr sz="1800">
+                <a:solidFill>
+                  <a:srgbClr val="323232"/>
+                </a:solidFill>
+                <a:latin typeface="Calibri"/>
+              </a:defRPr>
+            </a:pPr>
+            <a:r>
+              <a:t>•  Linux (GCC / Makefile):</a:t>
+            </a:r>
+          </a:p>
+          <a:p>
+            <a:pPr>
+              <a:spcBef>
+                <a:spcPts val="1200"/>
+              </a:spcBef>
+              <a:defRPr sz="1800">
+                <a:solidFill>
+                  <a:srgbClr val="323232"/>
+                </a:solidFill>
+                <a:latin typeface="Calibri"/>
+              </a:defRPr>
+            </a:pPr>
+            <a:r>
+              <a:t>    -  cmake -DCMAKE_BUILD_TYPE=Release .. &amp;&amp; cmake --build . -j$(nproc)</a:t>
+            </a:r>
+          </a:p>
+          <a:p>
+            <a:pPr>
+              <a:spcBef>
+                <a:spcPts val="1200"/>
+              </a:spcBef>
+              <a:defRPr sz="1800">
+                <a:solidFill>
+                  <a:srgbClr val="323232"/>
+                </a:solidFill>
+                <a:latin typeface="Calibri"/>
+              </a:defRPr>
+            </a:pPr>
+            <a:r>
+              <a:t>•  Windows (Visual Studio / MSBuild):</a:t>
+            </a:r>
+          </a:p>
+          <a:p>
+            <a:pPr>
+              <a:spcBef>
+                <a:spcPts val="1200"/>
+              </a:spcBef>
+              <a:defRPr sz="1800">
+                <a:solidFill>
+                  <a:srgbClr val="323232"/>
+                </a:solidFill>
+                <a:latin typeface="Calibri"/>
+              </a:defRPr>
+            </a:pPr>
+            <a:r>
+              <a:t>    -  cmake .. &amp;&amp; cmake --build . --config Release</a:t>
+            </a:r>
+          </a:p>
+          <a:p>
+            <a:pPr>
+              <a:spcBef>
+                <a:spcPts val="1200"/>
+              </a:spcBef>
+              <a:defRPr sz="1800">
+                <a:solidFill>
+                  <a:srgbClr val="323232"/>
+                </a:solidFill>
+                <a:latin typeface="Calibri"/>
+              </a:defRPr>
+            </a:pPr>
+            <a:r>
+              <a:t>•  Instalacija: Kopiranje dll/so biblioteke u 'plugins' direktorijum dTwin aplikacije.</a:t>
+            </a:r>
+          </a:p>
+          <a:p>
+            <a:pPr>
+              <a:spcBef>
+                <a:spcPts val="1200"/>
+              </a:spcBef>
+              <a:defRPr sz="1800">
+                <a:solidFill>
+                  <a:srgbClr val="323232"/>
+                </a:solidFill>
+                <a:latin typeface="Calibri"/>
+              </a:defRPr>
+            </a:pPr>
+            <a:r>
+              <a:t>•  Verifikacija: test_runner vrši automatsku konverziju i testiranje rješavača na 9, 30, 118 i 300 sabirnica.</a:t>
+            </a:r>
+          </a:p>
+        </p:txBody>
+      </p:sp>
+    </p:spTree>
+  </p:cSld>
+  <p:clrMapOvr>
+    <a:masterClrMapping/>
+  </p:clrMapOvr>
+</p:sld>
+</file>
+
+<file path=ppt/slides/slide9.xml><?xml version="1.0" encoding="utf-8"?>
+<p:sld xmlns:a="http://schemas.openxmlformats.org/drawingml/2006/main" xmlns:p="http://schemas.openxmlformats.org/presentationml/2006/main" xmlns:r="http://schemas.openxmlformats.org/officeDocument/2006/relationships">
+  <p:cSld>
+    <p:bg>
+      <p:bgPr>
+        <a:solidFill>
+          <a:srgbClr val="FFFFFF"/>
+        </a:solidFill>
+        <a:effectLst/>
+      </p:bgPr>
+    </p:bg>
+    <p:spTree>
+      <p:nvGrpSpPr>
+        <p:cNvPr id="1" name=""/>
+        <p:cNvGrpSpPr/>
+        <p:nvPr/>
+      </p:nvGrpSpPr>
+      <p:grpSpPr/>
+      <p:sp>
+        <p:nvSpPr>
+          <p:cNvPr id="2" name="TextBox 1"/>
+          <p:cNvSpPr txBox="1"/>
+          <p:nvPr/>
+        </p:nvSpPr>
+        <p:spPr>
+          <a:xfrm>
+            <a:off x="731520" y="457200"/>
+            <a:ext cx="10515600" cy="1097280"/>
+          </a:xfrm>
+          <a:prstGeom prst="rect">
+            <a:avLst/>
+          </a:prstGeom>
+          <a:noFill/>
+        </p:spPr>
+        <p:txBody>
+          <a:bodyPr wrap="square">
+            <a:spAutoFit/>
+          </a:bodyPr>
+          <a:lstStyle/>
+          <a:p>
+            <a:pPr>
+              <a:defRPr sz="3200" b="1">
+                <a:solidFill>
+                  <a:srgbClr val="121E31"/>
+                </a:solidFill>
+                <a:latin typeface="Trebuchet MS"/>
+              </a:defRPr>
+            </a:pPr>
+            <a:r>
+              <a:t>Zaključak</a:t>
+            </a:r>
+          </a:p>
+        </p:txBody>
+      </p:sp>
+      <p:sp>
+        <p:nvSpPr>
+          <p:cNvPr id="3" name="Rectangle 2"/>
+          <p:cNvSpPr/>
+          <p:nvPr/>
+        </p:nvSpPr>
+        <p:spPr>
+          <a:xfrm>
+            <a:off x="731520" y="1188720"/>
+            <a:ext cx="10728655" cy="36576"/>
+          </a:xfrm>
+          <a:prstGeom prst="rect">
+            <a:avLst/>
+          </a:prstGeom>
+          <a:solidFill>
+            <a:srgbClr val="009688"/>
+          </a:solidFill>
+          <a:ln>
+            <a:solidFill>
+              <a:srgbClr val="009688"/>
+            </a:solidFill>
+          </a:ln>
+        </p:spPr>
+        <p:style>
+          <a:lnRef idx="1">
+            <a:schemeClr val="accent1"/>
+          </a:lnRef>
+          <a:fillRef idx="3">
+            <a:schemeClr val="accent1"/>
+          </a:fillRef>
+          <a:effectRef idx="2">
+            <a:schemeClr val="accent1"/>
+          </a:effectRef>
+          <a:fontRef idx="minor">
+            <a:schemeClr val="lt1"/>
+          </a:fontRef>
+        </p:style>
+        <p:txBody>
+          <a:bodyPr rtlCol="0" anchor="ctr"/>
+          <a:lstStyle/>
+          <a:p>
+            <a:pPr algn="ctr"/>
+          </a:p>
+        </p:txBody>
+      </p:sp>
+      <p:sp>
+        <p:nvSpPr>
+          <p:cNvPr id="4" name="TextBox 3"/>
+          <p:cNvSpPr txBox="1"/>
+          <p:nvPr/>
+        </p:nvSpPr>
+        <p:spPr>
+          <a:xfrm>
+            <a:off x="731520" y="1645920"/>
+            <a:ext cx="10728655" cy="4572000"/>
+          </a:xfrm>
+          <a:prstGeom prst="rect">
+            <a:avLst/>
+          </a:prstGeom>
+          <a:noFill/>
+        </p:spPr>
+        <p:txBody>
+          <a:bodyPr wrap="square">
+            <a:spAutoFit/>
+          </a:bodyPr>
+          <a:lstStyle/>
+          <a:p>
+            <a:pPr>
+              <a:spcBef>
+                <a:spcPts val="1200"/>
+              </a:spcBef>
+              <a:defRPr sz="1800">
+                <a:solidFill>
+                  <a:srgbClr val="323232"/>
+                </a:solidFill>
+                <a:latin typeface="Calibri"/>
+              </a:defRPr>
+            </a:pPr>
+            <a:r>
+              <a:t>•  Uspješna integracija: Milanov DFIG model u potpunosti integrisan u dTwin platformu.</a:t>
+            </a:r>
+          </a:p>
+          <a:p>
+            <a:pPr>
+              <a:spcBef>
+                <a:spcPts val="1200"/>
+              </a:spcBef>
+              <a:defRPr sz="1800">
+                <a:solidFill>
+                  <a:srgbClr val="323232"/>
+                </a:solidFill>
+                <a:latin typeface="Calibri"/>
+              </a:defRPr>
+            </a:pPr>
+            <a:r>
+              <a:t>•  Stabilan rad: Plugin radi bez rušenja na Windows i Linux operativnim sistemima.</a:t>
+            </a:r>
+          </a:p>
+          <a:p>
+            <a:pPr>
+              <a:spcBef>
+                <a:spcPts val="1200"/>
+              </a:spcBef>
+              <a:defRPr sz="1800">
+                <a:solidFill>
+                  <a:srgbClr val="323232"/>
+                </a:solidFill>
+                <a:latin typeface="Calibri"/>
+              </a:defRPr>
+            </a:pPr>
+            <a:r>
+              <a:t>•  Skalabilnost: Testirano i potvrđeno na mrežama do 300 sabirnica (IEEE 300).</a:t>
+            </a:r>
+          </a:p>
+          <a:p>
+            <a:pPr>
+              <a:spcBef>
+                <a:spcPts val="1200"/>
+              </a:spcBef>
+              <a:defRPr sz="1800">
+                <a:solidFill>
+                  <a:srgbClr val="323232"/>
+                </a:solidFill>
+                <a:latin typeface="Calibri"/>
+              </a:defRPr>
+            </a:pPr>
+            <a:r>
+              <a:t>•  Visoka numerička stabilnost: Riješeni svi padovi memorije i debalansi jednačina u rješavaču.</a:t>
             </a:r>
           </a:p>
         </p:txBody>

--- a/presentation/DFIG_Presentation.pptx
+++ b/presentation/DFIG_Presentation.pptx
@@ -8194,7 +8194,7 @@
                 <a:uFillTx/>
                 <a:latin typeface="Calibri"/>
               </a:rPr>
-              <a:t>Projektna grupa SREES  |  Prezentacija projekta (5-6 minuta)</a:t>
+              <a:t>  |  Prezentacija projekta (5-6 minuta)</a:t>
             </a:r>
             <a:endParaRPr lang="en-US" sz="1600" b="0" u="none" strike="noStrike">
               <a:solidFill>

--- a/presentation/DFIG_Presentation.pptx
+++ b/presentation/DFIG_Presentation.pptx
@@ -20,8 +20,8 @@
 </file>
 
 <file path=ppt/slideLayouts/slideLayout1.xml><?xml version="1.0" encoding="utf-8"?>
-<p:sldLayout xmlns:a="http://schemas.openxmlformats.org/drawingml/2006/main" xmlns:p="http://schemas.openxmlformats.org/presentationml/2006/main" xmlns:r="http://schemas.openxmlformats.org/officeDocument/2006/relationships" xmlns:p14="http://schemas.microsoft.com/office/powerpoint/2010/main" xmlns:p15="http://schemas.microsoft.com/office/powerpoint/2012/main" xmlns:mc="http://schemas.openxmlformats.org/markup-compatibility/2006" type="title" preserve="1">
-  <p:cSld name="Title Slide">
+<p:sldLayout xmlns:a="http://schemas.openxmlformats.org/drawingml/2006/main" xmlns:p="http://schemas.openxmlformats.org/presentationml/2006/main" xmlns:r="http://schemas.openxmlformats.org/officeDocument/2006/relationships" xmlns:p14="http://schemas.microsoft.com/office/powerpoint/2010/main" xmlns:p15="http://schemas.microsoft.com/office/powerpoint/2012/main" xmlns:mc="http://schemas.openxmlformats.org/markup-compatibility/2006" type="blank" preserve="1">
+  <p:cSld name="Blank">
     <p:bg>
       <p:bgPr>
         <a:solidFill>
@@ -50,85 +50,13 @@
             <a:spLocks noGrp="1"/>
           </p:cNvSpPr>
           <p:nvPr>
-            <p:ph type="title"/>
-          </p:nvPr>
-        </p:nvSpPr>
-        <p:spPr>
-          <a:xfrm>
-            <a:off x="685800" y="2130480"/>
-            <a:ext cx="7772040" cy="1469520"/>
-          </a:xfrm>
-          <a:prstGeom prst="rect">
-            <a:avLst/>
-          </a:prstGeom>
-          <a:noFill/>
-          <a:ln w="0">
-            <a:noFill/>
-          </a:ln>
-        </p:spPr>
-        <p:txBody>
-          <a:bodyPr lIns="91440" tIns="45720" rIns="91440" bIns="45720" anchor="ctr">
-            <a:noAutofit/>
-          </a:bodyPr>
-          <a:lstStyle>
-            <a:lvl1pPr indent="0" algn="ctr" defTabSz="457200">
-              <a:lnSpc>
-                <a:spcPct val="100000"/>
-              </a:lnSpc>
-              <a:buNone/>
-              <a:defRPr lang="en-US" sz="4400" b="0" u="none" strike="noStrike">
-                <a:solidFill>
-                  <a:schemeClr val="dk1"/>
-                </a:solidFill>
-                <a:effectLst/>
-                <a:uFillTx/>
-                <a:latin typeface="Calibri"/>
-              </a:defRPr>
-            </a:lvl1pPr>
-          </a:lstStyle>
-          <a:p>
-            <a:pPr indent="0" algn="ctr" defTabSz="457200">
-              <a:lnSpc>
-                <a:spcPct val="100000"/>
-              </a:lnSpc>
-              <a:buNone/>
-            </a:pPr>
-            <a:r>
-              <a:rPr lang="en-US" sz="4400" b="0" u="none" strike="noStrike">
-                <a:solidFill>
-                  <a:schemeClr val="dk1"/>
-                </a:solidFill>
-                <a:effectLst/>
-                <a:uFillTx/>
-                <a:latin typeface="Calibri"/>
-              </a:rPr>
-              <a:t>Click to edit Master title style</a:t>
-            </a:r>
-            <a:endParaRPr lang="en-US" sz="4400" b="0" u="none" strike="noStrike">
-              <a:solidFill>
-                <a:schemeClr val="dk1"/>
-              </a:solidFill>
-              <a:effectLst/>
-              <a:uFillTx/>
-              <a:latin typeface="Calibri"/>
-            </a:endParaRPr>
-          </a:p>
-        </p:txBody>
-      </p:sp>
-      <p:sp>
-        <p:nvSpPr>
-          <p:cNvPr id="3" name="PlaceHolder 2"/>
-          <p:cNvSpPr>
-            <a:spLocks noGrp="1"/>
-          </p:cNvSpPr>
-          <p:nvPr>
             <p:ph type="dt" idx="1"/>
           </p:nvPr>
         </p:nvSpPr>
         <p:spPr>
           <a:xfrm>
             <a:off x="457200" y="6356520"/>
-            <a:ext cx="2133360" cy="364680"/>
+            <a:ext cx="2133000" cy="364320"/>
           </a:xfrm>
           <a:prstGeom prst="rect">
             <a:avLst/>
@@ -148,6 +76,9 @@
                 <a:spcPct val="100000"/>
               </a:lnSpc>
               <a:buNone/>
+              <a:tabLst>
+                <a:tab pos="0" algn="l"/>
+              </a:tabLst>
               <a:defRPr lang="en-US" sz="1200" b="0" u="none" strike="noStrike">
                 <a:solidFill>
                   <a:schemeClr val="dk1">
@@ -166,6 +97,9 @@
                 <a:spcPct val="100000"/>
               </a:lnSpc>
               <a:buNone/>
+              <a:tabLst>
+                <a:tab pos="0" algn="l"/>
+              </a:tabLst>
             </a:pPr>
             <a:r>
               <a:rPr lang="en-US" sz="1200" b="0" u="none" strike="noStrike">
@@ -178,7 +112,7 @@
                 <a:uFillTx/>
                 <a:latin typeface="Calibri"/>
               </a:rPr>
-              <a:t> </a:t>
+              <a:t>&lt;date/time&gt;</a:t>
             </a:r>
             <a:endParaRPr lang="en-US" sz="1200" b="0" u="none" strike="noStrike">
               <a:solidFill>
@@ -193,7 +127,7 @@
       </p:sp>
       <p:sp>
         <p:nvSpPr>
-          <p:cNvPr id="4" name="PlaceHolder 3"/>
+          <p:cNvPr id="3" name="PlaceHolder 2"/>
           <p:cNvSpPr>
             <a:spLocks noGrp="1"/>
           </p:cNvSpPr>
@@ -204,7 +138,7 @@
         <p:spPr>
           <a:xfrm>
             <a:off x="3124080" y="6356520"/>
-            <a:ext cx="2895120" cy="364680"/>
+            <a:ext cx="2894760" cy="364320"/>
           </a:xfrm>
           <a:prstGeom prst="rect">
             <a:avLst/>
@@ -220,7 +154,13 @@
           </a:bodyPr>
           <a:lstStyle>
             <a:lvl1pPr indent="0" algn="ctr">
+              <a:lnSpc>
+                <a:spcPct val="100000"/>
+              </a:lnSpc>
               <a:buNone/>
+              <a:tabLst>
+                <a:tab pos="0" algn="l"/>
+              </a:tabLst>
               <a:defRPr lang="en-US" sz="1400" b="0" u="none" strike="noStrike">
                 <a:solidFill>
                   <a:srgbClr val="000000"/>
@@ -233,7 +173,13 @@
           </a:lstStyle>
           <a:p>
             <a:pPr indent="0" algn="ctr">
+              <a:lnSpc>
+                <a:spcPct val="100000"/>
+              </a:lnSpc>
               <a:buNone/>
+              <a:tabLst>
+                <a:tab pos="0" algn="l"/>
+              </a:tabLst>
             </a:pPr>
             <a:r>
               <a:rPr lang="en-US" sz="1400" b="0" u="none" strike="noStrike">
@@ -244,7 +190,7 @@
                 <a:uFillTx/>
                 <a:latin typeface="Times New Roman"/>
               </a:rPr>
-              <a:t> </a:t>
+              <a:t>&lt;footer&gt;</a:t>
             </a:r>
             <a:endParaRPr lang="en-US" sz="1400" b="0" u="none" strike="noStrike">
               <a:solidFill>
@@ -259,7 +205,7 @@
       </p:sp>
       <p:sp>
         <p:nvSpPr>
-          <p:cNvPr id="5" name="PlaceHolder 4"/>
+          <p:cNvPr id="4" name="PlaceHolder 3"/>
           <p:cNvSpPr>
             <a:spLocks noGrp="1"/>
           </p:cNvSpPr>
@@ -270,7 +216,7 @@
         <p:spPr>
           <a:xfrm>
             <a:off x="6553080" y="6356520"/>
-            <a:ext cx="2133360" cy="364680"/>
+            <a:ext cx="2133000" cy="364320"/>
           </a:xfrm>
           <a:prstGeom prst="rect">
             <a:avLst/>
@@ -290,6 +236,9 @@
                 <a:spcPct val="100000"/>
               </a:lnSpc>
               <a:buNone/>
+              <a:tabLst>
+                <a:tab pos="0" algn="l"/>
+              </a:tabLst>
               <a:defRPr lang="en-US" sz="1200" b="0" u="none" strike="noStrike">
                 <a:solidFill>
                   <a:schemeClr val="dk1">
@@ -308,8 +257,11 @@
                 <a:spcPct val="100000"/>
               </a:lnSpc>
               <a:buNone/>
-            </a:pPr>
-            <a:fld id="{9EDE09C2-E6B8-4484-994B-AF4D9A33792D}" type="slidenum">
+              <a:tabLst>
+                <a:tab pos="0" algn="l"/>
+              </a:tabLst>
+            </a:pPr>
+            <a:fld id="{1DF374F5-584E-4A21-BCE4-E4779D1B46F4}" type="slidenum">
               <a:rPr lang="en-US" sz="1200" b="0" u="none" strike="noStrike">
                 <a:solidFill>
                   <a:schemeClr val="dk1">
@@ -320,7 +272,7 @@
                 <a:uFillTx/>
                 <a:latin typeface="Calibri"/>
               </a:rPr>
-              <a:t>8</a:t>
+              <a:t>&lt;number&gt;</a:t>
             </a:fld>
             <a:endParaRPr lang="en-US" sz="1200" b="0" u="none" strike="noStrike">
               <a:solidFill>
@@ -329,6 +281,84 @@
               <a:effectLst/>
               <a:uFillTx/>
               <a:latin typeface="Times New Roman"/>
+            </a:endParaRPr>
+          </a:p>
+        </p:txBody>
+      </p:sp>
+      <p:sp>
+        <p:nvSpPr>
+          <p:cNvPr id="5" name="PlaceHolder 4"/>
+          <p:cNvSpPr>
+            <a:spLocks noGrp="1"/>
+          </p:cNvSpPr>
+          <p:nvPr>
+            <p:ph type="title"/>
+          </p:nvPr>
+        </p:nvSpPr>
+        <p:spPr>
+          <a:xfrm>
+            <a:off x="609480" y="273600"/>
+            <a:ext cx="10971720" cy="1144440"/>
+          </a:xfrm>
+          <a:prstGeom prst="rect">
+            <a:avLst/>
+          </a:prstGeom>
+          <a:noFill/>
+          <a:ln w="0">
+            <a:noFill/>
+          </a:ln>
+        </p:spPr>
+        <p:txBody>
+          <a:bodyPr lIns="0" tIns="0" rIns="0" bIns="0" anchor="ctr">
+            <a:noAutofit/>
+          </a:bodyPr>
+          <a:lstStyle>
+            <a:lvl1pPr indent="0" algn="ctr" defTabSz="457200">
+              <a:lnSpc>
+                <a:spcPct val="100000"/>
+              </a:lnSpc>
+              <a:buNone/>
+              <a:tabLst>
+                <a:tab pos="0" algn="l"/>
+              </a:tabLst>
+              <a:defRPr lang="en-US" sz="4400" b="0" u="none" strike="noStrike">
+                <a:solidFill>
+                  <a:schemeClr val="dk1"/>
+                </a:solidFill>
+                <a:effectLst/>
+                <a:uFillTx/>
+                <a:latin typeface="Calibri"/>
+              </a:defRPr>
+            </a:lvl1pPr>
+          </a:lstStyle>
+          <a:p>
+            <a:pPr indent="0" algn="ctr" defTabSz="457200">
+              <a:lnSpc>
+                <a:spcPct val="100000"/>
+              </a:lnSpc>
+              <a:buNone/>
+              <a:tabLst>
+                <a:tab pos="0" algn="l"/>
+              </a:tabLst>
+            </a:pPr>
+            <a:r>
+              <a:rPr lang="en-US" sz="4400" b="0" u="none" strike="noStrike">
+                <a:solidFill>
+                  <a:schemeClr val="dk1"/>
+                </a:solidFill>
+                <a:effectLst/>
+                <a:uFillTx/>
+                <a:latin typeface="Calibri"/>
+              </a:rPr>
+              <a:t>Click to edit the title text format</a:t>
+            </a:r>
+            <a:endParaRPr lang="en-US" sz="4400" b="0" u="none" strike="noStrike">
+              <a:solidFill>
+                <a:schemeClr val="dk1"/>
+              </a:solidFill>
+              <a:effectLst/>
+              <a:uFillTx/>
+              <a:latin typeface="Calibri"/>
             </a:endParaRPr>
           </a:p>
         </p:txBody>
@@ -346,7 +376,7 @@
         <p:spPr>
           <a:xfrm>
             <a:off x="609480" y="1604520"/>
-            <a:ext cx="10972080" cy="3977280"/>
+            <a:ext cx="10971720" cy="3976920"/>
           </a:xfrm>
           <a:prstGeom prst="rect">
             <a:avLst/>
@@ -362,6 +392,9 @@
           </a:bodyPr>
           <a:lstStyle>
             <a:lvl1pPr algn="l" defTabSz="457200">
+              <a:lnSpc>
+                <a:spcPct val="100000"/>
+              </a:lnSpc>
               <a:spcBef>
                 <a:spcPts val="641"/>
               </a:spcBef>
@@ -380,6 +413,9 @@
               </a:defRPr>
             </a:lvl1pPr>
             <a:lvl2pPr lvl="1" algn="l" defTabSz="457200">
+              <a:lnSpc>
+                <a:spcPct val="100000"/>
+              </a:lnSpc>
               <a:spcBef>
                 <a:spcPts val="561"/>
               </a:spcBef>
@@ -399,6 +435,9 @@
               </a:defRPr>
             </a:lvl2pPr>
             <a:lvl3pPr lvl="2" algn="l" defTabSz="457200">
+              <a:lnSpc>
+                <a:spcPct val="100000"/>
+              </a:lnSpc>
               <a:spcBef>
                 <a:spcPts val="479"/>
               </a:spcBef>
@@ -418,6 +457,9 @@
               </a:defRPr>
             </a:lvl3pPr>
             <a:lvl4pPr lvl="3" algn="l" defTabSz="457200">
+              <a:lnSpc>
+                <a:spcPct val="100000"/>
+              </a:lnSpc>
               <a:spcBef>
                 <a:spcPts val="400"/>
               </a:spcBef>
@@ -437,6 +479,9 @@
               </a:defRPr>
             </a:lvl4pPr>
             <a:lvl5pPr lvl="4" algn="l" defTabSz="457200">
+              <a:lnSpc>
+                <a:spcPct val="100000"/>
+              </a:lnSpc>
               <a:spcBef>
                 <a:spcPts val="400"/>
               </a:spcBef>
@@ -456,6 +501,9 @@
               </a:defRPr>
             </a:lvl5pPr>
             <a:lvl6pPr lvl="5" algn="l" defTabSz="457200">
+              <a:lnSpc>
+                <a:spcPct val="100000"/>
+              </a:lnSpc>
               <a:spcBef>
                 <a:spcPts val="283"/>
               </a:spcBef>
@@ -475,6 +523,9 @@
               </a:defRPr>
             </a:lvl6pPr>
             <a:lvl7pPr lvl="6" algn="l" defTabSz="457200">
+              <a:lnSpc>
+                <a:spcPct val="100000"/>
+              </a:lnSpc>
               <a:spcBef>
                 <a:spcPts val="283"/>
               </a:spcBef>
@@ -496,6 +547,9 @@
           </a:lstStyle>
           <a:p>
             <a:pPr marL="343080" indent="-343080" algn="l" defTabSz="457200">
+              <a:lnSpc>
+                <a:spcPct val="100000"/>
+              </a:lnSpc>
               <a:spcBef>
                 <a:spcPts val="641"/>
               </a:spcBef>
@@ -527,6 +581,9 @@
           </a:p>
           <a:p>
             <a:pPr marL="864000" lvl="1" indent="-324000" algn="l" defTabSz="457200">
+              <a:lnSpc>
+                <a:spcPct val="100000"/>
+              </a:lnSpc>
               <a:spcBef>
                 <a:spcPts val="561"/>
               </a:spcBef>
@@ -559,6 +616,9 @@
           </a:p>
           <a:p>
             <a:pPr marL="1296000" lvl="2" indent="-288000" algn="l" defTabSz="457200">
+              <a:lnSpc>
+                <a:spcPct val="100000"/>
+              </a:lnSpc>
               <a:spcBef>
                 <a:spcPts val="479"/>
               </a:spcBef>
@@ -591,6 +651,9 @@
           </a:p>
           <a:p>
             <a:pPr marL="1728000" lvl="3" indent="-216000" algn="l" defTabSz="457200">
+              <a:lnSpc>
+                <a:spcPct val="100000"/>
+              </a:lnSpc>
               <a:spcBef>
                 <a:spcPts val="400"/>
               </a:spcBef>
@@ -623,6 +686,9 @@
           </a:p>
           <a:p>
             <a:pPr marL="2160000" lvl="4" indent="-216000" algn="l" defTabSz="457200">
+              <a:lnSpc>
+                <a:spcPct val="100000"/>
+              </a:lnSpc>
               <a:spcBef>
                 <a:spcPts val="400"/>
               </a:spcBef>
@@ -655,6 +721,9 @@
           </a:p>
           <a:p>
             <a:pPr marL="2592000" lvl="5" indent="-216000" algn="l" defTabSz="457200">
+              <a:lnSpc>
+                <a:spcPct val="100000"/>
+              </a:lnSpc>
               <a:spcBef>
                 <a:spcPts val="283"/>
               </a:spcBef>
@@ -687,6 +756,9 @@
           </a:p>
           <a:p>
             <a:pPr marL="3024000" lvl="6" indent="-216000" algn="l" defTabSz="457200">
+              <a:lnSpc>
+                <a:spcPct val="100000"/>
+              </a:lnSpc>
               <a:spcBef>
                 <a:spcPts val="283"/>
               </a:spcBef>
@@ -726,7 +798,7 @@
 
 <file path=ppt/slideLayouts/slideLayout10.xml><?xml version="1.0" encoding="utf-8"?>
 <p:sldLayout xmlns:a="http://schemas.openxmlformats.org/drawingml/2006/main" xmlns:p="http://schemas.openxmlformats.org/presentationml/2006/main" xmlns:r="http://schemas.openxmlformats.org/officeDocument/2006/relationships" xmlns:p14="http://schemas.microsoft.com/office/powerpoint/2010/main" xmlns:p15="http://schemas.microsoft.com/office/powerpoint/2012/main" xmlns:mc="http://schemas.openxmlformats.org/markup-compatibility/2006" type="blank" preserve="1">
-  <p:cSld name="Content with Caption">
+  <p:cSld name="Comparison">
     <p:bg>
       <p:bgPr>
         <a:solidFill>
@@ -750,7 +822,7 @@
       </p:grpSpPr>
       <p:sp>
         <p:nvSpPr>
-          <p:cNvPr id="51" name="PlaceHolder 1"/>
+          <p:cNvPr id="50" name="PlaceHolder 1"/>
           <p:cNvSpPr>
             <a:spLocks noGrp="1"/>
           </p:cNvSpPr>
@@ -760,8 +832,86 @@
         </p:nvSpPr>
         <p:spPr>
           <a:xfrm>
-            <a:off x="457200" y="272880"/>
-            <a:ext cx="3007800" cy="1161720"/>
+            <a:off x="457200" y="274680"/>
+            <a:ext cx="8228880" cy="1142280"/>
+          </a:xfrm>
+          <a:prstGeom prst="rect">
+            <a:avLst/>
+          </a:prstGeom>
+          <a:noFill/>
+          <a:ln w="0">
+            <a:noFill/>
+          </a:ln>
+        </p:spPr>
+        <p:txBody>
+          <a:bodyPr lIns="91440" tIns="45720" rIns="91440" bIns="45720" anchor="ctr">
+            <a:noAutofit/>
+          </a:bodyPr>
+          <a:lstStyle>
+            <a:lvl1pPr indent="0" algn="ctr" defTabSz="457200">
+              <a:lnSpc>
+                <a:spcPct val="100000"/>
+              </a:lnSpc>
+              <a:buNone/>
+              <a:tabLst>
+                <a:tab pos="0" algn="l"/>
+              </a:tabLst>
+              <a:defRPr lang="en-US" sz="4400" b="0" u="none" strike="noStrike">
+                <a:solidFill>
+                  <a:schemeClr val="dk1"/>
+                </a:solidFill>
+                <a:effectLst/>
+                <a:uFillTx/>
+                <a:latin typeface="Calibri"/>
+              </a:defRPr>
+            </a:lvl1pPr>
+          </a:lstStyle>
+          <a:p>
+            <a:pPr indent="0" algn="ctr" defTabSz="457200">
+              <a:lnSpc>
+                <a:spcPct val="100000"/>
+              </a:lnSpc>
+              <a:buNone/>
+              <a:tabLst>
+                <a:tab pos="0" algn="l"/>
+              </a:tabLst>
+            </a:pPr>
+            <a:r>
+              <a:rPr lang="en-US" sz="4400" b="0" u="none" strike="noStrike">
+                <a:solidFill>
+                  <a:schemeClr val="dk1"/>
+                </a:solidFill>
+                <a:effectLst/>
+                <a:uFillTx/>
+                <a:latin typeface="Calibri"/>
+              </a:rPr>
+              <a:t>Click to edit Master title style</a:t>
+            </a:r>
+            <a:endParaRPr lang="en-US" sz="4400" b="0" u="none" strike="noStrike">
+              <a:solidFill>
+                <a:schemeClr val="dk1"/>
+              </a:solidFill>
+              <a:effectLst/>
+              <a:uFillTx/>
+              <a:latin typeface="Calibri"/>
+            </a:endParaRPr>
+          </a:p>
+        </p:txBody>
+      </p:sp>
+      <p:sp>
+        <p:nvSpPr>
+          <p:cNvPr id="51" name="PlaceHolder 2"/>
+          <p:cNvSpPr>
+            <a:spLocks noGrp="1"/>
+          </p:cNvSpPr>
+          <p:nvPr>
+            <p:ph type="body"/>
+          </p:nvPr>
+        </p:nvSpPr>
+        <p:spPr>
+          <a:xfrm>
+            <a:off x="457200" y="1535040"/>
+            <a:ext cx="4039560" cy="639000"/>
           </a:xfrm>
           <a:prstGeom prst="rect">
             <a:avLst/>
@@ -780,8 +930,14 @@
               <a:lnSpc>
                 <a:spcPct val="100000"/>
               </a:lnSpc>
+              <a:spcBef>
+                <a:spcPts val="479"/>
+              </a:spcBef>
               <a:buNone/>
-              <a:defRPr lang="en-US" sz="2000" b="1" u="none" strike="noStrike">
+              <a:tabLst>
+                <a:tab pos="0" algn="l"/>
+              </a:tabLst>
+              <a:defRPr lang="en-US" sz="2400" b="1" u="none" strike="noStrike">
                 <a:solidFill>
                   <a:schemeClr val="dk1"/>
                 </a:solidFill>
@@ -796,20 +952,26 @@
               <a:lnSpc>
                 <a:spcPct val="100000"/>
               </a:lnSpc>
+              <a:spcBef>
+                <a:spcPts val="479"/>
+              </a:spcBef>
               <a:buNone/>
-            </a:pPr>
-            <a:r>
-              <a:rPr lang="en-US" sz="2000" b="1" u="none" strike="noStrike">
-                <a:solidFill>
-                  <a:schemeClr val="dk1"/>
-                </a:solidFill>
-                <a:effectLst/>
-                <a:uFillTx/>
-                <a:latin typeface="Calibri"/>
-              </a:rPr>
-              <a:t>Click to edit Master title style</a:t>
-            </a:r>
-            <a:endParaRPr lang="en-US" sz="2000" b="1" u="none" strike="noStrike">
+              <a:tabLst>
+                <a:tab pos="0" algn="l"/>
+              </a:tabLst>
+            </a:pPr>
+            <a:r>
+              <a:rPr lang="en-US" sz="2400" b="1" u="none" strike="noStrike">
+                <a:solidFill>
+                  <a:schemeClr val="dk1"/>
+                </a:solidFill>
+                <a:effectLst/>
+                <a:uFillTx/>
+                <a:latin typeface="Calibri"/>
+              </a:rPr>
+              <a:t>Click to edit Master text styles</a:t>
+            </a:r>
+            <a:endParaRPr lang="en-US" sz="2400" b="0" u="none" strike="noStrike">
               <a:solidFill>
                 <a:schemeClr val="dk1"/>
               </a:solidFill>
@@ -822,7 +984,7 @@
       </p:sp>
       <p:sp>
         <p:nvSpPr>
-          <p:cNvPr id="52" name="PlaceHolder 2"/>
+          <p:cNvPr id="52" name="PlaceHolder 3"/>
           <p:cNvSpPr>
             <a:spLocks noGrp="1"/>
           </p:cNvSpPr>
@@ -832,8 +994,8 @@
         </p:nvSpPr>
         <p:spPr>
           <a:xfrm>
-            <a:off x="3575160" y="272880"/>
-            <a:ext cx="5111280" cy="5852880"/>
+            <a:off x="457200" y="2174760"/>
+            <a:ext cx="4039560" cy="3950640"/>
           </a:xfrm>
           <a:prstGeom prst="rect">
             <a:avLst/>
@@ -853,14 +1015,17 @@
                 <a:spcPct val="100000"/>
               </a:lnSpc>
               <a:spcBef>
-                <a:spcPts val="641"/>
+                <a:spcPts val="479"/>
               </a:spcBef>
               <a:buClr>
                 <a:srgbClr val="000000"/>
               </a:buClr>
               <a:buFont typeface="Arial"/>
               <a:buChar char="•"/>
-              <a:defRPr lang="en-US" sz="3200" b="0" u="none" strike="noStrike">
+              <a:tabLst>
+                <a:tab pos="0" algn="l"/>
+              </a:tabLst>
+              <a:defRPr lang="en-US" sz="2400" b="0" u="none" strike="noStrike">
                 <a:solidFill>
                   <a:schemeClr val="dk1"/>
                 </a:solidFill>
@@ -874,14 +1039,17 @@
                 <a:spcPct val="100000"/>
               </a:lnSpc>
               <a:spcBef>
-                <a:spcPts val="561"/>
+                <a:spcPts val="400"/>
               </a:spcBef>
               <a:buClr>
                 <a:srgbClr val="000000"/>
               </a:buClr>
               <a:buFont typeface="Arial"/>
               <a:buChar char="–"/>
-              <a:defRPr lang="en-US" sz="2800" b="0" u="none" strike="noStrike">
+              <a:tabLst>
+                <a:tab pos="0" algn="l"/>
+              </a:tabLst>
+              <a:defRPr lang="en-US" sz="2000" b="0" u="none" strike="noStrike">
                 <a:solidFill>
                   <a:schemeClr val="dk1"/>
                 </a:solidFill>
@@ -895,14 +1063,17 @@
                 <a:spcPct val="100000"/>
               </a:lnSpc>
               <a:spcBef>
-                <a:spcPts val="479"/>
+                <a:spcPts val="360"/>
               </a:spcBef>
               <a:buClr>
                 <a:srgbClr val="000000"/>
               </a:buClr>
               <a:buFont typeface="Arial"/>
               <a:buChar char="•"/>
-              <a:defRPr lang="en-US" sz="2400" b="0" u="none" strike="noStrike">
+              <a:tabLst>
+                <a:tab pos="0" algn="l"/>
+              </a:tabLst>
+              <a:defRPr lang="en-US" sz="1800" b="0" u="none" strike="noStrike">
                 <a:solidFill>
                   <a:schemeClr val="dk1"/>
                 </a:solidFill>
@@ -916,14 +1087,17 @@
                 <a:spcPct val="100000"/>
               </a:lnSpc>
               <a:spcBef>
-                <a:spcPts val="400"/>
+                <a:spcPts val="320"/>
               </a:spcBef>
               <a:buClr>
                 <a:srgbClr val="000000"/>
               </a:buClr>
               <a:buFont typeface="Arial"/>
               <a:buChar char="–"/>
-              <a:defRPr lang="en-US" sz="2000" b="0" u="none" strike="noStrike">
+              <a:tabLst>
+                <a:tab pos="0" algn="l"/>
+              </a:tabLst>
+              <a:defRPr lang="en-US" sz="1600" b="0" u="none" strike="noStrike">
                 <a:solidFill>
                   <a:schemeClr val="dk1"/>
                 </a:solidFill>
@@ -937,14 +1111,17 @@
                 <a:spcPct val="100000"/>
               </a:lnSpc>
               <a:spcBef>
-                <a:spcPts val="400"/>
+                <a:spcPts val="320"/>
               </a:spcBef>
               <a:buClr>
                 <a:srgbClr val="000000"/>
               </a:buClr>
               <a:buFont typeface="Arial"/>
               <a:buChar char="»"/>
-              <a:defRPr lang="en-US" sz="2000" b="0" u="none" strike="noStrike">
+              <a:tabLst>
+                <a:tab pos="0" algn="l"/>
+              </a:tabLst>
+              <a:defRPr lang="en-US" sz="1600" b="0" u="none" strike="noStrike">
                 <a:solidFill>
                   <a:schemeClr val="dk1"/>
                 </a:solidFill>
@@ -960,16 +1137,19 @@
                 <a:spcPct val="100000"/>
               </a:lnSpc>
               <a:spcBef>
-                <a:spcPts val="641"/>
+                <a:spcPts val="479"/>
               </a:spcBef>
               <a:buClr>
                 <a:srgbClr val="000000"/>
               </a:buClr>
               <a:buFont typeface="Arial"/>
               <a:buChar char="•"/>
-            </a:pPr>
-            <a:r>
-              <a:rPr lang="en-US" sz="3200" b="0" u="none" strike="noStrike">
+              <a:tabLst>
+                <a:tab pos="0" algn="l"/>
+              </a:tabLst>
+            </a:pPr>
+            <a:r>
+              <a:rPr lang="en-US" sz="2400" b="0" u="none" strike="noStrike">
                 <a:solidFill>
                   <a:schemeClr val="dk1"/>
                 </a:solidFill>
@@ -979,7 +1159,7 @@
               </a:rPr>
               <a:t>Click to edit Master text styles</a:t>
             </a:r>
-            <a:endParaRPr lang="en-US" sz="3200" b="0" u="none" strike="noStrike">
+            <a:endParaRPr lang="en-US" sz="2400" b="0" u="none" strike="noStrike">
               <a:solidFill>
                 <a:schemeClr val="dk1"/>
               </a:solidFill>
@@ -994,16 +1174,19 @@
                 <a:spcPct val="100000"/>
               </a:lnSpc>
               <a:spcBef>
-                <a:spcPts val="561"/>
+                <a:spcPts val="400"/>
               </a:spcBef>
               <a:buClr>
                 <a:srgbClr val="000000"/>
               </a:buClr>
               <a:buFont typeface="Arial"/>
               <a:buChar char="–"/>
-            </a:pPr>
-            <a:r>
-              <a:rPr lang="en-US" sz="2800" b="0" u="none" strike="noStrike">
+              <a:tabLst>
+                <a:tab pos="0" algn="l"/>
+              </a:tabLst>
+            </a:pPr>
+            <a:r>
+              <a:rPr lang="en-US" sz="2000" b="0" u="none" strike="noStrike">
                 <a:solidFill>
                   <a:schemeClr val="dk1"/>
                 </a:solidFill>
@@ -1013,7 +1196,7 @@
               </a:rPr>
               <a:t>Second level</a:t>
             </a:r>
-            <a:endParaRPr lang="en-US" sz="2800" b="0" u="none" strike="noStrike">
+            <a:endParaRPr lang="en-US" sz="2000" b="0" u="none" strike="noStrike">
               <a:solidFill>
                 <a:schemeClr val="dk1"/>
               </a:solidFill>
@@ -1028,16 +1211,19 @@
                 <a:spcPct val="100000"/>
               </a:lnSpc>
               <a:spcBef>
-                <a:spcPts val="479"/>
+                <a:spcPts val="360"/>
               </a:spcBef>
               <a:buClr>
                 <a:srgbClr val="000000"/>
               </a:buClr>
               <a:buFont typeface="Arial"/>
               <a:buChar char="•"/>
-            </a:pPr>
-            <a:r>
-              <a:rPr lang="en-US" sz="2400" b="0" u="none" strike="noStrike">
+              <a:tabLst>
+                <a:tab pos="0" algn="l"/>
+              </a:tabLst>
+            </a:pPr>
+            <a:r>
+              <a:rPr lang="en-US" sz="1800" b="0" u="none" strike="noStrike">
                 <a:solidFill>
                   <a:schemeClr val="dk1"/>
                 </a:solidFill>
@@ -1047,7 +1233,7 @@
               </a:rPr>
               <a:t>Third level</a:t>
             </a:r>
-            <a:endParaRPr lang="en-US" sz="2400" b="0" u="none" strike="noStrike">
+            <a:endParaRPr lang="en-US" sz="1800" b="0" u="none" strike="noStrike">
               <a:solidFill>
                 <a:schemeClr val="dk1"/>
               </a:solidFill>
@@ -1062,16 +1248,19 @@
                 <a:spcPct val="100000"/>
               </a:lnSpc>
               <a:spcBef>
-                <a:spcPts val="400"/>
+                <a:spcPts val="320"/>
               </a:spcBef>
               <a:buClr>
                 <a:srgbClr val="000000"/>
               </a:buClr>
               <a:buFont typeface="Arial"/>
               <a:buChar char="–"/>
-            </a:pPr>
-            <a:r>
-              <a:rPr lang="en-US" sz="2000" b="0" u="none" strike="noStrike">
+              <a:tabLst>
+                <a:tab pos="0" algn="l"/>
+              </a:tabLst>
+            </a:pPr>
+            <a:r>
+              <a:rPr lang="en-US" sz="1600" b="0" u="none" strike="noStrike">
                 <a:solidFill>
                   <a:schemeClr val="dk1"/>
                 </a:solidFill>
@@ -1081,7 +1270,7 @@
               </a:rPr>
               <a:t>Fourth level</a:t>
             </a:r>
-            <a:endParaRPr lang="en-US" sz="2000" b="0" u="none" strike="noStrike">
+            <a:endParaRPr lang="en-US" sz="1600" b="0" u="none" strike="noStrike">
               <a:solidFill>
                 <a:schemeClr val="dk1"/>
               </a:solidFill>
@@ -1096,16 +1285,19 @@
                 <a:spcPct val="100000"/>
               </a:lnSpc>
               <a:spcBef>
-                <a:spcPts val="400"/>
+                <a:spcPts val="320"/>
               </a:spcBef>
               <a:buClr>
                 <a:srgbClr val="000000"/>
               </a:buClr>
               <a:buFont typeface="Arial"/>
               <a:buChar char="»"/>
-            </a:pPr>
-            <a:r>
-              <a:rPr lang="en-US" sz="2000" b="0" u="none" strike="noStrike">
+              <a:tabLst>
+                <a:tab pos="0" algn="l"/>
+              </a:tabLst>
+            </a:pPr>
+            <a:r>
+              <a:rPr lang="en-US" sz="1600" b="0" u="none" strike="noStrike">
                 <a:solidFill>
                   <a:schemeClr val="dk1"/>
                 </a:solidFill>
@@ -1115,7 +1307,7 @@
               </a:rPr>
               <a:t>Fifth level</a:t>
             </a:r>
-            <a:endParaRPr lang="en-US" sz="2000" b="0" u="none" strike="noStrike">
+            <a:endParaRPr lang="en-US" sz="1600" b="0" u="none" strike="noStrike">
               <a:solidFill>
                 <a:schemeClr val="dk1"/>
               </a:solidFill>
@@ -1128,7 +1320,7 @@
       </p:sp>
       <p:sp>
         <p:nvSpPr>
-          <p:cNvPr id="53" name="PlaceHolder 3"/>
+          <p:cNvPr id="53" name="PlaceHolder 4"/>
           <p:cNvSpPr>
             <a:spLocks noGrp="1"/>
           </p:cNvSpPr>
@@ -1138,8 +1330,92 @@
         </p:nvSpPr>
         <p:spPr>
           <a:xfrm>
-            <a:off x="457200" y="1434960"/>
-            <a:ext cx="3007800" cy="4690800"/>
+            <a:off x="4645080" y="1535040"/>
+            <a:ext cx="4041000" cy="639000"/>
+          </a:xfrm>
+          <a:prstGeom prst="rect">
+            <a:avLst/>
+          </a:prstGeom>
+          <a:noFill/>
+          <a:ln w="0">
+            <a:noFill/>
+          </a:ln>
+        </p:spPr>
+        <p:txBody>
+          <a:bodyPr lIns="91440" tIns="45720" rIns="91440" bIns="45720" anchor="b">
+            <a:noAutofit/>
+          </a:bodyPr>
+          <a:lstStyle>
+            <a:lvl1pPr indent="0" algn="l" defTabSz="457200">
+              <a:lnSpc>
+                <a:spcPct val="100000"/>
+              </a:lnSpc>
+              <a:spcBef>
+                <a:spcPts val="479"/>
+              </a:spcBef>
+              <a:buNone/>
+              <a:tabLst>
+                <a:tab pos="0" algn="l"/>
+              </a:tabLst>
+              <a:defRPr lang="en-US" sz="2400" b="1" u="none" strike="noStrike">
+                <a:solidFill>
+                  <a:schemeClr val="dk1"/>
+                </a:solidFill>
+                <a:effectLst/>
+                <a:uFillTx/>
+                <a:latin typeface="Calibri"/>
+              </a:defRPr>
+            </a:lvl1pPr>
+          </a:lstStyle>
+          <a:p>
+            <a:pPr indent="0" algn="l" defTabSz="457200">
+              <a:lnSpc>
+                <a:spcPct val="100000"/>
+              </a:lnSpc>
+              <a:spcBef>
+                <a:spcPts val="479"/>
+              </a:spcBef>
+              <a:buNone/>
+              <a:tabLst>
+                <a:tab pos="0" algn="l"/>
+              </a:tabLst>
+            </a:pPr>
+            <a:r>
+              <a:rPr lang="en-US" sz="2400" b="1" u="none" strike="noStrike">
+                <a:solidFill>
+                  <a:schemeClr val="dk1"/>
+                </a:solidFill>
+                <a:effectLst/>
+                <a:uFillTx/>
+                <a:latin typeface="Calibri"/>
+              </a:rPr>
+              <a:t>Click to edit Master text styles</a:t>
+            </a:r>
+            <a:endParaRPr lang="en-US" sz="2400" b="0" u="none" strike="noStrike">
+              <a:solidFill>
+                <a:schemeClr val="dk1"/>
+              </a:solidFill>
+              <a:effectLst/>
+              <a:uFillTx/>
+              <a:latin typeface="Calibri"/>
+            </a:endParaRPr>
+          </a:p>
+        </p:txBody>
+      </p:sp>
+      <p:sp>
+        <p:nvSpPr>
+          <p:cNvPr id="54" name="PlaceHolder 5"/>
+          <p:cNvSpPr>
+            <a:spLocks noGrp="1"/>
+          </p:cNvSpPr>
+          <p:nvPr>
+            <p:ph type="body"/>
+          </p:nvPr>
+        </p:nvSpPr>
+        <p:spPr>
+          <a:xfrm>
+            <a:off x="4645080" y="2174760"/>
+            <a:ext cx="4041000" cy="3950640"/>
           </a:xfrm>
           <a:prstGeom prst="rect">
             <a:avLst/>
@@ -1154,18 +1430,22 @@
             <a:noAutofit/>
           </a:bodyPr>
           <a:lstStyle>
-            <a:lvl1pPr indent="0" algn="l" defTabSz="457200">
-              <a:lnSpc>
-                <a:spcPct val="100000"/>
-              </a:lnSpc>
-              <a:spcBef>
-                <a:spcPts val="281"/>
-              </a:spcBef>
-              <a:buNone/>
-              <a:tabLst>
-                <a:tab pos="0" algn="l"/>
-              </a:tabLst>
-              <a:defRPr lang="en-US" sz="1400" b="0" u="none" strike="noStrike">
+            <a:lvl1pPr algn="l" defTabSz="457200">
+              <a:lnSpc>
+                <a:spcPct val="100000"/>
+              </a:lnSpc>
+              <a:spcBef>
+                <a:spcPts val="479"/>
+              </a:spcBef>
+              <a:buClr>
+                <a:srgbClr val="000000"/>
+              </a:buClr>
+              <a:buFont typeface="Arial"/>
+              <a:buChar char="•"/>
+              <a:tabLst>
+                <a:tab pos="0" algn="l"/>
+              </a:tabLst>
+              <a:defRPr lang="en-US" sz="2400" b="0" u="none" strike="noStrike">
                 <a:solidFill>
                   <a:schemeClr val="dk1"/>
                 </a:solidFill>
@@ -1174,22 +1454,122 @@
                 <a:latin typeface="Calibri"/>
               </a:defRPr>
             </a:lvl1pPr>
+            <a:lvl2pPr lvl="1" algn="l" defTabSz="457200">
+              <a:lnSpc>
+                <a:spcPct val="100000"/>
+              </a:lnSpc>
+              <a:spcBef>
+                <a:spcPts val="400"/>
+              </a:spcBef>
+              <a:buClr>
+                <a:srgbClr val="000000"/>
+              </a:buClr>
+              <a:buFont typeface="Arial"/>
+              <a:buChar char="–"/>
+              <a:tabLst>
+                <a:tab pos="0" algn="l"/>
+              </a:tabLst>
+              <a:defRPr lang="en-US" sz="2000" b="0" u="none" strike="noStrike">
+                <a:solidFill>
+                  <a:schemeClr val="dk1"/>
+                </a:solidFill>
+                <a:effectLst/>
+                <a:uFillTx/>
+                <a:latin typeface="Calibri"/>
+              </a:defRPr>
+            </a:lvl2pPr>
+            <a:lvl3pPr lvl="2" algn="l" defTabSz="457200">
+              <a:lnSpc>
+                <a:spcPct val="100000"/>
+              </a:lnSpc>
+              <a:spcBef>
+                <a:spcPts val="360"/>
+              </a:spcBef>
+              <a:buClr>
+                <a:srgbClr val="000000"/>
+              </a:buClr>
+              <a:buFont typeface="Arial"/>
+              <a:buChar char="•"/>
+              <a:tabLst>
+                <a:tab pos="0" algn="l"/>
+              </a:tabLst>
+              <a:defRPr lang="en-US" sz="1800" b="0" u="none" strike="noStrike">
+                <a:solidFill>
+                  <a:schemeClr val="dk1"/>
+                </a:solidFill>
+                <a:effectLst/>
+                <a:uFillTx/>
+                <a:latin typeface="Calibri"/>
+              </a:defRPr>
+            </a:lvl3pPr>
+            <a:lvl4pPr lvl="3" algn="l" defTabSz="457200">
+              <a:lnSpc>
+                <a:spcPct val="100000"/>
+              </a:lnSpc>
+              <a:spcBef>
+                <a:spcPts val="320"/>
+              </a:spcBef>
+              <a:buClr>
+                <a:srgbClr val="000000"/>
+              </a:buClr>
+              <a:buFont typeface="Arial"/>
+              <a:buChar char="–"/>
+              <a:tabLst>
+                <a:tab pos="0" algn="l"/>
+              </a:tabLst>
+              <a:defRPr lang="en-US" sz="1600" b="0" u="none" strike="noStrike">
+                <a:solidFill>
+                  <a:schemeClr val="dk1"/>
+                </a:solidFill>
+                <a:effectLst/>
+                <a:uFillTx/>
+                <a:latin typeface="Calibri"/>
+              </a:defRPr>
+            </a:lvl4pPr>
+            <a:lvl5pPr lvl="4" algn="l" defTabSz="457200">
+              <a:lnSpc>
+                <a:spcPct val="100000"/>
+              </a:lnSpc>
+              <a:spcBef>
+                <a:spcPts val="320"/>
+              </a:spcBef>
+              <a:buClr>
+                <a:srgbClr val="000000"/>
+              </a:buClr>
+              <a:buFont typeface="Arial"/>
+              <a:buChar char="»"/>
+              <a:tabLst>
+                <a:tab pos="0" algn="l"/>
+              </a:tabLst>
+              <a:defRPr lang="en-US" sz="1600" b="0" u="none" strike="noStrike">
+                <a:solidFill>
+                  <a:schemeClr val="dk1"/>
+                </a:solidFill>
+                <a:effectLst/>
+                <a:uFillTx/>
+                <a:latin typeface="Calibri"/>
+              </a:defRPr>
+            </a:lvl5pPr>
           </a:lstStyle>
           <a:p>
-            <a:pPr indent="0" algn="l" defTabSz="457200">
-              <a:lnSpc>
-                <a:spcPct val="100000"/>
-              </a:lnSpc>
-              <a:spcBef>
-                <a:spcPts val="281"/>
-              </a:spcBef>
-              <a:buNone/>
-              <a:tabLst>
-                <a:tab pos="0" algn="l"/>
-              </a:tabLst>
-            </a:pPr>
-            <a:r>
-              <a:rPr lang="en-US" sz="1400" b="0" u="none" strike="noStrike">
+            <a:pPr marL="343080" indent="-343080" algn="l" defTabSz="457200">
+              <a:lnSpc>
+                <a:spcPct val="100000"/>
+              </a:lnSpc>
+              <a:spcBef>
+                <a:spcPts val="479"/>
+              </a:spcBef>
+              <a:buClr>
+                <a:srgbClr val="000000"/>
+              </a:buClr>
+              <a:buFont typeface="Arial"/>
+              <a:buChar char="•"/>
+              <a:tabLst>
+                <a:tab pos="0" algn="l"/>
+              </a:tabLst>
+            </a:pPr>
+            <a:r>
+              <a:rPr lang="en-US" sz="2400" b="0" u="none" strike="noStrike">
                 <a:solidFill>
                   <a:schemeClr val="dk1"/>
                 </a:solidFill>
@@ -1199,7 +1579,155 @@
               </a:rPr>
               <a:t>Click to edit Master text styles</a:t>
             </a:r>
-            <a:endParaRPr lang="en-US" sz="1400" b="0" u="none" strike="noStrike">
+            <a:endParaRPr lang="en-US" sz="2400" b="0" u="none" strike="noStrike">
+              <a:solidFill>
+                <a:schemeClr val="dk1"/>
+              </a:solidFill>
+              <a:effectLst/>
+              <a:uFillTx/>
+              <a:latin typeface="Calibri"/>
+            </a:endParaRPr>
+          </a:p>
+          <a:p>
+            <a:pPr marL="743040" lvl="1" indent="-285840" algn="l" defTabSz="457200">
+              <a:lnSpc>
+                <a:spcPct val="100000"/>
+              </a:lnSpc>
+              <a:spcBef>
+                <a:spcPts val="400"/>
+              </a:spcBef>
+              <a:buClr>
+                <a:srgbClr val="000000"/>
+              </a:buClr>
+              <a:buFont typeface="Arial"/>
+              <a:buChar char="–"/>
+              <a:tabLst>
+                <a:tab pos="0" algn="l"/>
+              </a:tabLst>
+            </a:pPr>
+            <a:r>
+              <a:rPr lang="en-US" sz="2000" b="0" u="none" strike="noStrike">
+                <a:solidFill>
+                  <a:schemeClr val="dk1"/>
+                </a:solidFill>
+                <a:effectLst/>
+                <a:uFillTx/>
+                <a:latin typeface="Calibri"/>
+              </a:rPr>
+              <a:t>Second level</a:t>
+            </a:r>
+            <a:endParaRPr lang="en-US" sz="2000" b="0" u="none" strike="noStrike">
+              <a:solidFill>
+                <a:schemeClr val="dk1"/>
+              </a:solidFill>
+              <a:effectLst/>
+              <a:uFillTx/>
+              <a:latin typeface="Calibri"/>
+            </a:endParaRPr>
+          </a:p>
+          <a:p>
+            <a:pPr marL="1143000" lvl="2" indent="-228600" algn="l" defTabSz="457200">
+              <a:lnSpc>
+                <a:spcPct val="100000"/>
+              </a:lnSpc>
+              <a:spcBef>
+                <a:spcPts val="360"/>
+              </a:spcBef>
+              <a:buClr>
+                <a:srgbClr val="000000"/>
+              </a:buClr>
+              <a:buFont typeface="Arial"/>
+              <a:buChar char="•"/>
+              <a:tabLst>
+                <a:tab pos="0" algn="l"/>
+              </a:tabLst>
+            </a:pPr>
+            <a:r>
+              <a:rPr lang="en-US" sz="1800" b="0" u="none" strike="noStrike">
+                <a:solidFill>
+                  <a:schemeClr val="dk1"/>
+                </a:solidFill>
+                <a:effectLst/>
+                <a:uFillTx/>
+                <a:latin typeface="Calibri"/>
+              </a:rPr>
+              <a:t>Third level</a:t>
+            </a:r>
+            <a:endParaRPr lang="en-US" sz="1800" b="0" u="none" strike="noStrike">
+              <a:solidFill>
+                <a:schemeClr val="dk1"/>
+              </a:solidFill>
+              <a:effectLst/>
+              <a:uFillTx/>
+              <a:latin typeface="Calibri"/>
+            </a:endParaRPr>
+          </a:p>
+          <a:p>
+            <a:pPr marL="1600200" lvl="3" indent="-228600" algn="l" defTabSz="457200">
+              <a:lnSpc>
+                <a:spcPct val="100000"/>
+              </a:lnSpc>
+              <a:spcBef>
+                <a:spcPts val="320"/>
+              </a:spcBef>
+              <a:buClr>
+                <a:srgbClr val="000000"/>
+              </a:buClr>
+              <a:buFont typeface="Arial"/>
+              <a:buChar char="–"/>
+              <a:tabLst>
+                <a:tab pos="0" algn="l"/>
+              </a:tabLst>
+            </a:pPr>
+            <a:r>
+              <a:rPr lang="en-US" sz="1600" b="0" u="none" strike="noStrike">
+                <a:solidFill>
+                  <a:schemeClr val="dk1"/>
+                </a:solidFill>
+                <a:effectLst/>
+                <a:uFillTx/>
+                <a:latin typeface="Calibri"/>
+              </a:rPr>
+              <a:t>Fourth level</a:t>
+            </a:r>
+            <a:endParaRPr lang="en-US" sz="1600" b="0" u="none" strike="noStrike">
+              <a:solidFill>
+                <a:schemeClr val="dk1"/>
+              </a:solidFill>
+              <a:effectLst/>
+              <a:uFillTx/>
+              <a:latin typeface="Calibri"/>
+            </a:endParaRPr>
+          </a:p>
+          <a:p>
+            <a:pPr marL="2057400" lvl="4" indent="-228600" algn="l" defTabSz="457200">
+              <a:lnSpc>
+                <a:spcPct val="100000"/>
+              </a:lnSpc>
+              <a:spcBef>
+                <a:spcPts val="320"/>
+              </a:spcBef>
+              <a:buClr>
+                <a:srgbClr val="000000"/>
+              </a:buClr>
+              <a:buFont typeface="Arial"/>
+              <a:buChar char="»"/>
+              <a:tabLst>
+                <a:tab pos="0" algn="l"/>
+              </a:tabLst>
+            </a:pPr>
+            <a:r>
+              <a:rPr lang="en-US" sz="1600" b="0" u="none" strike="noStrike">
+                <a:solidFill>
+                  <a:schemeClr val="dk1"/>
+                </a:solidFill>
+                <a:effectLst/>
+                <a:uFillTx/>
+                <a:latin typeface="Calibri"/>
+              </a:rPr>
+              <a:t>Fifth level</a:t>
+            </a:r>
+            <a:endParaRPr lang="en-US" sz="1600" b="0" u="none" strike="noStrike">
               <a:solidFill>
                 <a:schemeClr val="dk1"/>
               </a:solidFill>
@@ -1212,7 +1740,7 @@
       </p:sp>
       <p:sp>
         <p:nvSpPr>
-          <p:cNvPr id="54" name="PlaceHolder 4"/>
+          <p:cNvPr id="55" name="PlaceHolder 6"/>
           <p:cNvSpPr>
             <a:spLocks noGrp="1"/>
           </p:cNvSpPr>
@@ -1223,7 +1751,7 @@
         <p:spPr>
           <a:xfrm>
             <a:off x="457200" y="6356520"/>
-            <a:ext cx="2133360" cy="364680"/>
+            <a:ext cx="2133000" cy="364320"/>
           </a:xfrm>
           <a:prstGeom prst="rect">
             <a:avLst/>
@@ -1243,6 +1771,9 @@
                 <a:spcPct val="100000"/>
               </a:lnSpc>
               <a:buNone/>
+              <a:tabLst>
+                <a:tab pos="0" algn="l"/>
+              </a:tabLst>
               <a:defRPr lang="en-US" sz="1200" b="0" u="none" strike="noStrike">
                 <a:solidFill>
                   <a:schemeClr val="dk1">
@@ -1261,6 +1792,9 @@
                 <a:spcPct val="100000"/>
               </a:lnSpc>
               <a:buNone/>
+              <a:tabLst>
+                <a:tab pos="0" algn="l"/>
+              </a:tabLst>
             </a:pPr>
             <a:r>
               <a:rPr lang="en-US" sz="1200" b="0" u="none" strike="noStrike">
@@ -1288,7 +1822,7 @@
       </p:sp>
       <p:sp>
         <p:nvSpPr>
-          <p:cNvPr id="55" name="PlaceHolder 5"/>
+          <p:cNvPr id="56" name="PlaceHolder 7"/>
           <p:cNvSpPr>
             <a:spLocks noGrp="1"/>
           </p:cNvSpPr>
@@ -1299,7 +1833,7 @@
         <p:spPr>
           <a:xfrm>
             <a:off x="3124080" y="6356520"/>
-            <a:ext cx="2895120" cy="364680"/>
+            <a:ext cx="2894760" cy="364320"/>
           </a:xfrm>
           <a:prstGeom prst="rect">
             <a:avLst/>
@@ -1315,7 +1849,13 @@
           </a:bodyPr>
           <a:lstStyle>
             <a:lvl1pPr indent="0" algn="ctr">
+              <a:lnSpc>
+                <a:spcPct val="100000"/>
+              </a:lnSpc>
               <a:buNone/>
+              <a:tabLst>
+                <a:tab pos="0" algn="l"/>
+              </a:tabLst>
               <a:defRPr lang="en-US" sz="1400" b="0" u="none" strike="noStrike">
                 <a:solidFill>
                   <a:srgbClr val="000000"/>
@@ -1328,7 +1868,13 @@
           </a:lstStyle>
           <a:p>
             <a:pPr indent="0" algn="ctr">
+              <a:lnSpc>
+                <a:spcPct val="100000"/>
+              </a:lnSpc>
               <a:buNone/>
+              <a:tabLst>
+                <a:tab pos="0" algn="l"/>
+              </a:tabLst>
             </a:pPr>
             <a:r>
               <a:rPr lang="en-US" sz="1400" b="0" u="none" strike="noStrike">
@@ -1354,7 +1900,7 @@
       </p:sp>
       <p:sp>
         <p:nvSpPr>
-          <p:cNvPr id="56" name="PlaceHolder 6"/>
+          <p:cNvPr id="57" name="PlaceHolder 8"/>
           <p:cNvSpPr>
             <a:spLocks noGrp="1"/>
           </p:cNvSpPr>
@@ -1365,7 +1911,7 @@
         <p:spPr>
           <a:xfrm>
             <a:off x="6553080" y="6356520"/>
-            <a:ext cx="2133360" cy="364680"/>
+            <a:ext cx="2133000" cy="364320"/>
           </a:xfrm>
           <a:prstGeom prst="rect">
             <a:avLst/>
@@ -1385,6 +1931,9 @@
                 <a:spcPct val="100000"/>
               </a:lnSpc>
               <a:buNone/>
+              <a:tabLst>
+                <a:tab pos="0" algn="l"/>
+              </a:tabLst>
               <a:defRPr lang="en-US" sz="1200" b="0" u="none" strike="noStrike">
                 <a:solidFill>
                   <a:schemeClr val="dk1">
@@ -1403,8 +1952,11 @@
                 <a:spcPct val="100000"/>
               </a:lnSpc>
               <a:buNone/>
-            </a:pPr>
-            <a:fld id="{3CEC9906-F145-4F7E-988B-0E5630E3A015}" type="slidenum">
+              <a:tabLst>
+                <a:tab pos="0" algn="l"/>
+              </a:tabLst>
+            </a:pPr>
+            <a:fld id="{1E3D2EC4-18B3-4318-A11F-233C65E415B3}" type="slidenum">
               <a:rPr lang="en-US" sz="1200" b="0" u="none" strike="noStrike">
                 <a:solidFill>
                   <a:schemeClr val="dk1">
@@ -1434,8 +1986,8 @@
 </file>
 
 <file path=ppt/slideLayouts/slideLayout11.xml><?xml version="1.0" encoding="utf-8"?>
-<p:sldLayout xmlns:a="http://schemas.openxmlformats.org/drawingml/2006/main" xmlns:p="http://schemas.openxmlformats.org/presentationml/2006/main" xmlns:r="http://schemas.openxmlformats.org/officeDocument/2006/relationships" xmlns:p14="http://schemas.microsoft.com/office/powerpoint/2010/main" xmlns:p15="http://schemas.microsoft.com/office/powerpoint/2012/main" xmlns:mc="http://schemas.openxmlformats.org/markup-compatibility/2006" type="blank" preserve="1">
-  <p:cSld name="Picture with Caption">
+<p:sldLayout xmlns:a="http://schemas.openxmlformats.org/drawingml/2006/main" xmlns:p="http://schemas.openxmlformats.org/presentationml/2006/main" xmlns:r="http://schemas.openxmlformats.org/officeDocument/2006/relationships" xmlns:p14="http://schemas.microsoft.com/office/powerpoint/2010/main" xmlns:p15="http://schemas.microsoft.com/office/powerpoint/2012/main" xmlns:mc="http://schemas.openxmlformats.org/markup-compatibility/2006" type="titleOnly" preserve="1">
+  <p:cSld name="Title Only">
     <p:bg>
       <p:bgPr>
         <a:solidFill>
@@ -1459,7 +2011,7 @@
       </p:grpSpPr>
       <p:sp>
         <p:nvSpPr>
-          <p:cNvPr id="57" name="PlaceHolder 1"/>
+          <p:cNvPr id="58" name="PlaceHolder 1"/>
           <p:cNvSpPr>
             <a:spLocks noGrp="1"/>
           </p:cNvSpPr>
@@ -1469,8 +2021,8 @@
         </p:nvSpPr>
         <p:spPr>
           <a:xfrm>
-            <a:off x="1792440" y="4800600"/>
-            <a:ext cx="5486040" cy="566280"/>
+            <a:off x="457200" y="274680"/>
+            <a:ext cx="8228880" cy="1142280"/>
           </a:xfrm>
           <a:prstGeom prst="rect">
             <a:avLst/>
@@ -1481,16 +2033,19 @@
           </a:ln>
         </p:spPr>
         <p:txBody>
-          <a:bodyPr lIns="91440" tIns="45720" rIns="91440" bIns="45720" anchor="b">
+          <a:bodyPr lIns="91440" tIns="45720" rIns="91440" bIns="45720" anchor="ctr">
             <a:noAutofit/>
           </a:bodyPr>
           <a:lstStyle>
-            <a:lvl1pPr indent="0" algn="l" defTabSz="457200">
+            <a:lvl1pPr indent="0" algn="ctr" defTabSz="457200">
               <a:lnSpc>
                 <a:spcPct val="100000"/>
               </a:lnSpc>
               <a:buNone/>
-              <a:defRPr lang="en-US" sz="2000" b="1" u="none" strike="noStrike">
+              <a:tabLst>
+                <a:tab pos="0" algn="l"/>
+              </a:tabLst>
+              <a:defRPr lang="en-US" sz="4400" b="0" u="none" strike="noStrike">
                 <a:solidFill>
                   <a:schemeClr val="dk1"/>
                 </a:solidFill>
@@ -1501,14 +2056,17 @@
             </a:lvl1pPr>
           </a:lstStyle>
           <a:p>
-            <a:pPr indent="0" algn="l" defTabSz="457200">
+            <a:pPr indent="0" algn="ctr" defTabSz="457200">
               <a:lnSpc>
                 <a:spcPct val="100000"/>
               </a:lnSpc>
               <a:buNone/>
-            </a:pPr>
-            <a:r>
-              <a:rPr lang="en-US" sz="2000" b="1" u="none" strike="noStrike">
+              <a:tabLst>
+                <a:tab pos="0" algn="l"/>
+              </a:tabLst>
+            </a:pPr>
+            <a:r>
+              <a:rPr lang="en-US" sz="4400" b="0" u="none" strike="noStrike">
                 <a:solidFill>
                   <a:schemeClr val="dk1"/>
                 </a:solidFill>
@@ -1518,7 +2076,7 @@
               </a:rPr>
               <a:t>Click to edit Master title style</a:t>
             </a:r>
-            <a:endParaRPr lang="en-US" sz="2000" b="1" u="none" strike="noStrike">
+            <a:endParaRPr lang="en-US" sz="4400" b="0" u="none" strike="noStrike">
               <a:solidFill>
                 <a:schemeClr val="dk1"/>
               </a:solidFill>
@@ -1531,483 +2089,7 @@
       </p:sp>
       <p:sp>
         <p:nvSpPr>
-          <p:cNvPr id="58" name="PlaceHolder 2"/>
-          <p:cNvSpPr>
-            <a:spLocks noGrp="1"/>
-          </p:cNvSpPr>
-          <p:nvPr>
-            <p:ph type="body"/>
-          </p:nvPr>
-        </p:nvSpPr>
-        <p:spPr>
-          <a:xfrm>
-            <a:off x="1792440" y="612720"/>
-            <a:ext cx="5486040" cy="4114440"/>
-          </a:xfrm>
-          <a:prstGeom prst="rect">
-            <a:avLst/>
-          </a:prstGeom>
-          <a:noFill/>
-          <a:ln w="0">
-            <a:noFill/>
-          </a:ln>
-        </p:spPr>
-        <p:txBody>
-          <a:bodyPr lIns="90000" tIns="45000" rIns="90000" bIns="45000" anchor="t">
-            <a:noAutofit/>
-          </a:bodyPr>
-          <a:lstStyle>
-            <a:lvl1pPr algn="l" defTabSz="457200">
-              <a:spcBef>
-                <a:spcPts val="281"/>
-              </a:spcBef>
-              <a:buClr>
-                <a:srgbClr val="000000"/>
-              </a:buClr>
-              <a:buFont typeface="Arial"/>
-              <a:buChar char="•"/>
-              <a:tabLst>
-                <a:tab pos="0" algn="l"/>
-              </a:tabLst>
-              <a:defRPr lang="en-US" sz="3200" b="0" u="none" strike="noStrike">
-                <a:solidFill>
-                  <a:schemeClr val="dk1"/>
-                </a:solidFill>
-                <a:effectLst/>
-                <a:uFillTx/>
-                <a:latin typeface="Calibri"/>
-              </a:defRPr>
-            </a:lvl1pPr>
-            <a:lvl2pPr lvl="1" algn="l" defTabSz="457200">
-              <a:spcBef>
-                <a:spcPts val="561"/>
-              </a:spcBef>
-              <a:buClr>
-                <a:srgbClr val="000000"/>
-              </a:buClr>
-              <a:buSzPct val="75000"/>
-              <a:buFont typeface="Symbol" charset="2"/>
-              <a:buChar char=""/>
-              <a:defRPr lang="en-US" sz="3200" b="0" u="none" strike="noStrike">
-                <a:solidFill>
-                  <a:schemeClr val="dk1"/>
-                </a:solidFill>
-                <a:effectLst/>
-                <a:uFillTx/>
-                <a:latin typeface="Calibri"/>
-              </a:defRPr>
-            </a:lvl2pPr>
-            <a:lvl3pPr lvl="2" algn="l" defTabSz="457200">
-              <a:spcBef>
-                <a:spcPts val="479"/>
-              </a:spcBef>
-              <a:buClr>
-                <a:srgbClr val="000000"/>
-              </a:buClr>
-              <a:buSzPct val="45000"/>
-              <a:buFont typeface="Wingdings" charset="2"/>
-              <a:buChar char=""/>
-              <a:defRPr lang="en-US" sz="3200" b="0" u="none" strike="noStrike">
-                <a:solidFill>
-                  <a:schemeClr val="dk1"/>
-                </a:solidFill>
-                <a:effectLst/>
-                <a:uFillTx/>
-                <a:latin typeface="Calibri"/>
-              </a:defRPr>
-            </a:lvl3pPr>
-            <a:lvl4pPr lvl="3" algn="l" defTabSz="457200">
-              <a:spcBef>
-                <a:spcPts val="400"/>
-              </a:spcBef>
-              <a:buClr>
-                <a:srgbClr val="000000"/>
-              </a:buClr>
-              <a:buSzPct val="75000"/>
-              <a:buFont typeface="Symbol" charset="2"/>
-              <a:buChar char=""/>
-              <a:defRPr lang="en-US" sz="3200" b="0" u="none" strike="noStrike">
-                <a:solidFill>
-                  <a:schemeClr val="dk1"/>
-                </a:solidFill>
-                <a:effectLst/>
-                <a:uFillTx/>
-                <a:latin typeface="Calibri"/>
-              </a:defRPr>
-            </a:lvl4pPr>
-            <a:lvl5pPr lvl="4" algn="l" defTabSz="457200">
-              <a:spcBef>
-                <a:spcPts val="400"/>
-              </a:spcBef>
-              <a:buClr>
-                <a:srgbClr val="000000"/>
-              </a:buClr>
-              <a:buSzPct val="45000"/>
-              <a:buFont typeface="Wingdings" charset="2"/>
-              <a:buChar char=""/>
-              <a:defRPr lang="en-US" sz="3200" b="0" u="none" strike="noStrike">
-                <a:solidFill>
-                  <a:schemeClr val="dk1"/>
-                </a:solidFill>
-                <a:effectLst/>
-                <a:uFillTx/>
-                <a:latin typeface="Calibri"/>
-              </a:defRPr>
-            </a:lvl5pPr>
-            <a:lvl6pPr lvl="5" algn="l" defTabSz="457200">
-              <a:spcBef>
-                <a:spcPts val="283"/>
-              </a:spcBef>
-              <a:buClr>
-                <a:srgbClr val="000000"/>
-              </a:buClr>
-              <a:buSzPct val="45000"/>
-              <a:buFont typeface="Wingdings" charset="2"/>
-              <a:buChar char=""/>
-              <a:defRPr lang="en-US" sz="3200" b="0" u="none" strike="noStrike">
-                <a:solidFill>
-                  <a:schemeClr val="dk1"/>
-                </a:solidFill>
-                <a:effectLst/>
-                <a:uFillTx/>
-                <a:latin typeface="Calibri"/>
-              </a:defRPr>
-            </a:lvl6pPr>
-            <a:lvl7pPr lvl="6" algn="l" defTabSz="457200">
-              <a:spcBef>
-                <a:spcPts val="283"/>
-              </a:spcBef>
-              <a:buClr>
-                <a:srgbClr val="000000"/>
-              </a:buClr>
-              <a:buSzPct val="45000"/>
-              <a:buFont typeface="Wingdings" charset="2"/>
-              <a:buChar char=""/>
-              <a:defRPr lang="en-US" sz="3200" b="0" u="none" strike="noStrike">
-                <a:solidFill>
-                  <a:schemeClr val="dk1"/>
-                </a:solidFill>
-                <a:effectLst/>
-                <a:uFillTx/>
-                <a:latin typeface="Calibri"/>
-              </a:defRPr>
-            </a:lvl7pPr>
-          </a:lstStyle>
-          <a:p>
-            <a:pPr algn="l" defTabSz="457200">
-              <a:spcBef>
-                <a:spcPts val="281"/>
-              </a:spcBef>
-              <a:buClr>
-                <a:srgbClr val="000000"/>
-              </a:buClr>
-              <a:buFont typeface="Arial"/>
-              <a:buChar char="•"/>
-              <a:tabLst>
-                <a:tab pos="0" algn="l"/>
-              </a:tabLst>
-            </a:pPr>
-            <a:r>
-              <a:rPr lang="en-US" sz="3200" b="0" u="none" strike="noStrike">
-                <a:solidFill>
-                  <a:schemeClr val="dk1"/>
-                </a:solidFill>
-                <a:effectLst/>
-                <a:uFillTx/>
-                <a:latin typeface="Calibri"/>
-              </a:rPr>
-              <a:t>Click to edit the outline text format</a:t>
-            </a:r>
-            <a:endParaRPr lang="en-US" sz="3200" b="0" u="none" strike="noStrike">
-              <a:solidFill>
-                <a:schemeClr val="dk1"/>
-              </a:solidFill>
-              <a:effectLst/>
-              <a:uFillTx/>
-              <a:latin typeface="Calibri"/>
-            </a:endParaRPr>
-          </a:p>
-          <a:p>
-            <a:pPr marL="457200" lvl="1" algn="l" defTabSz="457200">
-              <a:spcBef>
-                <a:spcPts val="561"/>
-              </a:spcBef>
-              <a:buClr>
-                <a:srgbClr val="000000"/>
-              </a:buClr>
-              <a:buSzPct val="75000"/>
-              <a:buFont typeface="Symbol" charset="2"/>
-              <a:buChar char=""/>
-            </a:pPr>
-            <a:r>
-              <a:rPr lang="en-US" sz="3200" b="0" u="none" strike="noStrike">
-                <a:solidFill>
-                  <a:schemeClr val="dk1"/>
-                </a:solidFill>
-                <a:effectLst/>
-                <a:uFillTx/>
-                <a:latin typeface="Calibri"/>
-              </a:rPr>
-              <a:t>Second Outline Level</a:t>
-            </a:r>
-            <a:endParaRPr lang="en-US" sz="3200" b="0" u="none" strike="noStrike">
-              <a:solidFill>
-                <a:schemeClr val="dk1"/>
-              </a:solidFill>
-              <a:effectLst/>
-              <a:uFillTx/>
-              <a:latin typeface="Calibri"/>
-            </a:endParaRPr>
-          </a:p>
-          <a:p>
-            <a:pPr marL="914400" lvl="2" algn="l" defTabSz="457200">
-              <a:spcBef>
-                <a:spcPts val="479"/>
-              </a:spcBef>
-              <a:buClr>
-                <a:srgbClr val="000000"/>
-              </a:buClr>
-              <a:buSzPct val="45000"/>
-              <a:buFont typeface="Wingdings" charset="2"/>
-              <a:buChar char=""/>
-            </a:pPr>
-            <a:r>
-              <a:rPr lang="en-US" sz="3200" b="0" u="none" strike="noStrike">
-                <a:solidFill>
-                  <a:schemeClr val="dk1"/>
-                </a:solidFill>
-                <a:effectLst/>
-                <a:uFillTx/>
-                <a:latin typeface="Calibri"/>
-              </a:rPr>
-              <a:t>Third Outline Level</a:t>
-            </a:r>
-            <a:endParaRPr lang="en-US" sz="3200" b="0" u="none" strike="noStrike">
-              <a:solidFill>
-                <a:schemeClr val="dk1"/>
-              </a:solidFill>
-              <a:effectLst/>
-              <a:uFillTx/>
-              <a:latin typeface="Calibri"/>
-            </a:endParaRPr>
-          </a:p>
-          <a:p>
-            <a:pPr marL="1371600" lvl="3" algn="l" defTabSz="457200">
-              <a:spcBef>
-                <a:spcPts val="400"/>
-              </a:spcBef>
-              <a:buClr>
-                <a:srgbClr val="000000"/>
-              </a:buClr>
-              <a:buSzPct val="75000"/>
-              <a:buFont typeface="Symbol" charset="2"/>
-              <a:buChar char=""/>
-            </a:pPr>
-            <a:r>
-              <a:rPr lang="en-US" sz="3200" b="0" u="none" strike="noStrike">
-                <a:solidFill>
-                  <a:schemeClr val="dk1"/>
-                </a:solidFill>
-                <a:effectLst/>
-                <a:uFillTx/>
-                <a:latin typeface="Calibri"/>
-              </a:rPr>
-              <a:t>Fourth Outline Level</a:t>
-            </a:r>
-            <a:endParaRPr lang="en-US" sz="3200" b="0" u="none" strike="noStrike">
-              <a:solidFill>
-                <a:schemeClr val="dk1"/>
-              </a:solidFill>
-              <a:effectLst/>
-              <a:uFillTx/>
-              <a:latin typeface="Calibri"/>
-            </a:endParaRPr>
-          </a:p>
-          <a:p>
-            <a:pPr marL="1828800" lvl="4" algn="l" defTabSz="457200">
-              <a:spcBef>
-                <a:spcPts val="400"/>
-              </a:spcBef>
-              <a:buClr>
-                <a:srgbClr val="000000"/>
-              </a:buClr>
-              <a:buSzPct val="45000"/>
-              <a:buFont typeface="Wingdings" charset="2"/>
-              <a:buChar char=""/>
-            </a:pPr>
-            <a:r>
-              <a:rPr lang="en-US" sz="3200" b="0" u="none" strike="noStrike">
-                <a:solidFill>
-                  <a:schemeClr val="dk1"/>
-                </a:solidFill>
-                <a:effectLst/>
-                <a:uFillTx/>
-                <a:latin typeface="Calibri"/>
-              </a:rPr>
-              <a:t>Fifth Outline Level</a:t>
-            </a:r>
-            <a:endParaRPr lang="en-US" sz="3200" b="0" u="none" strike="noStrike">
-              <a:solidFill>
-                <a:schemeClr val="dk1"/>
-              </a:solidFill>
-              <a:effectLst/>
-              <a:uFillTx/>
-              <a:latin typeface="Calibri"/>
-            </a:endParaRPr>
-          </a:p>
-          <a:p>
-            <a:pPr marL="2286000" lvl="5" algn="l" defTabSz="457200">
-              <a:spcBef>
-                <a:spcPts val="283"/>
-              </a:spcBef>
-              <a:buClr>
-                <a:srgbClr val="000000"/>
-              </a:buClr>
-              <a:buSzPct val="45000"/>
-              <a:buFont typeface="Wingdings" charset="2"/>
-              <a:buChar char=""/>
-            </a:pPr>
-            <a:r>
-              <a:rPr lang="en-US" sz="3200" b="0" u="none" strike="noStrike">
-                <a:solidFill>
-                  <a:schemeClr val="dk1"/>
-                </a:solidFill>
-                <a:effectLst/>
-                <a:uFillTx/>
-                <a:latin typeface="Calibri"/>
-              </a:rPr>
-              <a:t>Sixth Outline Level</a:t>
-            </a:r>
-            <a:endParaRPr lang="en-US" sz="3200" b="0" u="none" strike="noStrike">
-              <a:solidFill>
-                <a:schemeClr val="dk1"/>
-              </a:solidFill>
-              <a:effectLst/>
-              <a:uFillTx/>
-              <a:latin typeface="Calibri"/>
-            </a:endParaRPr>
-          </a:p>
-          <a:p>
-            <a:pPr marL="2743200" lvl="6" algn="l" defTabSz="457200">
-              <a:spcBef>
-                <a:spcPts val="283"/>
-              </a:spcBef>
-              <a:buClr>
-                <a:srgbClr val="000000"/>
-              </a:buClr>
-              <a:buSzPct val="45000"/>
-              <a:buFont typeface="Wingdings" charset="2"/>
-              <a:buChar char=""/>
-            </a:pPr>
-            <a:r>
-              <a:rPr lang="en-US" sz="3200" b="0" u="none" strike="noStrike">
-                <a:solidFill>
-                  <a:schemeClr val="dk1"/>
-                </a:solidFill>
-                <a:effectLst/>
-                <a:uFillTx/>
-                <a:latin typeface="Calibri"/>
-              </a:rPr>
-              <a:t>Seventh Outline Level</a:t>
-            </a:r>
-            <a:endParaRPr lang="en-US" sz="3200" b="0" u="none" strike="noStrike">
-              <a:solidFill>
-                <a:schemeClr val="dk1"/>
-              </a:solidFill>
-              <a:effectLst/>
-              <a:uFillTx/>
-              <a:latin typeface="Calibri"/>
-            </a:endParaRPr>
-          </a:p>
-        </p:txBody>
-      </p:sp>
-      <p:sp>
-        <p:nvSpPr>
-          <p:cNvPr id="59" name="PlaceHolder 3"/>
-          <p:cNvSpPr>
-            <a:spLocks noGrp="1"/>
-          </p:cNvSpPr>
-          <p:nvPr>
-            <p:ph type="body"/>
-          </p:nvPr>
-        </p:nvSpPr>
-        <p:spPr>
-          <a:xfrm>
-            <a:off x="1792440" y="5367240"/>
-            <a:ext cx="5486040" cy="804600"/>
-          </a:xfrm>
-          <a:prstGeom prst="rect">
-            <a:avLst/>
-          </a:prstGeom>
-          <a:noFill/>
-          <a:ln w="0">
-            <a:noFill/>
-          </a:ln>
-        </p:spPr>
-        <p:txBody>
-          <a:bodyPr lIns="91440" tIns="45720" rIns="91440" bIns="45720" anchor="t">
-            <a:noAutofit/>
-          </a:bodyPr>
-          <a:lstStyle>
-            <a:lvl1pPr indent="0" algn="l" defTabSz="457200">
-              <a:lnSpc>
-                <a:spcPct val="100000"/>
-              </a:lnSpc>
-              <a:spcBef>
-                <a:spcPts val="281"/>
-              </a:spcBef>
-              <a:buNone/>
-              <a:tabLst>
-                <a:tab pos="0" algn="l"/>
-              </a:tabLst>
-              <a:defRPr lang="en-US" sz="1400" b="0" u="none" strike="noStrike">
-                <a:solidFill>
-                  <a:schemeClr val="dk1"/>
-                </a:solidFill>
-                <a:effectLst/>
-                <a:uFillTx/>
-                <a:latin typeface="Calibri"/>
-              </a:defRPr>
-            </a:lvl1pPr>
-          </a:lstStyle>
-          <a:p>
-            <a:pPr indent="0" algn="l" defTabSz="457200">
-              <a:lnSpc>
-                <a:spcPct val="100000"/>
-              </a:lnSpc>
-              <a:spcBef>
-                <a:spcPts val="281"/>
-              </a:spcBef>
-              <a:buNone/>
-              <a:tabLst>
-                <a:tab pos="0" algn="l"/>
-              </a:tabLst>
-            </a:pPr>
-            <a:r>
-              <a:rPr lang="en-US" sz="1400" b="0" u="none" strike="noStrike">
-                <a:solidFill>
-                  <a:schemeClr val="dk1"/>
-                </a:solidFill>
-                <a:effectLst/>
-                <a:uFillTx/>
-                <a:latin typeface="Calibri"/>
-              </a:rPr>
-              <a:t>Click to edit Master text styles</a:t>
-            </a:r>
-            <a:endParaRPr lang="en-US" sz="1400" b="0" u="none" strike="noStrike">
-              <a:solidFill>
-                <a:schemeClr val="dk1"/>
-              </a:solidFill>
-              <a:effectLst/>
-              <a:uFillTx/>
-              <a:latin typeface="Calibri"/>
-            </a:endParaRPr>
-          </a:p>
-        </p:txBody>
-      </p:sp>
-      <p:sp>
-        <p:nvSpPr>
-          <p:cNvPr id="60" name="PlaceHolder 4"/>
+          <p:cNvPr id="59" name="PlaceHolder 2"/>
           <p:cNvSpPr>
             <a:spLocks noGrp="1"/>
           </p:cNvSpPr>
@@ -2018,7 +2100,7 @@
         <p:spPr>
           <a:xfrm>
             <a:off x="457200" y="6356520"/>
-            <a:ext cx="2133360" cy="364680"/>
+            <a:ext cx="2133000" cy="364320"/>
           </a:xfrm>
           <a:prstGeom prst="rect">
             <a:avLst/>
@@ -2038,6 +2120,9 @@
                 <a:spcPct val="100000"/>
               </a:lnSpc>
               <a:buNone/>
+              <a:tabLst>
+                <a:tab pos="0" algn="l"/>
+              </a:tabLst>
               <a:defRPr lang="en-US" sz="1200" b="0" u="none" strike="noStrike">
                 <a:solidFill>
                   <a:schemeClr val="dk1">
@@ -2056,6 +2141,9 @@
                 <a:spcPct val="100000"/>
               </a:lnSpc>
               <a:buNone/>
+              <a:tabLst>
+                <a:tab pos="0" algn="l"/>
+              </a:tabLst>
             </a:pPr>
             <a:r>
               <a:rPr lang="en-US" sz="1200" b="0" u="none" strike="noStrike">
@@ -2083,7 +2171,7 @@
       </p:sp>
       <p:sp>
         <p:nvSpPr>
-          <p:cNvPr id="61" name="PlaceHolder 5"/>
+          <p:cNvPr id="60" name="PlaceHolder 3"/>
           <p:cNvSpPr>
             <a:spLocks noGrp="1"/>
           </p:cNvSpPr>
@@ -2094,7 +2182,7 @@
         <p:spPr>
           <a:xfrm>
             <a:off x="3124080" y="6356520"/>
-            <a:ext cx="2895120" cy="364680"/>
+            <a:ext cx="2894760" cy="364320"/>
           </a:xfrm>
           <a:prstGeom prst="rect">
             <a:avLst/>
@@ -2110,7 +2198,13 @@
           </a:bodyPr>
           <a:lstStyle>
             <a:lvl1pPr indent="0" algn="ctr">
+              <a:lnSpc>
+                <a:spcPct val="100000"/>
+              </a:lnSpc>
               <a:buNone/>
+              <a:tabLst>
+                <a:tab pos="0" algn="l"/>
+              </a:tabLst>
               <a:defRPr lang="en-US" sz="1400" b="0" u="none" strike="noStrike">
                 <a:solidFill>
                   <a:srgbClr val="000000"/>
@@ -2123,7 +2217,13 @@
           </a:lstStyle>
           <a:p>
             <a:pPr indent="0" algn="ctr">
+              <a:lnSpc>
+                <a:spcPct val="100000"/>
+              </a:lnSpc>
               <a:buNone/>
+              <a:tabLst>
+                <a:tab pos="0" algn="l"/>
+              </a:tabLst>
             </a:pPr>
             <a:r>
               <a:rPr lang="en-US" sz="1400" b="0" u="none" strike="noStrike">
@@ -2149,7 +2249,7 @@
       </p:sp>
       <p:sp>
         <p:nvSpPr>
-          <p:cNvPr id="62" name="PlaceHolder 6"/>
+          <p:cNvPr id="61" name="PlaceHolder 4"/>
           <p:cNvSpPr>
             <a:spLocks noGrp="1"/>
           </p:cNvSpPr>
@@ -2160,7 +2260,7 @@
         <p:spPr>
           <a:xfrm>
             <a:off x="6553080" y="6356520"/>
-            <a:ext cx="2133360" cy="364680"/>
+            <a:ext cx="2133000" cy="364320"/>
           </a:xfrm>
           <a:prstGeom prst="rect">
             <a:avLst/>
@@ -2180,6 +2280,9 @@
                 <a:spcPct val="100000"/>
               </a:lnSpc>
               <a:buNone/>
+              <a:tabLst>
+                <a:tab pos="0" algn="l"/>
+              </a:tabLst>
               <a:defRPr lang="en-US" sz="1200" b="0" u="none" strike="noStrike">
                 <a:solidFill>
                   <a:schemeClr val="dk1">
@@ -2198,8 +2301,11 @@
                 <a:spcPct val="100000"/>
               </a:lnSpc>
               <a:buNone/>
-            </a:pPr>
-            <a:fld id="{A9072D9B-1F86-4DF2-8C28-B9FDB3D20D6A}" type="slidenum">
+              <a:tabLst>
+                <a:tab pos="0" algn="l"/>
+              </a:tabLst>
+            </a:pPr>
+            <a:fld id="{726A89F1-55E4-4FE9-A995-9A7C5B893B0C}" type="slidenum">
               <a:rPr lang="en-US" sz="1200" b="0" u="none" strike="noStrike">
                 <a:solidFill>
                   <a:schemeClr val="dk1">
@@ -2219,6 +2325,434 @@
               <a:effectLst/>
               <a:uFillTx/>
               <a:latin typeface="Times New Roman"/>
+            </a:endParaRPr>
+          </a:p>
+        </p:txBody>
+      </p:sp>
+      <p:sp>
+        <p:nvSpPr>
+          <p:cNvPr id="62" name="PlaceHolder 5"/>
+          <p:cNvSpPr>
+            <a:spLocks noGrp="1"/>
+          </p:cNvSpPr>
+          <p:nvPr>
+            <p:ph type="body"/>
+          </p:nvPr>
+        </p:nvSpPr>
+        <p:spPr>
+          <a:xfrm>
+            <a:off x="609480" y="1604520"/>
+            <a:ext cx="10971720" cy="3976920"/>
+          </a:xfrm>
+          <a:prstGeom prst="rect">
+            <a:avLst/>
+          </a:prstGeom>
+          <a:noFill/>
+          <a:ln w="0">
+            <a:noFill/>
+          </a:ln>
+        </p:spPr>
+        <p:txBody>
+          <a:bodyPr lIns="0" tIns="0" rIns="0" bIns="0" anchor="t">
+            <a:normAutofit/>
+          </a:bodyPr>
+          <a:lstStyle>
+            <a:lvl1pPr algn="l" defTabSz="457200">
+              <a:lnSpc>
+                <a:spcPct val="100000"/>
+              </a:lnSpc>
+              <a:spcBef>
+                <a:spcPts val="641"/>
+              </a:spcBef>
+              <a:buClr>
+                <a:srgbClr val="000000"/>
+              </a:buClr>
+              <a:buFont typeface="Arial"/>
+              <a:buChar char="•"/>
+              <a:defRPr lang="en-US" sz="3200" b="0" u="none" strike="noStrike">
+                <a:solidFill>
+                  <a:schemeClr val="dk1"/>
+                </a:solidFill>
+                <a:effectLst/>
+                <a:uFillTx/>
+                <a:latin typeface="Calibri"/>
+              </a:defRPr>
+            </a:lvl1pPr>
+            <a:lvl2pPr lvl="1" algn="l" defTabSz="457200">
+              <a:lnSpc>
+                <a:spcPct val="100000"/>
+              </a:lnSpc>
+              <a:spcBef>
+                <a:spcPts val="561"/>
+              </a:spcBef>
+              <a:buClr>
+                <a:srgbClr val="000000"/>
+              </a:buClr>
+              <a:buSzPct val="75000"/>
+              <a:buFont typeface="Symbol" charset="2"/>
+              <a:buChar char=""/>
+              <a:defRPr lang="en-US" sz="2800" b="0" u="none" strike="noStrike">
+                <a:solidFill>
+                  <a:schemeClr val="dk1"/>
+                </a:solidFill>
+                <a:effectLst/>
+                <a:uFillTx/>
+                <a:latin typeface="Calibri"/>
+              </a:defRPr>
+            </a:lvl2pPr>
+            <a:lvl3pPr lvl="2" algn="l" defTabSz="457200">
+              <a:lnSpc>
+                <a:spcPct val="100000"/>
+              </a:lnSpc>
+              <a:spcBef>
+                <a:spcPts val="479"/>
+              </a:spcBef>
+              <a:buClr>
+                <a:srgbClr val="000000"/>
+              </a:buClr>
+              <a:buSzPct val="45000"/>
+              <a:buFont typeface="Wingdings" charset="2"/>
+              <a:buChar char=""/>
+              <a:defRPr lang="en-US" sz="2400" b="0" u="none" strike="noStrike">
+                <a:solidFill>
+                  <a:schemeClr val="dk1"/>
+                </a:solidFill>
+                <a:effectLst/>
+                <a:uFillTx/>
+                <a:latin typeface="Calibri"/>
+              </a:defRPr>
+            </a:lvl3pPr>
+            <a:lvl4pPr lvl="3" algn="l" defTabSz="457200">
+              <a:lnSpc>
+                <a:spcPct val="100000"/>
+              </a:lnSpc>
+              <a:spcBef>
+                <a:spcPts val="400"/>
+              </a:spcBef>
+              <a:buClr>
+                <a:srgbClr val="000000"/>
+              </a:buClr>
+              <a:buSzPct val="75000"/>
+              <a:buFont typeface="Symbol" charset="2"/>
+              <a:buChar char=""/>
+              <a:defRPr lang="en-US" sz="2000" b="0" u="none" strike="noStrike">
+                <a:solidFill>
+                  <a:schemeClr val="dk1"/>
+                </a:solidFill>
+                <a:effectLst/>
+                <a:uFillTx/>
+                <a:latin typeface="Calibri"/>
+              </a:defRPr>
+            </a:lvl4pPr>
+            <a:lvl5pPr lvl="4" algn="l" defTabSz="457200">
+              <a:lnSpc>
+                <a:spcPct val="100000"/>
+              </a:lnSpc>
+              <a:spcBef>
+                <a:spcPts val="400"/>
+              </a:spcBef>
+              <a:buClr>
+                <a:srgbClr val="000000"/>
+              </a:buClr>
+              <a:buSzPct val="45000"/>
+              <a:buFont typeface="Wingdings" charset="2"/>
+              <a:buChar char=""/>
+              <a:defRPr lang="en-US" sz="2000" b="0" u="none" strike="noStrike">
+                <a:solidFill>
+                  <a:schemeClr val="dk1"/>
+                </a:solidFill>
+                <a:effectLst/>
+                <a:uFillTx/>
+                <a:latin typeface="Calibri"/>
+              </a:defRPr>
+            </a:lvl5pPr>
+            <a:lvl6pPr lvl="5" algn="l" defTabSz="457200">
+              <a:lnSpc>
+                <a:spcPct val="100000"/>
+              </a:lnSpc>
+              <a:spcBef>
+                <a:spcPts val="283"/>
+              </a:spcBef>
+              <a:buClr>
+                <a:srgbClr val="000000"/>
+              </a:buClr>
+              <a:buSzPct val="45000"/>
+              <a:buFont typeface="Wingdings" charset="2"/>
+              <a:buChar char=""/>
+              <a:defRPr lang="en-US" sz="2000" b="0" u="none" strike="noStrike">
+                <a:solidFill>
+                  <a:schemeClr val="dk1"/>
+                </a:solidFill>
+                <a:effectLst/>
+                <a:uFillTx/>
+                <a:latin typeface="Calibri"/>
+              </a:defRPr>
+            </a:lvl6pPr>
+            <a:lvl7pPr lvl="6" algn="l" defTabSz="457200">
+              <a:lnSpc>
+                <a:spcPct val="100000"/>
+              </a:lnSpc>
+              <a:spcBef>
+                <a:spcPts val="283"/>
+              </a:spcBef>
+              <a:buClr>
+                <a:srgbClr val="000000"/>
+              </a:buClr>
+              <a:buSzPct val="45000"/>
+              <a:buFont typeface="Wingdings" charset="2"/>
+              <a:buChar char=""/>
+              <a:defRPr lang="en-US" sz="2000" b="0" u="none" strike="noStrike">
+                <a:solidFill>
+                  <a:schemeClr val="dk1"/>
+                </a:solidFill>
+                <a:effectLst/>
+                <a:uFillTx/>
+                <a:latin typeface="Calibri"/>
+              </a:defRPr>
+            </a:lvl7pPr>
+          </a:lstStyle>
+          <a:p>
+            <a:pPr marL="343080" indent="-343080" algn="l" defTabSz="457200">
+              <a:lnSpc>
+                <a:spcPct val="100000"/>
+              </a:lnSpc>
+              <a:spcBef>
+                <a:spcPts val="641"/>
+              </a:spcBef>
+              <a:buClr>
+                <a:srgbClr val="000000"/>
+              </a:buClr>
+              <a:buFont typeface="Arial"/>
+              <a:buChar char="•"/>
+            </a:pPr>
+            <a:r>
+              <a:rPr lang="en-US" sz="3200" b="0" u="none" strike="noStrike">
+                <a:solidFill>
+                  <a:schemeClr val="dk1"/>
+                </a:solidFill>
+                <a:effectLst/>
+                <a:uFillTx/>
+                <a:latin typeface="Calibri"/>
+              </a:rPr>
+              <a:t>Click to edit the outline text format</a:t>
+            </a:r>
+            <a:endParaRPr lang="en-US" sz="3200" b="0" u="none" strike="noStrike">
+              <a:solidFill>
+                <a:schemeClr val="dk1"/>
+              </a:solidFill>
+              <a:effectLst/>
+              <a:uFillTx/>
+              <a:latin typeface="Calibri"/>
+            </a:endParaRPr>
+          </a:p>
+          <a:p>
+            <a:pPr marL="864000" lvl="1" indent="-324000" algn="l" defTabSz="457200">
+              <a:lnSpc>
+                <a:spcPct val="100000"/>
+              </a:lnSpc>
+              <a:spcBef>
+                <a:spcPts val="561"/>
+              </a:spcBef>
+              <a:buClr>
+                <a:srgbClr val="000000"/>
+              </a:buClr>
+              <a:buSzPct val="75000"/>
+              <a:buFont typeface="Symbol" charset="2"/>
+              <a:buChar char=""/>
+            </a:pPr>
+            <a:r>
+              <a:rPr lang="en-US" sz="2800" b="0" u="none" strike="noStrike">
+                <a:solidFill>
+                  <a:schemeClr val="dk1"/>
+                </a:solidFill>
+                <a:effectLst/>
+                <a:uFillTx/>
+                <a:latin typeface="Calibri"/>
+              </a:rPr>
+              <a:t>Second Outline Level</a:t>
+            </a:r>
+            <a:endParaRPr lang="en-US" sz="2800" b="0" u="none" strike="noStrike">
+              <a:solidFill>
+                <a:schemeClr val="dk1"/>
+              </a:solidFill>
+              <a:effectLst/>
+              <a:uFillTx/>
+              <a:latin typeface="Calibri"/>
+            </a:endParaRPr>
+          </a:p>
+          <a:p>
+            <a:pPr marL="1296000" lvl="2" indent="-288000" algn="l" defTabSz="457200">
+              <a:lnSpc>
+                <a:spcPct val="100000"/>
+              </a:lnSpc>
+              <a:spcBef>
+                <a:spcPts val="479"/>
+              </a:spcBef>
+              <a:buClr>
+                <a:srgbClr val="000000"/>
+              </a:buClr>
+              <a:buSzPct val="45000"/>
+              <a:buFont typeface="Wingdings" charset="2"/>
+              <a:buChar char=""/>
+            </a:pPr>
+            <a:r>
+              <a:rPr lang="en-US" sz="2400" b="0" u="none" strike="noStrike">
+                <a:solidFill>
+                  <a:schemeClr val="dk1"/>
+                </a:solidFill>
+                <a:effectLst/>
+                <a:uFillTx/>
+                <a:latin typeface="Calibri"/>
+              </a:rPr>
+              <a:t>Third Outline Level</a:t>
+            </a:r>
+            <a:endParaRPr lang="en-US" sz="2400" b="0" u="none" strike="noStrike">
+              <a:solidFill>
+                <a:schemeClr val="dk1"/>
+              </a:solidFill>
+              <a:effectLst/>
+              <a:uFillTx/>
+              <a:latin typeface="Calibri"/>
+            </a:endParaRPr>
+          </a:p>
+          <a:p>
+            <a:pPr marL="1728000" lvl="3" indent="-216000" algn="l" defTabSz="457200">
+              <a:lnSpc>
+                <a:spcPct val="100000"/>
+              </a:lnSpc>
+              <a:spcBef>
+                <a:spcPts val="400"/>
+              </a:spcBef>
+              <a:buClr>
+                <a:srgbClr val="000000"/>
+              </a:buClr>
+              <a:buSzPct val="75000"/>
+              <a:buFont typeface="Symbol" charset="2"/>
+              <a:buChar char=""/>
+            </a:pPr>
+            <a:r>
+              <a:rPr lang="en-US" sz="2000" b="0" u="none" strike="noStrike">
+                <a:solidFill>
+                  <a:schemeClr val="dk1"/>
+                </a:solidFill>
+                <a:effectLst/>
+                <a:uFillTx/>
+                <a:latin typeface="Calibri"/>
+              </a:rPr>
+              <a:t>Fourth Outline Level</a:t>
+            </a:r>
+            <a:endParaRPr lang="en-US" sz="2000" b="0" u="none" strike="noStrike">
+              <a:solidFill>
+                <a:schemeClr val="dk1"/>
+              </a:solidFill>
+              <a:effectLst/>
+              <a:uFillTx/>
+              <a:latin typeface="Calibri"/>
+            </a:endParaRPr>
+          </a:p>
+          <a:p>
+            <a:pPr marL="2160000" lvl="4" indent="-216000" algn="l" defTabSz="457200">
+              <a:lnSpc>
+                <a:spcPct val="100000"/>
+              </a:lnSpc>
+              <a:spcBef>
+                <a:spcPts val="400"/>
+              </a:spcBef>
+              <a:buClr>
+                <a:srgbClr val="000000"/>
+              </a:buClr>
+              <a:buSzPct val="45000"/>
+              <a:buFont typeface="Wingdings" charset="2"/>
+              <a:buChar char=""/>
+            </a:pPr>
+            <a:r>
+              <a:rPr lang="en-US" sz="2000" b="0" u="none" strike="noStrike">
+                <a:solidFill>
+                  <a:schemeClr val="dk1"/>
+                </a:solidFill>
+                <a:effectLst/>
+                <a:uFillTx/>
+                <a:latin typeface="Calibri"/>
+              </a:rPr>
+              <a:t>Fifth Outline Level</a:t>
+            </a:r>
+            <a:endParaRPr lang="en-US" sz="2000" b="0" u="none" strike="noStrike">
+              <a:solidFill>
+                <a:schemeClr val="dk1"/>
+              </a:solidFill>
+              <a:effectLst/>
+              <a:uFillTx/>
+              <a:latin typeface="Calibri"/>
+            </a:endParaRPr>
+          </a:p>
+          <a:p>
+            <a:pPr marL="2592000" lvl="5" indent="-216000" algn="l" defTabSz="457200">
+              <a:lnSpc>
+                <a:spcPct val="100000"/>
+              </a:lnSpc>
+              <a:spcBef>
+                <a:spcPts val="283"/>
+              </a:spcBef>
+              <a:buClr>
+                <a:srgbClr val="000000"/>
+              </a:buClr>
+              <a:buSzPct val="45000"/>
+              <a:buFont typeface="Wingdings" charset="2"/>
+              <a:buChar char=""/>
+            </a:pPr>
+            <a:r>
+              <a:rPr lang="en-US" sz="2000" b="0" u="none" strike="noStrike">
+                <a:solidFill>
+                  <a:schemeClr val="dk1"/>
+                </a:solidFill>
+                <a:effectLst/>
+                <a:uFillTx/>
+                <a:latin typeface="Calibri"/>
+              </a:rPr>
+              <a:t>Sixth Outline Level</a:t>
+            </a:r>
+            <a:endParaRPr lang="en-US" sz="2000" b="0" u="none" strike="noStrike">
+              <a:solidFill>
+                <a:schemeClr val="dk1"/>
+              </a:solidFill>
+              <a:effectLst/>
+              <a:uFillTx/>
+              <a:latin typeface="Calibri"/>
+            </a:endParaRPr>
+          </a:p>
+          <a:p>
+            <a:pPr marL="3024000" lvl="6" indent="-216000" algn="l" defTabSz="457200">
+              <a:lnSpc>
+                <a:spcPct val="100000"/>
+              </a:lnSpc>
+              <a:spcBef>
+                <a:spcPts val="283"/>
+              </a:spcBef>
+              <a:buClr>
+                <a:srgbClr val="000000"/>
+              </a:buClr>
+              <a:buSzPct val="45000"/>
+              <a:buFont typeface="Wingdings" charset="2"/>
+              <a:buChar char=""/>
+            </a:pPr>
+            <a:r>
+              <a:rPr lang="en-US" sz="2000" b="0" u="none" strike="noStrike">
+                <a:solidFill>
+                  <a:schemeClr val="dk1"/>
+                </a:solidFill>
+                <a:effectLst/>
+                <a:uFillTx/>
+                <a:latin typeface="Calibri"/>
+              </a:rPr>
+              <a:t>Seventh Outline Level</a:t>
+            </a:r>
+            <a:endParaRPr lang="en-US" sz="2000" b="0" u="none" strike="noStrike">
+              <a:solidFill>
+                <a:schemeClr val="dk1"/>
+              </a:solidFill>
+              <a:effectLst/>
+              <a:uFillTx/>
+              <a:latin typeface="Calibri"/>
             </a:endParaRPr>
           </a:p>
         </p:txBody>
@@ -2229,8 +2763,8 @@
 </file>
 
 <file path=ppt/slideLayouts/slideLayout2.xml><?xml version="1.0" encoding="utf-8"?>
-<p:sldLayout xmlns:a="http://schemas.openxmlformats.org/drawingml/2006/main" xmlns:p="http://schemas.openxmlformats.org/presentationml/2006/main" xmlns:r="http://schemas.openxmlformats.org/officeDocument/2006/relationships" xmlns:p14="http://schemas.microsoft.com/office/powerpoint/2010/main" xmlns:p15="http://schemas.microsoft.com/office/powerpoint/2012/main" xmlns:mc="http://schemas.openxmlformats.org/markup-compatibility/2006" type="vertTx" preserve="1">
-  <p:cSld name="Title and Vertical Text">
+<p:sldLayout xmlns:a="http://schemas.openxmlformats.org/drawingml/2006/main" xmlns:p="http://schemas.openxmlformats.org/presentationml/2006/main" xmlns:r="http://schemas.openxmlformats.org/officeDocument/2006/relationships" xmlns:p14="http://schemas.microsoft.com/office/powerpoint/2010/main" xmlns:p15="http://schemas.microsoft.com/office/powerpoint/2012/main" xmlns:mc="http://schemas.openxmlformats.org/markup-compatibility/2006" type="blank" preserve="1">
+  <p:cSld name="Content with Caption">
     <p:bg>
       <p:bgPr>
         <a:solidFill>
@@ -2264,8 +2798,1650 @@
         </p:nvSpPr>
         <p:spPr>
           <a:xfrm>
-            <a:off x="457200" y="274680"/>
-            <a:ext cx="8229240" cy="1142640"/>
+            <a:off x="457200" y="272880"/>
+            <a:ext cx="3007440" cy="1161360"/>
+          </a:xfrm>
+          <a:prstGeom prst="rect">
+            <a:avLst/>
+          </a:prstGeom>
+          <a:noFill/>
+          <a:ln w="0">
+            <a:noFill/>
+          </a:ln>
+        </p:spPr>
+        <p:txBody>
+          <a:bodyPr lIns="91440" tIns="45720" rIns="91440" bIns="45720" anchor="b">
+            <a:noAutofit/>
+          </a:bodyPr>
+          <a:lstStyle>
+            <a:lvl1pPr indent="0" algn="l" defTabSz="457200">
+              <a:lnSpc>
+                <a:spcPct val="100000"/>
+              </a:lnSpc>
+              <a:buNone/>
+              <a:tabLst>
+                <a:tab pos="0" algn="l"/>
+              </a:tabLst>
+              <a:defRPr lang="en-US" sz="2000" b="1" u="none" strike="noStrike">
+                <a:solidFill>
+                  <a:schemeClr val="dk1"/>
+                </a:solidFill>
+                <a:effectLst/>
+                <a:uFillTx/>
+                <a:latin typeface="Calibri"/>
+              </a:defRPr>
+            </a:lvl1pPr>
+          </a:lstStyle>
+          <a:p>
+            <a:pPr indent="0" algn="l" defTabSz="457200">
+              <a:lnSpc>
+                <a:spcPct val="100000"/>
+              </a:lnSpc>
+              <a:buNone/>
+              <a:tabLst>
+                <a:tab pos="0" algn="l"/>
+              </a:tabLst>
+            </a:pPr>
+            <a:r>
+              <a:rPr lang="en-US" sz="2000" b="1" u="none" strike="noStrike">
+                <a:solidFill>
+                  <a:schemeClr val="dk1"/>
+                </a:solidFill>
+                <a:effectLst/>
+                <a:uFillTx/>
+                <a:latin typeface="Calibri"/>
+              </a:rPr>
+              <a:t>Click to edit Master title style</a:t>
+            </a:r>
+            <a:endParaRPr lang="en-US" sz="2000" b="1" u="none" strike="noStrike">
+              <a:solidFill>
+                <a:schemeClr val="dk1"/>
+              </a:solidFill>
+              <a:effectLst/>
+              <a:uFillTx/>
+              <a:latin typeface="Calibri"/>
+            </a:endParaRPr>
+          </a:p>
+        </p:txBody>
+      </p:sp>
+      <p:sp>
+        <p:nvSpPr>
+          <p:cNvPr id="8" name="PlaceHolder 2"/>
+          <p:cNvSpPr>
+            <a:spLocks noGrp="1"/>
+          </p:cNvSpPr>
+          <p:nvPr>
+            <p:ph type="body"/>
+          </p:nvPr>
+        </p:nvSpPr>
+        <p:spPr>
+          <a:xfrm>
+            <a:off x="3575160" y="272880"/>
+            <a:ext cx="5110920" cy="5852520"/>
+          </a:xfrm>
+          <a:prstGeom prst="rect">
+            <a:avLst/>
+          </a:prstGeom>
+          <a:noFill/>
+          <a:ln w="0">
+            <a:noFill/>
+          </a:ln>
+        </p:spPr>
+        <p:txBody>
+          <a:bodyPr lIns="91440" tIns="45720" rIns="91440" bIns="45720" anchor="t">
+            <a:noAutofit/>
+          </a:bodyPr>
+          <a:lstStyle>
+            <a:lvl1pPr algn="l" defTabSz="457200">
+              <a:lnSpc>
+                <a:spcPct val="100000"/>
+              </a:lnSpc>
+              <a:spcBef>
+                <a:spcPts val="641"/>
+              </a:spcBef>
+              <a:buClr>
+                <a:srgbClr val="000000"/>
+              </a:buClr>
+              <a:buFont typeface="Arial"/>
+              <a:buChar char="•"/>
+              <a:defRPr lang="en-US" sz="3200" b="0" u="none" strike="noStrike">
+                <a:solidFill>
+                  <a:schemeClr val="dk1"/>
+                </a:solidFill>
+                <a:effectLst/>
+                <a:uFillTx/>
+                <a:latin typeface="Calibri"/>
+              </a:defRPr>
+            </a:lvl1pPr>
+            <a:lvl2pPr lvl="1" algn="l" defTabSz="457200">
+              <a:lnSpc>
+                <a:spcPct val="100000"/>
+              </a:lnSpc>
+              <a:spcBef>
+                <a:spcPts val="561"/>
+              </a:spcBef>
+              <a:buClr>
+                <a:srgbClr val="000000"/>
+              </a:buClr>
+              <a:buFont typeface="Arial"/>
+              <a:buChar char="–"/>
+              <a:defRPr lang="en-US" sz="2800" b="0" u="none" strike="noStrike">
+                <a:solidFill>
+                  <a:schemeClr val="dk1"/>
+                </a:solidFill>
+                <a:effectLst/>
+                <a:uFillTx/>
+                <a:latin typeface="Calibri"/>
+              </a:defRPr>
+            </a:lvl2pPr>
+            <a:lvl3pPr lvl="2" algn="l" defTabSz="457200">
+              <a:lnSpc>
+                <a:spcPct val="100000"/>
+              </a:lnSpc>
+              <a:spcBef>
+                <a:spcPts val="479"/>
+              </a:spcBef>
+              <a:buClr>
+                <a:srgbClr val="000000"/>
+              </a:buClr>
+              <a:buFont typeface="Arial"/>
+              <a:buChar char="•"/>
+              <a:defRPr lang="en-US" sz="2400" b="0" u="none" strike="noStrike">
+                <a:solidFill>
+                  <a:schemeClr val="dk1"/>
+                </a:solidFill>
+                <a:effectLst/>
+                <a:uFillTx/>
+                <a:latin typeface="Calibri"/>
+              </a:defRPr>
+            </a:lvl3pPr>
+            <a:lvl4pPr lvl="3" algn="l" defTabSz="457200">
+              <a:lnSpc>
+                <a:spcPct val="100000"/>
+              </a:lnSpc>
+              <a:spcBef>
+                <a:spcPts val="400"/>
+              </a:spcBef>
+              <a:buClr>
+                <a:srgbClr val="000000"/>
+              </a:buClr>
+              <a:buFont typeface="Arial"/>
+              <a:buChar char="–"/>
+              <a:defRPr lang="en-US" sz="2000" b="0" u="none" strike="noStrike">
+                <a:solidFill>
+                  <a:schemeClr val="dk1"/>
+                </a:solidFill>
+                <a:effectLst/>
+                <a:uFillTx/>
+                <a:latin typeface="Calibri"/>
+              </a:defRPr>
+            </a:lvl4pPr>
+            <a:lvl5pPr lvl="4" algn="l" defTabSz="457200">
+              <a:lnSpc>
+                <a:spcPct val="100000"/>
+              </a:lnSpc>
+              <a:spcBef>
+                <a:spcPts val="400"/>
+              </a:spcBef>
+              <a:buClr>
+                <a:srgbClr val="000000"/>
+              </a:buClr>
+              <a:buFont typeface="Arial"/>
+              <a:buChar char="»"/>
+              <a:defRPr lang="en-US" sz="2000" b="0" u="none" strike="noStrike">
+                <a:solidFill>
+                  <a:schemeClr val="dk1"/>
+                </a:solidFill>
+                <a:effectLst/>
+                <a:uFillTx/>
+                <a:latin typeface="Calibri"/>
+              </a:defRPr>
+            </a:lvl5pPr>
+          </a:lstStyle>
+          <a:p>
+            <a:pPr marL="343080" indent="-343080" algn="l" defTabSz="457200">
+              <a:lnSpc>
+                <a:spcPct val="100000"/>
+              </a:lnSpc>
+              <a:spcBef>
+                <a:spcPts val="641"/>
+              </a:spcBef>
+              <a:buClr>
+                <a:srgbClr val="000000"/>
+              </a:buClr>
+              <a:buFont typeface="Arial"/>
+              <a:buChar char="•"/>
+            </a:pPr>
+            <a:r>
+              <a:rPr lang="en-US" sz="3200" b="0" u="none" strike="noStrike">
+                <a:solidFill>
+                  <a:schemeClr val="dk1"/>
+                </a:solidFill>
+                <a:effectLst/>
+                <a:uFillTx/>
+                <a:latin typeface="Calibri"/>
+              </a:rPr>
+              <a:t>Click to edit Master text styles</a:t>
+            </a:r>
+            <a:endParaRPr lang="en-US" sz="3200" b="0" u="none" strike="noStrike">
+              <a:solidFill>
+                <a:schemeClr val="dk1"/>
+              </a:solidFill>
+              <a:effectLst/>
+              <a:uFillTx/>
+              <a:latin typeface="Calibri"/>
+            </a:endParaRPr>
+          </a:p>
+          <a:p>
+            <a:pPr marL="743040" lvl="1" indent="-285840" algn="l" defTabSz="457200">
+              <a:lnSpc>
+                <a:spcPct val="100000"/>
+              </a:lnSpc>
+              <a:spcBef>
+                <a:spcPts val="561"/>
+              </a:spcBef>
+              <a:buClr>
+                <a:srgbClr val="000000"/>
+              </a:buClr>
+              <a:buFont typeface="Arial"/>
+              <a:buChar char="–"/>
+            </a:pPr>
+            <a:r>
+              <a:rPr lang="en-US" sz="2800" b="0" u="none" strike="noStrike">
+                <a:solidFill>
+                  <a:schemeClr val="dk1"/>
+                </a:solidFill>
+                <a:effectLst/>
+                <a:uFillTx/>
+                <a:latin typeface="Calibri"/>
+              </a:rPr>
+              <a:t>Second level</a:t>
+            </a:r>
+            <a:endParaRPr lang="en-US" sz="2800" b="0" u="none" strike="noStrike">
+              <a:solidFill>
+                <a:schemeClr val="dk1"/>
+              </a:solidFill>
+              <a:effectLst/>
+              <a:uFillTx/>
+              <a:latin typeface="Calibri"/>
+            </a:endParaRPr>
+          </a:p>
+          <a:p>
+            <a:pPr marL="1143000" lvl="2" indent="-228600" algn="l" defTabSz="457200">
+              <a:lnSpc>
+                <a:spcPct val="100000"/>
+              </a:lnSpc>
+              <a:spcBef>
+                <a:spcPts val="479"/>
+              </a:spcBef>
+              <a:buClr>
+                <a:srgbClr val="000000"/>
+              </a:buClr>
+              <a:buFont typeface="Arial"/>
+              <a:buChar char="•"/>
+            </a:pPr>
+            <a:r>
+              <a:rPr lang="en-US" sz="2400" b="0" u="none" strike="noStrike">
+                <a:solidFill>
+                  <a:schemeClr val="dk1"/>
+                </a:solidFill>
+                <a:effectLst/>
+                <a:uFillTx/>
+                <a:latin typeface="Calibri"/>
+              </a:rPr>
+              <a:t>Third level</a:t>
+            </a:r>
+            <a:endParaRPr lang="en-US" sz="2400" b="0" u="none" strike="noStrike">
+              <a:solidFill>
+                <a:schemeClr val="dk1"/>
+              </a:solidFill>
+              <a:effectLst/>
+              <a:uFillTx/>
+              <a:latin typeface="Calibri"/>
+            </a:endParaRPr>
+          </a:p>
+          <a:p>
+            <a:pPr marL="1600200" lvl="3" indent="-228600" algn="l" defTabSz="457200">
+              <a:lnSpc>
+                <a:spcPct val="100000"/>
+              </a:lnSpc>
+              <a:spcBef>
+                <a:spcPts val="400"/>
+              </a:spcBef>
+              <a:buClr>
+                <a:srgbClr val="000000"/>
+              </a:buClr>
+              <a:buFont typeface="Arial"/>
+              <a:buChar char="–"/>
+            </a:pPr>
+            <a:r>
+              <a:rPr lang="en-US" sz="2000" b="0" u="none" strike="noStrike">
+                <a:solidFill>
+                  <a:schemeClr val="dk1"/>
+                </a:solidFill>
+                <a:effectLst/>
+                <a:uFillTx/>
+                <a:latin typeface="Calibri"/>
+              </a:rPr>
+              <a:t>Fourth level</a:t>
+            </a:r>
+            <a:endParaRPr lang="en-US" sz="2000" b="0" u="none" strike="noStrike">
+              <a:solidFill>
+                <a:schemeClr val="dk1"/>
+              </a:solidFill>
+              <a:effectLst/>
+              <a:uFillTx/>
+              <a:latin typeface="Calibri"/>
+            </a:endParaRPr>
+          </a:p>
+          <a:p>
+            <a:pPr marL="2057400" lvl="4" indent="-228600" algn="l" defTabSz="457200">
+              <a:lnSpc>
+                <a:spcPct val="100000"/>
+              </a:lnSpc>
+              <a:spcBef>
+                <a:spcPts val="400"/>
+              </a:spcBef>
+              <a:buClr>
+                <a:srgbClr val="000000"/>
+              </a:buClr>
+              <a:buFont typeface="Arial"/>
+              <a:buChar char="»"/>
+            </a:pPr>
+            <a:r>
+              <a:rPr lang="en-US" sz="2000" b="0" u="none" strike="noStrike">
+                <a:solidFill>
+                  <a:schemeClr val="dk1"/>
+                </a:solidFill>
+                <a:effectLst/>
+                <a:uFillTx/>
+                <a:latin typeface="Calibri"/>
+              </a:rPr>
+              <a:t>Fifth level</a:t>
+            </a:r>
+            <a:endParaRPr lang="en-US" sz="2000" b="0" u="none" strike="noStrike">
+              <a:solidFill>
+                <a:schemeClr val="dk1"/>
+              </a:solidFill>
+              <a:effectLst/>
+              <a:uFillTx/>
+              <a:latin typeface="Calibri"/>
+            </a:endParaRPr>
+          </a:p>
+        </p:txBody>
+      </p:sp>
+      <p:sp>
+        <p:nvSpPr>
+          <p:cNvPr id="9" name="PlaceHolder 3"/>
+          <p:cNvSpPr>
+            <a:spLocks noGrp="1"/>
+          </p:cNvSpPr>
+          <p:nvPr>
+            <p:ph type="body"/>
+          </p:nvPr>
+        </p:nvSpPr>
+        <p:spPr>
+          <a:xfrm>
+            <a:off x="457200" y="1434960"/>
+            <a:ext cx="3007440" cy="4690440"/>
+          </a:xfrm>
+          <a:prstGeom prst="rect">
+            <a:avLst/>
+          </a:prstGeom>
+          <a:noFill/>
+          <a:ln w="0">
+            <a:noFill/>
+          </a:ln>
+        </p:spPr>
+        <p:txBody>
+          <a:bodyPr lIns="91440" tIns="45720" rIns="91440" bIns="45720" anchor="t">
+            <a:noAutofit/>
+          </a:bodyPr>
+          <a:lstStyle>
+            <a:lvl1pPr indent="0" algn="l" defTabSz="457200">
+              <a:lnSpc>
+                <a:spcPct val="100000"/>
+              </a:lnSpc>
+              <a:spcBef>
+                <a:spcPts val="281"/>
+              </a:spcBef>
+              <a:buNone/>
+              <a:tabLst>
+                <a:tab pos="0" algn="l"/>
+              </a:tabLst>
+              <a:defRPr lang="en-US" sz="1400" b="0" u="none" strike="noStrike">
+                <a:solidFill>
+                  <a:schemeClr val="dk1"/>
+                </a:solidFill>
+                <a:effectLst/>
+                <a:uFillTx/>
+                <a:latin typeface="Calibri"/>
+              </a:defRPr>
+            </a:lvl1pPr>
+          </a:lstStyle>
+          <a:p>
+            <a:pPr indent="0" algn="l" defTabSz="457200">
+              <a:lnSpc>
+                <a:spcPct val="100000"/>
+              </a:lnSpc>
+              <a:spcBef>
+                <a:spcPts val="281"/>
+              </a:spcBef>
+              <a:buNone/>
+              <a:tabLst>
+                <a:tab pos="0" algn="l"/>
+              </a:tabLst>
+            </a:pPr>
+            <a:r>
+              <a:rPr lang="en-US" sz="1400" b="0" u="none" strike="noStrike">
+                <a:solidFill>
+                  <a:schemeClr val="dk1"/>
+                </a:solidFill>
+                <a:effectLst/>
+                <a:uFillTx/>
+                <a:latin typeface="Calibri"/>
+              </a:rPr>
+              <a:t>Click to edit Master text styles</a:t>
+            </a:r>
+            <a:endParaRPr lang="en-US" sz="1400" b="0" u="none" strike="noStrike">
+              <a:solidFill>
+                <a:schemeClr val="dk1"/>
+              </a:solidFill>
+              <a:effectLst/>
+              <a:uFillTx/>
+              <a:latin typeface="Calibri"/>
+            </a:endParaRPr>
+          </a:p>
+        </p:txBody>
+      </p:sp>
+      <p:sp>
+        <p:nvSpPr>
+          <p:cNvPr id="10" name="PlaceHolder 4"/>
+          <p:cNvSpPr>
+            <a:spLocks noGrp="1"/>
+          </p:cNvSpPr>
+          <p:nvPr>
+            <p:ph type="dt" idx="4"/>
+          </p:nvPr>
+        </p:nvSpPr>
+        <p:spPr>
+          <a:xfrm>
+            <a:off x="457200" y="6356520"/>
+            <a:ext cx="2133000" cy="364320"/>
+          </a:xfrm>
+          <a:prstGeom prst="rect">
+            <a:avLst/>
+          </a:prstGeom>
+          <a:noFill/>
+          <a:ln w="0">
+            <a:noFill/>
+          </a:ln>
+        </p:spPr>
+        <p:txBody>
+          <a:bodyPr lIns="91440" tIns="45720" rIns="91440" bIns="45720" anchor="ctr">
+            <a:noAutofit/>
+          </a:bodyPr>
+          <a:lstStyle>
+            <a:lvl1pPr indent="0" algn="l" defTabSz="457200">
+              <a:lnSpc>
+                <a:spcPct val="100000"/>
+              </a:lnSpc>
+              <a:buNone/>
+              <a:tabLst>
+                <a:tab pos="0" algn="l"/>
+              </a:tabLst>
+              <a:defRPr lang="en-US" sz="1200" b="0" u="none" strike="noStrike">
+                <a:solidFill>
+                  <a:schemeClr val="dk1">
+                    <a:tint val="75000"/>
+                  </a:schemeClr>
+                </a:solidFill>
+                <a:effectLst/>
+                <a:uFillTx/>
+                <a:latin typeface="Calibri"/>
+              </a:defRPr>
+            </a:lvl1pPr>
+          </a:lstStyle>
+          <a:p>
+            <a:pPr indent="0" algn="l" defTabSz="457200">
+              <a:lnSpc>
+                <a:spcPct val="100000"/>
+              </a:lnSpc>
+              <a:buNone/>
+              <a:tabLst>
+                <a:tab pos="0" algn="l"/>
+              </a:tabLst>
+            </a:pPr>
+            <a:r>
+              <a:rPr lang="en-US" sz="1200" b="0" u="none" strike="noStrike">
+                <a:solidFill>
+                  <a:schemeClr val="dk1">
+                    <a:tint val="75000"/>
+                  </a:schemeClr>
+                </a:solidFill>
+                <a:effectLst/>
+                <a:uFillTx/>
+                <a:latin typeface="Calibri"/>
+              </a:rPr>
+              <a:t>&lt;date/time&gt;</a:t>
+            </a:r>
+            <a:endParaRPr lang="en-US" sz="1200" b="0" u="none" strike="noStrike">
+              <a:solidFill>
+                <a:srgbClr val="000000"/>
+              </a:solidFill>
+              <a:effectLst/>
+              <a:uFillTx/>
+              <a:latin typeface="Times New Roman"/>
+            </a:endParaRPr>
+          </a:p>
+        </p:txBody>
+      </p:sp>
+      <p:sp>
+        <p:nvSpPr>
+          <p:cNvPr id="11" name="PlaceHolder 5"/>
+          <p:cNvSpPr>
+            <a:spLocks noGrp="1"/>
+          </p:cNvSpPr>
+          <p:nvPr>
+            <p:ph type="ftr" idx="5"/>
+          </p:nvPr>
+        </p:nvSpPr>
+        <p:spPr>
+          <a:xfrm>
+            <a:off x="3124080" y="6356520"/>
+            <a:ext cx="2894760" cy="364320"/>
+          </a:xfrm>
+          <a:prstGeom prst="rect">
+            <a:avLst/>
+          </a:prstGeom>
+          <a:noFill/>
+          <a:ln w="0">
+            <a:noFill/>
+          </a:ln>
+        </p:spPr>
+        <p:txBody>
+          <a:bodyPr lIns="91440" tIns="45720" rIns="91440" bIns="45720" anchor="ctr">
+            <a:noAutofit/>
+          </a:bodyPr>
+          <a:lstStyle>
+            <a:lvl1pPr indent="0" algn="ctr">
+              <a:lnSpc>
+                <a:spcPct val="100000"/>
+              </a:lnSpc>
+              <a:buNone/>
+              <a:tabLst>
+                <a:tab pos="0" algn="l"/>
+              </a:tabLst>
+              <a:defRPr lang="en-US" sz="1400" b="0" u="none" strike="noStrike">
+                <a:solidFill>
+                  <a:srgbClr val="000000"/>
+                </a:solidFill>
+                <a:effectLst/>
+                <a:uFillTx/>
+                <a:latin typeface="Times New Roman"/>
+              </a:defRPr>
+            </a:lvl1pPr>
+          </a:lstStyle>
+          <a:p>
+            <a:pPr indent="0" algn="ctr">
+              <a:lnSpc>
+                <a:spcPct val="100000"/>
+              </a:lnSpc>
+              <a:buNone/>
+              <a:tabLst>
+                <a:tab pos="0" algn="l"/>
+              </a:tabLst>
+            </a:pPr>
+            <a:r>
+              <a:rPr lang="en-US" sz="1400" b="0" u="none" strike="noStrike">
+                <a:solidFill>
+                  <a:srgbClr val="000000"/>
+                </a:solidFill>
+                <a:effectLst/>
+                <a:uFillTx/>
+                <a:latin typeface="Times New Roman"/>
+              </a:rPr>
+              <a:t>&lt;footer&gt;</a:t>
+            </a:r>
+            <a:endParaRPr lang="en-US" sz="1400" b="0" u="none" strike="noStrike">
+              <a:solidFill>
+                <a:srgbClr val="000000"/>
+              </a:solidFill>
+              <a:effectLst/>
+              <a:uFillTx/>
+              <a:latin typeface="Times New Roman"/>
+            </a:endParaRPr>
+          </a:p>
+        </p:txBody>
+      </p:sp>
+      <p:sp>
+        <p:nvSpPr>
+          <p:cNvPr id="12" name="PlaceHolder 6"/>
+          <p:cNvSpPr>
+            <a:spLocks noGrp="1"/>
+          </p:cNvSpPr>
+          <p:nvPr>
+            <p:ph type="sldNum" idx="6"/>
+          </p:nvPr>
+        </p:nvSpPr>
+        <p:spPr>
+          <a:xfrm>
+            <a:off x="6553080" y="6356520"/>
+            <a:ext cx="2133000" cy="364320"/>
+          </a:xfrm>
+          <a:prstGeom prst="rect">
+            <a:avLst/>
+          </a:prstGeom>
+          <a:noFill/>
+          <a:ln w="0">
+            <a:noFill/>
+          </a:ln>
+        </p:spPr>
+        <p:txBody>
+          <a:bodyPr lIns="91440" tIns="45720" rIns="91440" bIns="45720" anchor="ctr">
+            <a:noAutofit/>
+          </a:bodyPr>
+          <a:lstStyle>
+            <a:lvl1pPr indent="0" algn="r" defTabSz="457200">
+              <a:lnSpc>
+                <a:spcPct val="100000"/>
+              </a:lnSpc>
+              <a:buNone/>
+              <a:tabLst>
+                <a:tab pos="0" algn="l"/>
+              </a:tabLst>
+              <a:defRPr lang="en-US" sz="1200" b="0" u="none" strike="noStrike">
+                <a:solidFill>
+                  <a:schemeClr val="dk1">
+                    <a:tint val="75000"/>
+                  </a:schemeClr>
+                </a:solidFill>
+                <a:effectLst/>
+                <a:uFillTx/>
+                <a:latin typeface="Calibri"/>
+              </a:defRPr>
+            </a:lvl1pPr>
+          </a:lstStyle>
+          <a:p>
+            <a:pPr indent="0" algn="r" defTabSz="457200">
+              <a:lnSpc>
+                <a:spcPct val="100000"/>
+              </a:lnSpc>
+              <a:buNone/>
+              <a:tabLst>
+                <a:tab pos="0" algn="l"/>
+              </a:tabLst>
+            </a:pPr>
+            <a:fld id="{36AA92B5-4ADD-435E-9091-4E148EC2BFD8}" type="slidenum">
+              <a:rPr lang="en-US" sz="1200" b="0" u="none" strike="noStrike">
+                <a:solidFill>
+                  <a:schemeClr val="dk1">
+                    <a:tint val="75000"/>
+                  </a:schemeClr>
+                </a:solidFill>
+                <a:effectLst/>
+                <a:uFillTx/>
+                <a:latin typeface="Calibri"/>
+              </a:rPr>
+              <a:t>&lt;number&gt;</a:t>
+            </a:fld>
+            <a:endParaRPr lang="en-US" sz="1200" b="0" u="none" strike="noStrike">
+              <a:solidFill>
+                <a:srgbClr val="000000"/>
+              </a:solidFill>
+              <a:effectLst/>
+              <a:uFillTx/>
+              <a:latin typeface="Times New Roman"/>
+            </a:endParaRPr>
+          </a:p>
+        </p:txBody>
+      </p:sp>
+    </p:spTree>
+  </p:cSld>
+</p:sldLayout>
+</file>
+
+<file path=ppt/slideLayouts/slideLayout3.xml><?xml version="1.0" encoding="utf-8"?>
+<p:sldLayout xmlns:a="http://schemas.openxmlformats.org/drawingml/2006/main" xmlns:p="http://schemas.openxmlformats.org/presentationml/2006/main" xmlns:r="http://schemas.openxmlformats.org/officeDocument/2006/relationships" xmlns:p14="http://schemas.microsoft.com/office/powerpoint/2010/main" xmlns:p15="http://schemas.microsoft.com/office/powerpoint/2012/main" xmlns:mc="http://schemas.openxmlformats.org/markup-compatibility/2006" type="blank" preserve="1">
+  <p:cSld name="Picture with Caption">
+    <p:bg>
+      <p:bgPr>
+        <a:solidFill>
+          <a:srgbClr val="FFFFFF"/>
+        </a:solidFill>
+      </p:bgPr>
+    </p:bg>
+    <p:spTree>
+      <p:nvGrpSpPr>
+        <p:cNvPr id="1" name=""/>
+        <p:cNvGrpSpPr/>
+        <p:nvPr/>
+      </p:nvGrpSpPr>
+      <p:grpSpPr>
+        <a:xfrm>
+          <a:off x="0" y="0"/>
+          <a:ext cx="0" cy="0"/>
+          <a:chOff x="0" y="0"/>
+          <a:chExt cx="0" cy="0"/>
+        </a:xfrm>
+      </p:grpSpPr>
+      <p:sp>
+        <p:nvSpPr>
+          <p:cNvPr id="13" name="PlaceHolder 1"/>
+          <p:cNvSpPr>
+            <a:spLocks noGrp="1"/>
+          </p:cNvSpPr>
+          <p:nvPr>
+            <p:ph type="title"/>
+          </p:nvPr>
+        </p:nvSpPr>
+        <p:spPr>
+          <a:xfrm>
+            <a:off x="1792440" y="4800600"/>
+            <a:ext cx="5485680" cy="565920"/>
+          </a:xfrm>
+          <a:prstGeom prst="rect">
+            <a:avLst/>
+          </a:prstGeom>
+          <a:noFill/>
+          <a:ln w="0">
+            <a:noFill/>
+          </a:ln>
+        </p:spPr>
+        <p:txBody>
+          <a:bodyPr lIns="91440" tIns="45720" rIns="91440" bIns="45720" anchor="b">
+            <a:noAutofit/>
+          </a:bodyPr>
+          <a:lstStyle>
+            <a:lvl1pPr indent="0" algn="l" defTabSz="457200">
+              <a:lnSpc>
+                <a:spcPct val="100000"/>
+              </a:lnSpc>
+              <a:buNone/>
+              <a:tabLst>
+                <a:tab pos="0" algn="l"/>
+              </a:tabLst>
+              <a:defRPr lang="en-US" sz="2000" b="1" u="none" strike="noStrike">
+                <a:solidFill>
+                  <a:schemeClr val="dk1"/>
+                </a:solidFill>
+                <a:effectLst/>
+                <a:uFillTx/>
+                <a:latin typeface="Calibri"/>
+              </a:defRPr>
+            </a:lvl1pPr>
+          </a:lstStyle>
+          <a:p>
+            <a:pPr indent="0" algn="l" defTabSz="457200">
+              <a:lnSpc>
+                <a:spcPct val="100000"/>
+              </a:lnSpc>
+              <a:buNone/>
+              <a:tabLst>
+                <a:tab pos="0" algn="l"/>
+              </a:tabLst>
+            </a:pPr>
+            <a:r>
+              <a:rPr lang="en-US" sz="2000" b="1" u="none" strike="noStrike">
+                <a:solidFill>
+                  <a:schemeClr val="dk1"/>
+                </a:solidFill>
+                <a:effectLst/>
+                <a:uFillTx/>
+                <a:latin typeface="Calibri"/>
+              </a:rPr>
+              <a:t>Click to edit Master title style</a:t>
+            </a:r>
+            <a:endParaRPr lang="en-US" sz="2000" b="1" u="none" strike="noStrike">
+              <a:solidFill>
+                <a:schemeClr val="dk1"/>
+              </a:solidFill>
+              <a:effectLst/>
+              <a:uFillTx/>
+              <a:latin typeface="Calibri"/>
+            </a:endParaRPr>
+          </a:p>
+        </p:txBody>
+      </p:sp>
+      <p:sp>
+        <p:nvSpPr>
+          <p:cNvPr id="14" name="PlaceHolder 2"/>
+          <p:cNvSpPr>
+            <a:spLocks noGrp="1"/>
+          </p:cNvSpPr>
+          <p:nvPr>
+            <p:ph type="body"/>
+          </p:nvPr>
+        </p:nvSpPr>
+        <p:spPr>
+          <a:xfrm>
+            <a:off x="1792440" y="612720"/>
+            <a:ext cx="5485680" cy="4114080"/>
+          </a:xfrm>
+          <a:prstGeom prst="rect">
+            <a:avLst/>
+          </a:prstGeom>
+          <a:noFill/>
+          <a:ln w="0">
+            <a:noFill/>
+          </a:ln>
+        </p:spPr>
+        <p:txBody>
+          <a:bodyPr lIns="90000" tIns="45000" rIns="90000" bIns="45000" anchor="t">
+            <a:noAutofit/>
+          </a:bodyPr>
+          <a:lstStyle>
+            <a:lvl1pPr algn="l" defTabSz="457200">
+              <a:lnSpc>
+                <a:spcPct val="100000"/>
+              </a:lnSpc>
+              <a:spcBef>
+                <a:spcPts val="281"/>
+              </a:spcBef>
+              <a:buClr>
+                <a:srgbClr val="000000"/>
+              </a:buClr>
+              <a:buFont typeface="Arial"/>
+              <a:buChar char="•"/>
+              <a:tabLst>
+                <a:tab pos="0" algn="l"/>
+              </a:tabLst>
+              <a:defRPr lang="en-US" sz="3200" b="0" u="none" strike="noStrike">
+                <a:solidFill>
+                  <a:schemeClr val="dk1"/>
+                </a:solidFill>
+                <a:effectLst/>
+                <a:uFillTx/>
+                <a:latin typeface="Calibri"/>
+              </a:defRPr>
+            </a:lvl1pPr>
+            <a:lvl2pPr lvl="1" algn="l" defTabSz="457200">
+              <a:lnSpc>
+                <a:spcPct val="100000"/>
+              </a:lnSpc>
+              <a:spcBef>
+                <a:spcPts val="561"/>
+              </a:spcBef>
+              <a:buClr>
+                <a:srgbClr val="000000"/>
+              </a:buClr>
+              <a:buSzPct val="75000"/>
+              <a:buFont typeface="Symbol" charset="2"/>
+              <a:buChar char=""/>
+              <a:tabLst>
+                <a:tab pos="0" algn="l"/>
+              </a:tabLst>
+              <a:defRPr lang="en-US" sz="3200" b="0" u="none" strike="noStrike">
+                <a:solidFill>
+                  <a:schemeClr val="dk1"/>
+                </a:solidFill>
+                <a:effectLst/>
+                <a:uFillTx/>
+                <a:latin typeface="Calibri"/>
+              </a:defRPr>
+            </a:lvl2pPr>
+            <a:lvl3pPr lvl="2" algn="l" defTabSz="457200">
+              <a:lnSpc>
+                <a:spcPct val="100000"/>
+              </a:lnSpc>
+              <a:spcBef>
+                <a:spcPts val="479"/>
+              </a:spcBef>
+              <a:buClr>
+                <a:srgbClr val="000000"/>
+              </a:buClr>
+              <a:buSzPct val="45000"/>
+              <a:buFont typeface="Wingdings" charset="2"/>
+              <a:buChar char=""/>
+              <a:tabLst>
+                <a:tab pos="0" algn="l"/>
+              </a:tabLst>
+              <a:defRPr lang="en-US" sz="3200" b="0" u="none" strike="noStrike">
+                <a:solidFill>
+                  <a:schemeClr val="dk1"/>
+                </a:solidFill>
+                <a:effectLst/>
+                <a:uFillTx/>
+                <a:latin typeface="Calibri"/>
+              </a:defRPr>
+            </a:lvl3pPr>
+            <a:lvl4pPr lvl="3" algn="l" defTabSz="457200">
+              <a:lnSpc>
+                <a:spcPct val="100000"/>
+              </a:lnSpc>
+              <a:spcBef>
+                <a:spcPts val="400"/>
+              </a:spcBef>
+              <a:buClr>
+                <a:srgbClr val="000000"/>
+              </a:buClr>
+              <a:buSzPct val="75000"/>
+              <a:buFont typeface="Symbol" charset="2"/>
+              <a:buChar char=""/>
+              <a:tabLst>
+                <a:tab pos="0" algn="l"/>
+              </a:tabLst>
+              <a:defRPr lang="en-US" sz="3200" b="0" u="none" strike="noStrike">
+                <a:solidFill>
+                  <a:schemeClr val="dk1"/>
+                </a:solidFill>
+                <a:effectLst/>
+                <a:uFillTx/>
+                <a:latin typeface="Calibri"/>
+              </a:defRPr>
+            </a:lvl4pPr>
+            <a:lvl5pPr lvl="4" algn="l" defTabSz="457200">
+              <a:lnSpc>
+                <a:spcPct val="100000"/>
+              </a:lnSpc>
+              <a:spcBef>
+                <a:spcPts val="400"/>
+              </a:spcBef>
+              <a:buClr>
+                <a:srgbClr val="000000"/>
+              </a:buClr>
+              <a:buSzPct val="45000"/>
+              <a:buFont typeface="Wingdings" charset="2"/>
+              <a:buChar char=""/>
+              <a:tabLst>
+                <a:tab pos="0" algn="l"/>
+              </a:tabLst>
+              <a:defRPr lang="en-US" sz="3200" b="0" u="none" strike="noStrike">
+                <a:solidFill>
+                  <a:schemeClr val="dk1"/>
+                </a:solidFill>
+                <a:effectLst/>
+                <a:uFillTx/>
+                <a:latin typeface="Calibri"/>
+              </a:defRPr>
+            </a:lvl5pPr>
+            <a:lvl6pPr lvl="5" algn="l" defTabSz="457200">
+              <a:lnSpc>
+                <a:spcPct val="100000"/>
+              </a:lnSpc>
+              <a:spcBef>
+                <a:spcPts val="283"/>
+              </a:spcBef>
+              <a:buClr>
+                <a:srgbClr val="000000"/>
+              </a:buClr>
+              <a:buSzPct val="45000"/>
+              <a:buFont typeface="Wingdings" charset="2"/>
+              <a:buChar char=""/>
+              <a:tabLst>
+                <a:tab pos="0" algn="l"/>
+              </a:tabLst>
+              <a:defRPr lang="en-US" sz="3200" b="0" u="none" strike="noStrike">
+                <a:solidFill>
+                  <a:schemeClr val="dk1"/>
+                </a:solidFill>
+                <a:effectLst/>
+                <a:uFillTx/>
+                <a:latin typeface="Calibri"/>
+              </a:defRPr>
+            </a:lvl6pPr>
+            <a:lvl7pPr lvl="6" algn="l" defTabSz="457200">
+              <a:lnSpc>
+                <a:spcPct val="100000"/>
+              </a:lnSpc>
+              <a:spcBef>
+                <a:spcPts val="283"/>
+              </a:spcBef>
+              <a:buClr>
+                <a:srgbClr val="000000"/>
+              </a:buClr>
+              <a:buSzPct val="45000"/>
+              <a:buFont typeface="Wingdings" charset="2"/>
+              <a:buChar char=""/>
+              <a:tabLst>
+                <a:tab pos="0" algn="l"/>
+              </a:tabLst>
+              <a:defRPr lang="en-US" sz="3200" b="0" u="none" strike="noStrike">
+                <a:solidFill>
+                  <a:schemeClr val="dk1"/>
+                </a:solidFill>
+                <a:effectLst/>
+                <a:uFillTx/>
+                <a:latin typeface="Calibri"/>
+              </a:defRPr>
+            </a:lvl7pPr>
+          </a:lstStyle>
+          <a:p>
+            <a:pPr marL="432000" indent="-324000" algn="l" defTabSz="457200">
+              <a:lnSpc>
+                <a:spcPct val="100000"/>
+              </a:lnSpc>
+              <a:spcBef>
+                <a:spcPts val="281"/>
+              </a:spcBef>
+              <a:buClr>
+                <a:srgbClr val="000000"/>
+              </a:buClr>
+              <a:buFont typeface="Arial"/>
+              <a:buChar char="•"/>
+              <a:tabLst>
+                <a:tab pos="0" algn="l"/>
+              </a:tabLst>
+            </a:pPr>
+            <a:r>
+              <a:rPr lang="en-US" sz="3200" b="0" u="none" strike="noStrike">
+                <a:solidFill>
+                  <a:schemeClr val="dk1"/>
+                </a:solidFill>
+                <a:effectLst/>
+                <a:uFillTx/>
+                <a:latin typeface="Calibri"/>
+              </a:rPr>
+              <a:t>Click to edit the outline text format</a:t>
+            </a:r>
+            <a:endParaRPr lang="en-US" sz="3200" b="0" u="none" strike="noStrike">
+              <a:solidFill>
+                <a:schemeClr val="dk1"/>
+              </a:solidFill>
+              <a:effectLst/>
+              <a:uFillTx/>
+              <a:latin typeface="Calibri"/>
+            </a:endParaRPr>
+          </a:p>
+          <a:p>
+            <a:pPr marL="457200" lvl="1" indent="-324000" algn="l" defTabSz="457200">
+              <a:lnSpc>
+                <a:spcPct val="100000"/>
+              </a:lnSpc>
+              <a:spcBef>
+                <a:spcPts val="561"/>
+              </a:spcBef>
+              <a:buClr>
+                <a:srgbClr val="000000"/>
+              </a:buClr>
+              <a:buSzPct val="75000"/>
+              <a:buFont typeface="Symbol" charset="2"/>
+              <a:buChar char=""/>
+              <a:tabLst>
+                <a:tab pos="0" algn="l"/>
+              </a:tabLst>
+            </a:pPr>
+            <a:r>
+              <a:rPr lang="en-US" sz="3200" b="0" u="none" strike="noStrike">
+                <a:solidFill>
+                  <a:schemeClr val="dk1"/>
+                </a:solidFill>
+                <a:effectLst/>
+                <a:uFillTx/>
+                <a:latin typeface="Calibri"/>
+              </a:rPr>
+              <a:t>Second Outline Level</a:t>
+            </a:r>
+            <a:endParaRPr lang="en-US" sz="3200" b="0" u="none" strike="noStrike">
+              <a:solidFill>
+                <a:schemeClr val="dk1"/>
+              </a:solidFill>
+              <a:effectLst/>
+              <a:uFillTx/>
+              <a:latin typeface="Calibri"/>
+            </a:endParaRPr>
+          </a:p>
+          <a:p>
+            <a:pPr marL="914400" lvl="2" indent="-288000" algn="l" defTabSz="457200">
+              <a:lnSpc>
+                <a:spcPct val="100000"/>
+              </a:lnSpc>
+              <a:spcBef>
+                <a:spcPts val="479"/>
+              </a:spcBef>
+              <a:buClr>
+                <a:srgbClr val="000000"/>
+              </a:buClr>
+              <a:buSzPct val="45000"/>
+              <a:buFont typeface="Wingdings" charset="2"/>
+              <a:buChar char=""/>
+              <a:tabLst>
+                <a:tab pos="0" algn="l"/>
+              </a:tabLst>
+            </a:pPr>
+            <a:r>
+              <a:rPr lang="en-US" sz="3200" b="0" u="none" strike="noStrike">
+                <a:solidFill>
+                  <a:schemeClr val="dk1"/>
+                </a:solidFill>
+                <a:effectLst/>
+                <a:uFillTx/>
+                <a:latin typeface="Calibri"/>
+              </a:rPr>
+              <a:t>Third Outline Level</a:t>
+            </a:r>
+            <a:endParaRPr lang="en-US" sz="3200" b="0" u="none" strike="noStrike">
+              <a:solidFill>
+                <a:schemeClr val="dk1"/>
+              </a:solidFill>
+              <a:effectLst/>
+              <a:uFillTx/>
+              <a:latin typeface="Calibri"/>
+            </a:endParaRPr>
+          </a:p>
+          <a:p>
+            <a:pPr marL="1371600" lvl="3" indent="-216000" algn="l" defTabSz="457200">
+              <a:lnSpc>
+                <a:spcPct val="100000"/>
+              </a:lnSpc>
+              <a:spcBef>
+                <a:spcPts val="400"/>
+              </a:spcBef>
+              <a:buClr>
+                <a:srgbClr val="000000"/>
+              </a:buClr>
+              <a:buSzPct val="75000"/>
+              <a:buFont typeface="Symbol" charset="2"/>
+              <a:buChar char=""/>
+              <a:tabLst>
+                <a:tab pos="0" algn="l"/>
+              </a:tabLst>
+            </a:pPr>
+            <a:r>
+              <a:rPr lang="en-US" sz="3200" b="0" u="none" strike="noStrike">
+                <a:solidFill>
+                  <a:schemeClr val="dk1"/>
+                </a:solidFill>
+                <a:effectLst/>
+                <a:uFillTx/>
+                <a:latin typeface="Calibri"/>
+              </a:rPr>
+              <a:t>Fourth Outline Level</a:t>
+            </a:r>
+            <a:endParaRPr lang="en-US" sz="3200" b="0" u="none" strike="noStrike">
+              <a:solidFill>
+                <a:schemeClr val="dk1"/>
+              </a:solidFill>
+              <a:effectLst/>
+              <a:uFillTx/>
+              <a:latin typeface="Calibri"/>
+            </a:endParaRPr>
+          </a:p>
+          <a:p>
+            <a:pPr marL="1828800" lvl="4" indent="-216000" algn="l" defTabSz="457200">
+              <a:lnSpc>
+                <a:spcPct val="100000"/>
+              </a:lnSpc>
+              <a:spcBef>
+                <a:spcPts val="400"/>
+              </a:spcBef>
+              <a:buClr>
+                <a:srgbClr val="000000"/>
+              </a:buClr>
+              <a:buSzPct val="45000"/>
+              <a:buFont typeface="Wingdings" charset="2"/>
+              <a:buChar char=""/>
+              <a:tabLst>
+                <a:tab pos="0" algn="l"/>
+              </a:tabLst>
+            </a:pPr>
+            <a:r>
+              <a:rPr lang="en-US" sz="3200" b="0" u="none" strike="noStrike">
+                <a:solidFill>
+                  <a:schemeClr val="dk1"/>
+                </a:solidFill>
+                <a:effectLst/>
+                <a:uFillTx/>
+                <a:latin typeface="Calibri"/>
+              </a:rPr>
+              <a:t>Fifth Outline Level</a:t>
+            </a:r>
+            <a:endParaRPr lang="en-US" sz="3200" b="0" u="none" strike="noStrike">
+              <a:solidFill>
+                <a:schemeClr val="dk1"/>
+              </a:solidFill>
+              <a:effectLst/>
+              <a:uFillTx/>
+              <a:latin typeface="Calibri"/>
+            </a:endParaRPr>
+          </a:p>
+          <a:p>
+            <a:pPr marL="2286000" lvl="5" indent="-216000" algn="l" defTabSz="457200">
+              <a:lnSpc>
+                <a:spcPct val="100000"/>
+              </a:lnSpc>
+              <a:spcBef>
+                <a:spcPts val="283"/>
+              </a:spcBef>
+              <a:buClr>
+                <a:srgbClr val="000000"/>
+              </a:buClr>
+              <a:buSzPct val="45000"/>
+              <a:buFont typeface="Wingdings" charset="2"/>
+              <a:buChar char=""/>
+              <a:tabLst>
+                <a:tab pos="0" algn="l"/>
+              </a:tabLst>
+            </a:pPr>
+            <a:r>
+              <a:rPr lang="en-US" sz="3200" b="0" u="none" strike="noStrike">
+                <a:solidFill>
+                  <a:schemeClr val="dk1"/>
+                </a:solidFill>
+                <a:effectLst/>
+                <a:uFillTx/>
+                <a:latin typeface="Calibri"/>
+              </a:rPr>
+              <a:t>Sixth Outline Level</a:t>
+            </a:r>
+            <a:endParaRPr lang="en-US" sz="3200" b="0" u="none" strike="noStrike">
+              <a:solidFill>
+                <a:schemeClr val="dk1"/>
+              </a:solidFill>
+              <a:effectLst/>
+              <a:uFillTx/>
+              <a:latin typeface="Calibri"/>
+            </a:endParaRPr>
+          </a:p>
+          <a:p>
+            <a:pPr marL="2743200" lvl="6" indent="-216000" algn="l" defTabSz="457200">
+              <a:lnSpc>
+                <a:spcPct val="100000"/>
+              </a:lnSpc>
+              <a:spcBef>
+                <a:spcPts val="283"/>
+              </a:spcBef>
+              <a:buClr>
+                <a:srgbClr val="000000"/>
+              </a:buClr>
+              <a:buSzPct val="45000"/>
+              <a:buFont typeface="Wingdings" charset="2"/>
+              <a:buChar char=""/>
+              <a:tabLst>
+                <a:tab pos="0" algn="l"/>
+              </a:tabLst>
+            </a:pPr>
+            <a:r>
+              <a:rPr lang="en-US" sz="3200" b="0" u="none" strike="noStrike">
+                <a:solidFill>
+                  <a:schemeClr val="dk1"/>
+                </a:solidFill>
+                <a:effectLst/>
+                <a:uFillTx/>
+                <a:latin typeface="Calibri"/>
+              </a:rPr>
+              <a:t>Seventh Outline Level</a:t>
+            </a:r>
+            <a:endParaRPr lang="en-US" sz="3200" b="0" u="none" strike="noStrike">
+              <a:solidFill>
+                <a:schemeClr val="dk1"/>
+              </a:solidFill>
+              <a:effectLst/>
+              <a:uFillTx/>
+              <a:latin typeface="Calibri"/>
+            </a:endParaRPr>
+          </a:p>
+        </p:txBody>
+      </p:sp>
+      <p:sp>
+        <p:nvSpPr>
+          <p:cNvPr id="15" name="PlaceHolder 3"/>
+          <p:cNvSpPr>
+            <a:spLocks noGrp="1"/>
+          </p:cNvSpPr>
+          <p:nvPr>
+            <p:ph type="body"/>
+          </p:nvPr>
+        </p:nvSpPr>
+        <p:spPr>
+          <a:xfrm>
+            <a:off x="1792440" y="5367240"/>
+            <a:ext cx="5485680" cy="804240"/>
+          </a:xfrm>
+          <a:prstGeom prst="rect">
+            <a:avLst/>
+          </a:prstGeom>
+          <a:noFill/>
+          <a:ln w="0">
+            <a:noFill/>
+          </a:ln>
+        </p:spPr>
+        <p:txBody>
+          <a:bodyPr lIns="91440" tIns="45720" rIns="91440" bIns="45720" anchor="t">
+            <a:noAutofit/>
+          </a:bodyPr>
+          <a:lstStyle>
+            <a:lvl1pPr indent="0" algn="l" defTabSz="457200">
+              <a:lnSpc>
+                <a:spcPct val="100000"/>
+              </a:lnSpc>
+              <a:spcBef>
+                <a:spcPts val="281"/>
+              </a:spcBef>
+              <a:buNone/>
+              <a:tabLst>
+                <a:tab pos="0" algn="l"/>
+              </a:tabLst>
+              <a:defRPr lang="en-US" sz="1400" b="0" u="none" strike="noStrike">
+                <a:solidFill>
+                  <a:schemeClr val="dk1"/>
+                </a:solidFill>
+                <a:effectLst/>
+                <a:uFillTx/>
+                <a:latin typeface="Calibri"/>
+              </a:defRPr>
+            </a:lvl1pPr>
+          </a:lstStyle>
+          <a:p>
+            <a:pPr indent="0" algn="l" defTabSz="457200">
+              <a:lnSpc>
+                <a:spcPct val="100000"/>
+              </a:lnSpc>
+              <a:spcBef>
+                <a:spcPts val="281"/>
+              </a:spcBef>
+              <a:buNone/>
+              <a:tabLst>
+                <a:tab pos="0" algn="l"/>
+              </a:tabLst>
+            </a:pPr>
+            <a:r>
+              <a:rPr lang="en-US" sz="1400" b="0" u="none" strike="noStrike">
+                <a:solidFill>
+                  <a:schemeClr val="dk1"/>
+                </a:solidFill>
+                <a:effectLst/>
+                <a:uFillTx/>
+                <a:latin typeface="Calibri"/>
+              </a:rPr>
+              <a:t>Click to edit Master text styles</a:t>
+            </a:r>
+            <a:endParaRPr lang="en-US" sz="1400" b="0" u="none" strike="noStrike">
+              <a:solidFill>
+                <a:schemeClr val="dk1"/>
+              </a:solidFill>
+              <a:effectLst/>
+              <a:uFillTx/>
+              <a:latin typeface="Calibri"/>
+            </a:endParaRPr>
+          </a:p>
+        </p:txBody>
+      </p:sp>
+      <p:sp>
+        <p:nvSpPr>
+          <p:cNvPr id="16" name="PlaceHolder 4"/>
+          <p:cNvSpPr>
+            <a:spLocks noGrp="1"/>
+          </p:cNvSpPr>
+          <p:nvPr>
+            <p:ph type="dt" idx="7"/>
+          </p:nvPr>
+        </p:nvSpPr>
+        <p:spPr>
+          <a:xfrm>
+            <a:off x="457200" y="6356520"/>
+            <a:ext cx="2133000" cy="364320"/>
+          </a:xfrm>
+          <a:prstGeom prst="rect">
+            <a:avLst/>
+          </a:prstGeom>
+          <a:noFill/>
+          <a:ln w="0">
+            <a:noFill/>
+          </a:ln>
+        </p:spPr>
+        <p:txBody>
+          <a:bodyPr lIns="91440" tIns="45720" rIns="91440" bIns="45720" anchor="ctr">
+            <a:noAutofit/>
+          </a:bodyPr>
+          <a:lstStyle>
+            <a:lvl1pPr indent="0" algn="l" defTabSz="457200">
+              <a:lnSpc>
+                <a:spcPct val="100000"/>
+              </a:lnSpc>
+              <a:buNone/>
+              <a:tabLst>
+                <a:tab pos="0" algn="l"/>
+              </a:tabLst>
+              <a:defRPr lang="en-US" sz="1200" b="0" u="none" strike="noStrike">
+                <a:solidFill>
+                  <a:schemeClr val="dk1">
+                    <a:tint val="75000"/>
+                  </a:schemeClr>
+                </a:solidFill>
+                <a:effectLst/>
+                <a:uFillTx/>
+                <a:latin typeface="Calibri"/>
+              </a:defRPr>
+            </a:lvl1pPr>
+          </a:lstStyle>
+          <a:p>
+            <a:pPr indent="0" algn="l" defTabSz="457200">
+              <a:lnSpc>
+                <a:spcPct val="100000"/>
+              </a:lnSpc>
+              <a:buNone/>
+              <a:tabLst>
+                <a:tab pos="0" algn="l"/>
+              </a:tabLst>
+            </a:pPr>
+            <a:r>
+              <a:rPr lang="en-US" sz="1200" b="0" u="none" strike="noStrike">
+                <a:solidFill>
+                  <a:schemeClr val="dk1">
+                    <a:tint val="75000"/>
+                  </a:schemeClr>
+                </a:solidFill>
+                <a:effectLst/>
+                <a:uFillTx/>
+                <a:latin typeface="Calibri"/>
+              </a:rPr>
+              <a:t>&lt;date/time&gt;</a:t>
+            </a:r>
+            <a:endParaRPr lang="en-US" sz="1200" b="0" u="none" strike="noStrike">
+              <a:solidFill>
+                <a:srgbClr val="000000"/>
+              </a:solidFill>
+              <a:effectLst/>
+              <a:uFillTx/>
+              <a:latin typeface="Times New Roman"/>
+            </a:endParaRPr>
+          </a:p>
+        </p:txBody>
+      </p:sp>
+      <p:sp>
+        <p:nvSpPr>
+          <p:cNvPr id="17" name="PlaceHolder 5"/>
+          <p:cNvSpPr>
+            <a:spLocks noGrp="1"/>
+          </p:cNvSpPr>
+          <p:nvPr>
+            <p:ph type="ftr" idx="8"/>
+          </p:nvPr>
+        </p:nvSpPr>
+        <p:spPr>
+          <a:xfrm>
+            <a:off x="3124080" y="6356520"/>
+            <a:ext cx="2894760" cy="364320"/>
+          </a:xfrm>
+          <a:prstGeom prst="rect">
+            <a:avLst/>
+          </a:prstGeom>
+          <a:noFill/>
+          <a:ln w="0">
+            <a:noFill/>
+          </a:ln>
+        </p:spPr>
+        <p:txBody>
+          <a:bodyPr lIns="91440" tIns="45720" rIns="91440" bIns="45720" anchor="ctr">
+            <a:noAutofit/>
+          </a:bodyPr>
+          <a:lstStyle>
+            <a:lvl1pPr indent="0" algn="ctr">
+              <a:lnSpc>
+                <a:spcPct val="100000"/>
+              </a:lnSpc>
+              <a:buNone/>
+              <a:tabLst>
+                <a:tab pos="0" algn="l"/>
+              </a:tabLst>
+              <a:defRPr lang="en-US" sz="1400" b="0" u="none" strike="noStrike">
+                <a:solidFill>
+                  <a:srgbClr val="000000"/>
+                </a:solidFill>
+                <a:effectLst/>
+                <a:uFillTx/>
+                <a:latin typeface="Times New Roman"/>
+              </a:defRPr>
+            </a:lvl1pPr>
+          </a:lstStyle>
+          <a:p>
+            <a:pPr indent="0" algn="ctr">
+              <a:lnSpc>
+                <a:spcPct val="100000"/>
+              </a:lnSpc>
+              <a:buNone/>
+              <a:tabLst>
+                <a:tab pos="0" algn="l"/>
+              </a:tabLst>
+            </a:pPr>
+            <a:r>
+              <a:rPr lang="en-US" sz="1400" b="0" u="none" strike="noStrike">
+                <a:solidFill>
+                  <a:srgbClr val="000000"/>
+                </a:solidFill>
+                <a:effectLst/>
+                <a:uFillTx/>
+                <a:latin typeface="Times New Roman"/>
+              </a:rPr>
+              <a:t>&lt;footer&gt;</a:t>
+            </a:r>
+            <a:endParaRPr lang="en-US" sz="1400" b="0" u="none" strike="noStrike">
+              <a:solidFill>
+                <a:srgbClr val="000000"/>
+              </a:solidFill>
+              <a:effectLst/>
+              <a:uFillTx/>
+              <a:latin typeface="Times New Roman"/>
+            </a:endParaRPr>
+          </a:p>
+        </p:txBody>
+      </p:sp>
+      <p:sp>
+        <p:nvSpPr>
+          <p:cNvPr id="18" name="PlaceHolder 6"/>
+          <p:cNvSpPr>
+            <a:spLocks noGrp="1"/>
+          </p:cNvSpPr>
+          <p:nvPr>
+            <p:ph type="sldNum" idx="9"/>
+          </p:nvPr>
+        </p:nvSpPr>
+        <p:spPr>
+          <a:xfrm>
+            <a:off x="6553080" y="6356520"/>
+            <a:ext cx="2133000" cy="364320"/>
+          </a:xfrm>
+          <a:prstGeom prst="rect">
+            <a:avLst/>
+          </a:prstGeom>
+          <a:noFill/>
+          <a:ln w="0">
+            <a:noFill/>
+          </a:ln>
+        </p:spPr>
+        <p:txBody>
+          <a:bodyPr lIns="91440" tIns="45720" rIns="91440" bIns="45720" anchor="ctr">
+            <a:noAutofit/>
+          </a:bodyPr>
+          <a:lstStyle>
+            <a:lvl1pPr indent="0" algn="r" defTabSz="457200">
+              <a:lnSpc>
+                <a:spcPct val="100000"/>
+              </a:lnSpc>
+              <a:buNone/>
+              <a:tabLst>
+                <a:tab pos="0" algn="l"/>
+              </a:tabLst>
+              <a:defRPr lang="en-US" sz="1200" b="0" u="none" strike="noStrike">
+                <a:solidFill>
+                  <a:schemeClr val="dk1">
+                    <a:tint val="75000"/>
+                  </a:schemeClr>
+                </a:solidFill>
+                <a:effectLst/>
+                <a:uFillTx/>
+                <a:latin typeface="Calibri"/>
+              </a:defRPr>
+            </a:lvl1pPr>
+          </a:lstStyle>
+          <a:p>
+            <a:pPr indent="0" algn="r" defTabSz="457200">
+              <a:lnSpc>
+                <a:spcPct val="100000"/>
+              </a:lnSpc>
+              <a:buNone/>
+              <a:tabLst>
+                <a:tab pos="0" algn="l"/>
+              </a:tabLst>
+            </a:pPr>
+            <a:fld id="{C6A2026B-B62B-4369-8A79-0FB14AB7A40F}" type="slidenum">
+              <a:rPr lang="en-US" sz="1200" b="0" u="none" strike="noStrike">
+                <a:solidFill>
+                  <a:schemeClr val="dk1">
+                    <a:tint val="75000"/>
+                  </a:schemeClr>
+                </a:solidFill>
+                <a:effectLst/>
+                <a:uFillTx/>
+                <a:latin typeface="Calibri"/>
+              </a:rPr>
+              <a:t>&lt;number&gt;</a:t>
+            </a:fld>
+            <a:endParaRPr lang="en-US" sz="1200" b="0" u="none" strike="noStrike">
+              <a:solidFill>
+                <a:srgbClr val="000000"/>
+              </a:solidFill>
+              <a:effectLst/>
+              <a:uFillTx/>
+              <a:latin typeface="Times New Roman"/>
+            </a:endParaRPr>
+          </a:p>
+        </p:txBody>
+      </p:sp>
+    </p:spTree>
+  </p:cSld>
+</p:sldLayout>
+</file>
+
+<file path=ppt/slideLayouts/slideLayout4.xml><?xml version="1.0" encoding="utf-8"?>
+<p:sldLayout xmlns:a="http://schemas.openxmlformats.org/drawingml/2006/main" xmlns:p="http://schemas.openxmlformats.org/presentationml/2006/main" xmlns:r="http://schemas.openxmlformats.org/officeDocument/2006/relationships" xmlns:p14="http://schemas.microsoft.com/office/powerpoint/2010/main" xmlns:p15="http://schemas.microsoft.com/office/powerpoint/2012/main" xmlns:mc="http://schemas.openxmlformats.org/markup-compatibility/2006" type="title" preserve="1">
+  <p:cSld name="Title Slide">
+    <p:bg>
+      <p:bgPr>
+        <a:solidFill>
+          <a:srgbClr val="FFFFFF"/>
+        </a:solidFill>
+      </p:bgPr>
+    </p:bg>
+    <p:spTree>
+      <p:nvGrpSpPr>
+        <p:cNvPr id="1" name=""/>
+        <p:cNvGrpSpPr/>
+        <p:nvPr/>
+      </p:nvGrpSpPr>
+      <p:grpSpPr>
+        <a:xfrm>
+          <a:off x="0" y="0"/>
+          <a:ext cx="0" cy="0"/>
+          <a:chOff x="0" y="0"/>
+          <a:chExt cx="0" cy="0"/>
+        </a:xfrm>
+      </p:grpSpPr>
+      <p:sp>
+        <p:nvSpPr>
+          <p:cNvPr id="19" name="PlaceHolder 1"/>
+          <p:cNvSpPr>
+            <a:spLocks noGrp="1"/>
+          </p:cNvSpPr>
+          <p:nvPr>
+            <p:ph type="title"/>
+          </p:nvPr>
+        </p:nvSpPr>
+        <p:spPr>
+          <a:xfrm>
+            <a:off x="685800" y="2130480"/>
+            <a:ext cx="7771680" cy="1469160"/>
           </a:xfrm>
           <a:prstGeom prst="rect">
             <a:avLst/>
@@ -2285,6 +4461,9 @@
                 <a:spcPct val="100000"/>
               </a:lnSpc>
               <a:buNone/>
+              <a:tabLst>
+                <a:tab pos="0" algn="l"/>
+              </a:tabLst>
               <a:defRPr lang="en-US" sz="4400" b="0" u="none" strike="noStrike">
                 <a:solidFill>
                   <a:schemeClr val="dk1"/>
@@ -2301,6 +4480,9 @@
                 <a:spcPct val="100000"/>
               </a:lnSpc>
               <a:buNone/>
+              <a:tabLst>
+                <a:tab pos="0" algn="l"/>
+              </a:tabLst>
             </a:pPr>
             <a:r>
               <a:rPr lang="en-US" sz="4400" b="0" u="none" strike="noStrike">
@@ -2326,7 +4508,784 @@
       </p:sp>
       <p:sp>
         <p:nvSpPr>
-          <p:cNvPr id="8" name="PlaceHolder 2"/>
+          <p:cNvPr id="20" name="PlaceHolder 2"/>
+          <p:cNvSpPr>
+            <a:spLocks noGrp="1"/>
+          </p:cNvSpPr>
+          <p:nvPr>
+            <p:ph type="dt" idx="10"/>
+          </p:nvPr>
+        </p:nvSpPr>
+        <p:spPr>
+          <a:xfrm>
+            <a:off x="457200" y="6356520"/>
+            <a:ext cx="2133000" cy="364320"/>
+          </a:xfrm>
+          <a:prstGeom prst="rect">
+            <a:avLst/>
+          </a:prstGeom>
+          <a:noFill/>
+          <a:ln w="0">
+            <a:noFill/>
+          </a:ln>
+        </p:spPr>
+        <p:txBody>
+          <a:bodyPr lIns="91440" tIns="45720" rIns="91440" bIns="45720" anchor="ctr">
+            <a:noAutofit/>
+          </a:bodyPr>
+          <a:lstStyle>
+            <a:lvl1pPr indent="0" algn="l" defTabSz="457200">
+              <a:lnSpc>
+                <a:spcPct val="100000"/>
+              </a:lnSpc>
+              <a:buNone/>
+              <a:tabLst>
+                <a:tab pos="0" algn="l"/>
+              </a:tabLst>
+              <a:defRPr lang="en-US" sz="1200" b="0" u="none" strike="noStrike">
+                <a:solidFill>
+                  <a:schemeClr val="dk1">
+                    <a:tint val="75000"/>
+                  </a:schemeClr>
+                </a:solidFill>
+                <a:effectLst/>
+                <a:uFillTx/>
+                <a:latin typeface="Calibri"/>
+              </a:defRPr>
+            </a:lvl1pPr>
+          </a:lstStyle>
+          <a:p>
+            <a:pPr indent="0" algn="l" defTabSz="457200">
+              <a:lnSpc>
+                <a:spcPct val="100000"/>
+              </a:lnSpc>
+              <a:buNone/>
+              <a:tabLst>
+                <a:tab pos="0" algn="l"/>
+              </a:tabLst>
+            </a:pPr>
+            <a:r>
+              <a:rPr lang="en-US" sz="1200" b="0" u="none" strike="noStrike">
+                <a:solidFill>
+                  <a:schemeClr val="dk1">
+                    <a:tint val="75000"/>
+                  </a:schemeClr>
+                </a:solidFill>
+                <a:effectLst/>
+                <a:uFillTx/>
+                <a:latin typeface="Calibri"/>
+              </a:rPr>
+              <a:t>&lt;date/time&gt;</a:t>
+            </a:r>
+            <a:endParaRPr lang="en-US" sz="1200" b="0" u="none" strike="noStrike">
+              <a:solidFill>
+                <a:srgbClr val="000000"/>
+              </a:solidFill>
+              <a:effectLst/>
+              <a:uFillTx/>
+              <a:latin typeface="Times New Roman"/>
+            </a:endParaRPr>
+          </a:p>
+        </p:txBody>
+      </p:sp>
+      <p:sp>
+        <p:nvSpPr>
+          <p:cNvPr id="21" name="PlaceHolder 3"/>
+          <p:cNvSpPr>
+            <a:spLocks noGrp="1"/>
+          </p:cNvSpPr>
+          <p:nvPr>
+            <p:ph type="ftr" idx="11"/>
+          </p:nvPr>
+        </p:nvSpPr>
+        <p:spPr>
+          <a:xfrm>
+            <a:off x="3124080" y="6356520"/>
+            <a:ext cx="2894760" cy="364320"/>
+          </a:xfrm>
+          <a:prstGeom prst="rect">
+            <a:avLst/>
+          </a:prstGeom>
+          <a:noFill/>
+          <a:ln w="0">
+            <a:noFill/>
+          </a:ln>
+        </p:spPr>
+        <p:txBody>
+          <a:bodyPr lIns="91440" tIns="45720" rIns="91440" bIns="45720" anchor="ctr">
+            <a:noAutofit/>
+          </a:bodyPr>
+          <a:lstStyle>
+            <a:lvl1pPr indent="0" algn="ctr">
+              <a:lnSpc>
+                <a:spcPct val="100000"/>
+              </a:lnSpc>
+              <a:buNone/>
+              <a:tabLst>
+                <a:tab pos="0" algn="l"/>
+              </a:tabLst>
+              <a:defRPr lang="en-US" sz="1400" b="0" u="none" strike="noStrike">
+                <a:solidFill>
+                  <a:srgbClr val="000000"/>
+                </a:solidFill>
+                <a:effectLst/>
+                <a:uFillTx/>
+                <a:latin typeface="Times New Roman"/>
+              </a:defRPr>
+            </a:lvl1pPr>
+          </a:lstStyle>
+          <a:p>
+            <a:pPr indent="0" algn="ctr">
+              <a:lnSpc>
+                <a:spcPct val="100000"/>
+              </a:lnSpc>
+              <a:buNone/>
+              <a:tabLst>
+                <a:tab pos="0" algn="l"/>
+              </a:tabLst>
+            </a:pPr>
+            <a:r>
+              <a:rPr lang="en-US" sz="1400" b="0" u="none" strike="noStrike">
+                <a:solidFill>
+                  <a:srgbClr val="000000"/>
+                </a:solidFill>
+                <a:effectLst/>
+                <a:uFillTx/>
+                <a:latin typeface="Times New Roman"/>
+              </a:rPr>
+              <a:t>&lt;footer&gt;</a:t>
+            </a:r>
+            <a:endParaRPr lang="en-US" sz="1400" b="0" u="none" strike="noStrike">
+              <a:solidFill>
+                <a:srgbClr val="000000"/>
+              </a:solidFill>
+              <a:effectLst/>
+              <a:uFillTx/>
+              <a:latin typeface="Times New Roman"/>
+            </a:endParaRPr>
+          </a:p>
+        </p:txBody>
+      </p:sp>
+      <p:sp>
+        <p:nvSpPr>
+          <p:cNvPr id="22" name="PlaceHolder 4"/>
+          <p:cNvSpPr>
+            <a:spLocks noGrp="1"/>
+          </p:cNvSpPr>
+          <p:nvPr>
+            <p:ph type="sldNum" idx="12"/>
+          </p:nvPr>
+        </p:nvSpPr>
+        <p:spPr>
+          <a:xfrm>
+            <a:off x="6553080" y="6356520"/>
+            <a:ext cx="2133000" cy="364320"/>
+          </a:xfrm>
+          <a:prstGeom prst="rect">
+            <a:avLst/>
+          </a:prstGeom>
+          <a:noFill/>
+          <a:ln w="0">
+            <a:noFill/>
+          </a:ln>
+        </p:spPr>
+        <p:txBody>
+          <a:bodyPr lIns="91440" tIns="45720" rIns="91440" bIns="45720" anchor="ctr">
+            <a:noAutofit/>
+          </a:bodyPr>
+          <a:lstStyle>
+            <a:lvl1pPr indent="0" algn="r" defTabSz="457200">
+              <a:lnSpc>
+                <a:spcPct val="100000"/>
+              </a:lnSpc>
+              <a:buNone/>
+              <a:tabLst>
+                <a:tab pos="0" algn="l"/>
+              </a:tabLst>
+              <a:defRPr lang="en-US" sz="1200" b="0" u="none" strike="noStrike">
+                <a:solidFill>
+                  <a:schemeClr val="dk1">
+                    <a:tint val="75000"/>
+                  </a:schemeClr>
+                </a:solidFill>
+                <a:effectLst/>
+                <a:uFillTx/>
+                <a:latin typeface="Calibri"/>
+              </a:defRPr>
+            </a:lvl1pPr>
+          </a:lstStyle>
+          <a:p>
+            <a:pPr indent="0" algn="r" defTabSz="457200">
+              <a:lnSpc>
+                <a:spcPct val="100000"/>
+              </a:lnSpc>
+              <a:buNone/>
+              <a:tabLst>
+                <a:tab pos="0" algn="l"/>
+              </a:tabLst>
+            </a:pPr>
+            <a:fld id="{B4BCCF39-5C0A-48B7-96EB-D6E4B41CEAE7}" type="slidenum">
+              <a:rPr lang="en-US" sz="1200" b="0" u="none" strike="noStrike">
+                <a:solidFill>
+                  <a:schemeClr val="dk1">
+                    <a:tint val="75000"/>
+                  </a:schemeClr>
+                </a:solidFill>
+                <a:effectLst/>
+                <a:uFillTx/>
+                <a:latin typeface="Calibri"/>
+              </a:rPr>
+              <a:t>&lt;number&gt;</a:t>
+            </a:fld>
+            <a:endParaRPr lang="en-US" sz="1200" b="0" u="none" strike="noStrike">
+              <a:solidFill>
+                <a:srgbClr val="000000"/>
+              </a:solidFill>
+              <a:effectLst/>
+              <a:uFillTx/>
+              <a:latin typeface="Times New Roman"/>
+            </a:endParaRPr>
+          </a:p>
+        </p:txBody>
+      </p:sp>
+      <p:sp>
+        <p:nvSpPr>
+          <p:cNvPr id="23" name="PlaceHolder 5"/>
+          <p:cNvSpPr>
+            <a:spLocks noGrp="1"/>
+          </p:cNvSpPr>
+          <p:nvPr>
+            <p:ph type="body"/>
+          </p:nvPr>
+        </p:nvSpPr>
+        <p:spPr>
+          <a:xfrm>
+            <a:off x="609480" y="1604520"/>
+            <a:ext cx="10971720" cy="3976920"/>
+          </a:xfrm>
+          <a:prstGeom prst="rect">
+            <a:avLst/>
+          </a:prstGeom>
+          <a:noFill/>
+          <a:ln w="0">
+            <a:noFill/>
+          </a:ln>
+        </p:spPr>
+        <p:txBody>
+          <a:bodyPr lIns="0" tIns="0" rIns="0" bIns="0" anchor="t">
+            <a:normAutofit/>
+          </a:bodyPr>
+          <a:lstStyle>
+            <a:lvl1pPr algn="l" defTabSz="457200">
+              <a:lnSpc>
+                <a:spcPct val="100000"/>
+              </a:lnSpc>
+              <a:spcBef>
+                <a:spcPts val="641"/>
+              </a:spcBef>
+              <a:buClr>
+                <a:srgbClr val="000000"/>
+              </a:buClr>
+              <a:buFont typeface="Arial"/>
+              <a:buChar char="•"/>
+              <a:defRPr lang="en-US" sz="3200" b="0" u="none" strike="noStrike">
+                <a:solidFill>
+                  <a:schemeClr val="dk1"/>
+                </a:solidFill>
+                <a:effectLst/>
+                <a:uFillTx/>
+                <a:latin typeface="Calibri"/>
+              </a:defRPr>
+            </a:lvl1pPr>
+            <a:lvl2pPr lvl="1" algn="l" defTabSz="457200">
+              <a:lnSpc>
+                <a:spcPct val="100000"/>
+              </a:lnSpc>
+              <a:spcBef>
+                <a:spcPts val="561"/>
+              </a:spcBef>
+              <a:buClr>
+                <a:srgbClr val="000000"/>
+              </a:buClr>
+              <a:buSzPct val="75000"/>
+              <a:buFont typeface="Symbol" charset="2"/>
+              <a:buChar char=""/>
+              <a:defRPr lang="en-US" sz="2800" b="0" u="none" strike="noStrike">
+                <a:solidFill>
+                  <a:schemeClr val="dk1"/>
+                </a:solidFill>
+                <a:effectLst/>
+                <a:uFillTx/>
+                <a:latin typeface="Calibri"/>
+              </a:defRPr>
+            </a:lvl2pPr>
+            <a:lvl3pPr lvl="2" algn="l" defTabSz="457200">
+              <a:lnSpc>
+                <a:spcPct val="100000"/>
+              </a:lnSpc>
+              <a:spcBef>
+                <a:spcPts val="479"/>
+              </a:spcBef>
+              <a:buClr>
+                <a:srgbClr val="000000"/>
+              </a:buClr>
+              <a:buSzPct val="45000"/>
+              <a:buFont typeface="Wingdings" charset="2"/>
+              <a:buChar char=""/>
+              <a:defRPr lang="en-US" sz="2400" b="0" u="none" strike="noStrike">
+                <a:solidFill>
+                  <a:schemeClr val="dk1"/>
+                </a:solidFill>
+                <a:effectLst/>
+                <a:uFillTx/>
+                <a:latin typeface="Calibri"/>
+              </a:defRPr>
+            </a:lvl3pPr>
+            <a:lvl4pPr lvl="3" algn="l" defTabSz="457200">
+              <a:lnSpc>
+                <a:spcPct val="100000"/>
+              </a:lnSpc>
+              <a:spcBef>
+                <a:spcPts val="400"/>
+              </a:spcBef>
+              <a:buClr>
+                <a:srgbClr val="000000"/>
+              </a:buClr>
+              <a:buSzPct val="75000"/>
+              <a:buFont typeface="Symbol" charset="2"/>
+              <a:buChar char=""/>
+              <a:defRPr lang="en-US" sz="2000" b="0" u="none" strike="noStrike">
+                <a:solidFill>
+                  <a:schemeClr val="dk1"/>
+                </a:solidFill>
+                <a:effectLst/>
+                <a:uFillTx/>
+                <a:latin typeface="Calibri"/>
+              </a:defRPr>
+            </a:lvl4pPr>
+            <a:lvl5pPr lvl="4" algn="l" defTabSz="457200">
+              <a:lnSpc>
+                <a:spcPct val="100000"/>
+              </a:lnSpc>
+              <a:spcBef>
+                <a:spcPts val="400"/>
+              </a:spcBef>
+              <a:buClr>
+                <a:srgbClr val="000000"/>
+              </a:buClr>
+              <a:buSzPct val="45000"/>
+              <a:buFont typeface="Wingdings" charset="2"/>
+              <a:buChar char=""/>
+              <a:defRPr lang="en-US" sz="2000" b="0" u="none" strike="noStrike">
+                <a:solidFill>
+                  <a:schemeClr val="dk1"/>
+                </a:solidFill>
+                <a:effectLst/>
+                <a:uFillTx/>
+                <a:latin typeface="Calibri"/>
+              </a:defRPr>
+            </a:lvl5pPr>
+            <a:lvl6pPr lvl="5" algn="l" defTabSz="457200">
+              <a:lnSpc>
+                <a:spcPct val="100000"/>
+              </a:lnSpc>
+              <a:spcBef>
+                <a:spcPts val="283"/>
+              </a:spcBef>
+              <a:buClr>
+                <a:srgbClr val="000000"/>
+              </a:buClr>
+              <a:buSzPct val="45000"/>
+              <a:buFont typeface="Wingdings" charset="2"/>
+              <a:buChar char=""/>
+              <a:defRPr lang="en-US" sz="2000" b="0" u="none" strike="noStrike">
+                <a:solidFill>
+                  <a:schemeClr val="dk1"/>
+                </a:solidFill>
+                <a:effectLst/>
+                <a:uFillTx/>
+                <a:latin typeface="Calibri"/>
+              </a:defRPr>
+            </a:lvl6pPr>
+            <a:lvl7pPr lvl="6" algn="l" defTabSz="457200">
+              <a:lnSpc>
+                <a:spcPct val="100000"/>
+              </a:lnSpc>
+              <a:spcBef>
+                <a:spcPts val="283"/>
+              </a:spcBef>
+              <a:buClr>
+                <a:srgbClr val="000000"/>
+              </a:buClr>
+              <a:buSzPct val="45000"/>
+              <a:buFont typeface="Wingdings" charset="2"/>
+              <a:buChar char=""/>
+              <a:defRPr lang="en-US" sz="2000" b="0" u="none" strike="noStrike">
+                <a:solidFill>
+                  <a:schemeClr val="dk1"/>
+                </a:solidFill>
+                <a:effectLst/>
+                <a:uFillTx/>
+                <a:latin typeface="Calibri"/>
+              </a:defRPr>
+            </a:lvl7pPr>
+          </a:lstStyle>
+          <a:p>
+            <a:pPr marL="343080" indent="-343080" algn="l" defTabSz="457200">
+              <a:lnSpc>
+                <a:spcPct val="100000"/>
+              </a:lnSpc>
+              <a:spcBef>
+                <a:spcPts val="641"/>
+              </a:spcBef>
+              <a:buClr>
+                <a:srgbClr val="000000"/>
+              </a:buClr>
+              <a:buFont typeface="Arial"/>
+              <a:buChar char="•"/>
+            </a:pPr>
+            <a:r>
+              <a:rPr lang="en-US" sz="3200" b="0" u="none" strike="noStrike">
+                <a:solidFill>
+                  <a:schemeClr val="dk1"/>
+                </a:solidFill>
+                <a:effectLst/>
+                <a:uFillTx/>
+                <a:latin typeface="Calibri"/>
+              </a:rPr>
+              <a:t>Click to edit the outline text format</a:t>
+            </a:r>
+            <a:endParaRPr lang="en-US" sz="3200" b="0" u="none" strike="noStrike">
+              <a:solidFill>
+                <a:schemeClr val="dk1"/>
+              </a:solidFill>
+              <a:effectLst/>
+              <a:uFillTx/>
+              <a:latin typeface="Calibri"/>
+            </a:endParaRPr>
+          </a:p>
+          <a:p>
+            <a:pPr marL="864000" lvl="1" indent="-324000" algn="l" defTabSz="457200">
+              <a:lnSpc>
+                <a:spcPct val="100000"/>
+              </a:lnSpc>
+              <a:spcBef>
+                <a:spcPts val="561"/>
+              </a:spcBef>
+              <a:buClr>
+                <a:srgbClr val="000000"/>
+              </a:buClr>
+              <a:buSzPct val="75000"/>
+              <a:buFont typeface="Symbol" charset="2"/>
+              <a:buChar char=""/>
+            </a:pPr>
+            <a:r>
+              <a:rPr lang="en-US" sz="2800" b="0" u="none" strike="noStrike">
+                <a:solidFill>
+                  <a:schemeClr val="dk1"/>
+                </a:solidFill>
+                <a:effectLst/>
+                <a:uFillTx/>
+                <a:latin typeface="Calibri"/>
+              </a:rPr>
+              <a:t>Second Outline Level</a:t>
+            </a:r>
+            <a:endParaRPr lang="en-US" sz="2800" b="0" u="none" strike="noStrike">
+              <a:solidFill>
+                <a:schemeClr val="dk1"/>
+              </a:solidFill>
+              <a:effectLst/>
+              <a:uFillTx/>
+              <a:latin typeface="Calibri"/>
+            </a:endParaRPr>
+          </a:p>
+          <a:p>
+            <a:pPr marL="1296000" lvl="2" indent="-288000" algn="l" defTabSz="457200">
+              <a:lnSpc>
+                <a:spcPct val="100000"/>
+              </a:lnSpc>
+              <a:spcBef>
+                <a:spcPts val="479"/>
+              </a:spcBef>
+              <a:buClr>
+                <a:srgbClr val="000000"/>
+              </a:buClr>
+              <a:buSzPct val="45000"/>
+              <a:buFont typeface="Wingdings" charset="2"/>
+              <a:buChar char=""/>
+            </a:pPr>
+            <a:r>
+              <a:rPr lang="en-US" sz="2400" b="0" u="none" strike="noStrike">
+                <a:solidFill>
+                  <a:schemeClr val="dk1"/>
+                </a:solidFill>
+                <a:effectLst/>
+                <a:uFillTx/>
+                <a:latin typeface="Calibri"/>
+              </a:rPr>
+              <a:t>Third Outline Level</a:t>
+            </a:r>
+            <a:endParaRPr lang="en-US" sz="2400" b="0" u="none" strike="noStrike">
+              <a:solidFill>
+                <a:schemeClr val="dk1"/>
+              </a:solidFill>
+              <a:effectLst/>
+              <a:uFillTx/>
+              <a:latin typeface="Calibri"/>
+            </a:endParaRPr>
+          </a:p>
+          <a:p>
+            <a:pPr marL="1728000" lvl="3" indent="-216000" algn="l" defTabSz="457200">
+              <a:lnSpc>
+                <a:spcPct val="100000"/>
+              </a:lnSpc>
+              <a:spcBef>
+                <a:spcPts val="400"/>
+              </a:spcBef>
+              <a:buClr>
+                <a:srgbClr val="000000"/>
+              </a:buClr>
+              <a:buSzPct val="75000"/>
+              <a:buFont typeface="Symbol" charset="2"/>
+              <a:buChar char=""/>
+            </a:pPr>
+            <a:r>
+              <a:rPr lang="en-US" sz="2000" b="0" u="none" strike="noStrike">
+                <a:solidFill>
+                  <a:schemeClr val="dk1"/>
+                </a:solidFill>
+                <a:effectLst/>
+                <a:uFillTx/>
+                <a:latin typeface="Calibri"/>
+              </a:rPr>
+              <a:t>Fourth Outline Level</a:t>
+            </a:r>
+            <a:endParaRPr lang="en-US" sz="2000" b="0" u="none" strike="noStrike">
+              <a:solidFill>
+                <a:schemeClr val="dk1"/>
+              </a:solidFill>
+              <a:effectLst/>
+              <a:uFillTx/>
+              <a:latin typeface="Calibri"/>
+            </a:endParaRPr>
+          </a:p>
+          <a:p>
+            <a:pPr marL="2160000" lvl="4" indent="-216000" algn="l" defTabSz="457200">
+              <a:lnSpc>
+                <a:spcPct val="100000"/>
+              </a:lnSpc>
+              <a:spcBef>
+                <a:spcPts val="400"/>
+              </a:spcBef>
+              <a:buClr>
+                <a:srgbClr val="000000"/>
+              </a:buClr>
+              <a:buSzPct val="45000"/>
+              <a:buFont typeface="Wingdings" charset="2"/>
+              <a:buChar char=""/>
+            </a:pPr>
+            <a:r>
+              <a:rPr lang="en-US" sz="2000" b="0" u="none" strike="noStrike">
+                <a:solidFill>
+                  <a:schemeClr val="dk1"/>
+                </a:solidFill>
+                <a:effectLst/>
+                <a:uFillTx/>
+                <a:latin typeface="Calibri"/>
+              </a:rPr>
+              <a:t>Fifth Outline Level</a:t>
+            </a:r>
+            <a:endParaRPr lang="en-US" sz="2000" b="0" u="none" strike="noStrike">
+              <a:solidFill>
+                <a:schemeClr val="dk1"/>
+              </a:solidFill>
+              <a:effectLst/>
+              <a:uFillTx/>
+              <a:latin typeface="Calibri"/>
+            </a:endParaRPr>
+          </a:p>
+          <a:p>
+            <a:pPr marL="2592000" lvl="5" indent="-216000" algn="l" defTabSz="457200">
+              <a:lnSpc>
+                <a:spcPct val="100000"/>
+              </a:lnSpc>
+              <a:spcBef>
+                <a:spcPts val="283"/>
+              </a:spcBef>
+              <a:buClr>
+                <a:srgbClr val="000000"/>
+              </a:buClr>
+              <a:buSzPct val="45000"/>
+              <a:buFont typeface="Wingdings" charset="2"/>
+              <a:buChar char=""/>
+            </a:pPr>
+            <a:r>
+              <a:rPr lang="en-US" sz="2000" b="0" u="none" strike="noStrike">
+                <a:solidFill>
+                  <a:schemeClr val="dk1"/>
+                </a:solidFill>
+                <a:effectLst/>
+                <a:uFillTx/>
+                <a:latin typeface="Calibri"/>
+              </a:rPr>
+              <a:t>Sixth Outline Level</a:t>
+            </a:r>
+            <a:endParaRPr lang="en-US" sz="2000" b="0" u="none" strike="noStrike">
+              <a:solidFill>
+                <a:schemeClr val="dk1"/>
+              </a:solidFill>
+              <a:effectLst/>
+              <a:uFillTx/>
+              <a:latin typeface="Calibri"/>
+            </a:endParaRPr>
+          </a:p>
+          <a:p>
+            <a:pPr marL="3024000" lvl="6" indent="-216000" algn="l" defTabSz="457200">
+              <a:lnSpc>
+                <a:spcPct val="100000"/>
+              </a:lnSpc>
+              <a:spcBef>
+                <a:spcPts val="283"/>
+              </a:spcBef>
+              <a:buClr>
+                <a:srgbClr val="000000"/>
+              </a:buClr>
+              <a:buSzPct val="45000"/>
+              <a:buFont typeface="Wingdings" charset="2"/>
+              <a:buChar char=""/>
+            </a:pPr>
+            <a:r>
+              <a:rPr lang="en-US" sz="2000" b="0" u="none" strike="noStrike">
+                <a:solidFill>
+                  <a:schemeClr val="dk1"/>
+                </a:solidFill>
+                <a:effectLst/>
+                <a:uFillTx/>
+                <a:latin typeface="Calibri"/>
+              </a:rPr>
+              <a:t>Seventh Outline Level</a:t>
+            </a:r>
+            <a:endParaRPr lang="en-US" sz="2000" b="0" u="none" strike="noStrike">
+              <a:solidFill>
+                <a:schemeClr val="dk1"/>
+              </a:solidFill>
+              <a:effectLst/>
+              <a:uFillTx/>
+              <a:latin typeface="Calibri"/>
+            </a:endParaRPr>
+          </a:p>
+        </p:txBody>
+      </p:sp>
+    </p:spTree>
+  </p:cSld>
+</p:sldLayout>
+</file>
+
+<file path=ppt/slideLayouts/slideLayout5.xml><?xml version="1.0" encoding="utf-8"?>
+<p:sldLayout xmlns:a="http://schemas.openxmlformats.org/drawingml/2006/main" xmlns:p="http://schemas.openxmlformats.org/presentationml/2006/main" xmlns:r="http://schemas.openxmlformats.org/officeDocument/2006/relationships" xmlns:p14="http://schemas.microsoft.com/office/powerpoint/2010/main" xmlns:p15="http://schemas.microsoft.com/office/powerpoint/2012/main" xmlns:mc="http://schemas.openxmlformats.org/markup-compatibility/2006" type="vertTx" preserve="1">
+  <p:cSld name="Title and Vertical Text">
+    <p:bg>
+      <p:bgPr>
+        <a:solidFill>
+          <a:srgbClr val="FFFFFF"/>
+        </a:solidFill>
+      </p:bgPr>
+    </p:bg>
+    <p:spTree>
+      <p:nvGrpSpPr>
+        <p:cNvPr id="1" name=""/>
+        <p:cNvGrpSpPr/>
+        <p:nvPr/>
+      </p:nvGrpSpPr>
+      <p:grpSpPr>
+        <a:xfrm>
+          <a:off x="0" y="0"/>
+          <a:ext cx="0" cy="0"/>
+          <a:chOff x="0" y="0"/>
+          <a:chExt cx="0" cy="0"/>
+        </a:xfrm>
+      </p:grpSpPr>
+      <p:sp>
+        <p:nvSpPr>
+          <p:cNvPr id="24" name="PlaceHolder 1"/>
+          <p:cNvSpPr>
+            <a:spLocks noGrp="1"/>
+          </p:cNvSpPr>
+          <p:nvPr>
+            <p:ph type="title"/>
+          </p:nvPr>
+        </p:nvSpPr>
+        <p:spPr>
+          <a:xfrm>
+            <a:off x="457200" y="274680"/>
+            <a:ext cx="8228880" cy="1142280"/>
+          </a:xfrm>
+          <a:prstGeom prst="rect">
+            <a:avLst/>
+          </a:prstGeom>
+          <a:noFill/>
+          <a:ln w="0">
+            <a:noFill/>
+          </a:ln>
+        </p:spPr>
+        <p:txBody>
+          <a:bodyPr lIns="91440" tIns="45720" rIns="91440" bIns="45720" anchor="ctr">
+            <a:noAutofit/>
+          </a:bodyPr>
+          <a:lstStyle>
+            <a:lvl1pPr indent="0" algn="ctr" defTabSz="457200">
+              <a:lnSpc>
+                <a:spcPct val="100000"/>
+              </a:lnSpc>
+              <a:buNone/>
+              <a:tabLst>
+                <a:tab pos="0" algn="l"/>
+              </a:tabLst>
+              <a:defRPr lang="en-US" sz="4400" b="0" u="none" strike="noStrike">
+                <a:solidFill>
+                  <a:schemeClr val="dk1"/>
+                </a:solidFill>
+                <a:effectLst/>
+                <a:uFillTx/>
+                <a:latin typeface="Calibri"/>
+              </a:defRPr>
+            </a:lvl1pPr>
+          </a:lstStyle>
+          <a:p>
+            <a:pPr indent="0" algn="ctr" defTabSz="457200">
+              <a:lnSpc>
+                <a:spcPct val="100000"/>
+              </a:lnSpc>
+              <a:buNone/>
+              <a:tabLst>
+                <a:tab pos="0" algn="l"/>
+              </a:tabLst>
+            </a:pPr>
+            <a:r>
+              <a:rPr lang="en-US" sz="4400" b="0" u="none" strike="noStrike">
+                <a:solidFill>
+                  <a:schemeClr val="dk1"/>
+                </a:solidFill>
+                <a:effectLst/>
+                <a:uFillTx/>
+                <a:latin typeface="Calibri"/>
+              </a:rPr>
+              <a:t>Click to edit Master title style</a:t>
+            </a:r>
+            <a:endParaRPr lang="en-US" sz="4400" b="0" u="none" strike="noStrike">
+              <a:solidFill>
+                <a:schemeClr val="dk1"/>
+              </a:solidFill>
+              <a:effectLst/>
+              <a:uFillTx/>
+              <a:latin typeface="Calibri"/>
+            </a:endParaRPr>
+          </a:p>
+        </p:txBody>
+      </p:sp>
+      <p:sp>
+        <p:nvSpPr>
+          <p:cNvPr id="25" name="PlaceHolder 2"/>
           <p:cNvSpPr>
             <a:spLocks noGrp="1"/>
           </p:cNvSpPr>
@@ -2337,7 +5296,7 @@
         <p:spPr>
           <a:xfrm>
             <a:off x="457200" y="1600200"/>
-            <a:ext cx="8229240" cy="4525560"/>
+            <a:ext cx="8228880" cy="4525200"/>
           </a:xfrm>
           <a:prstGeom prst="rect">
             <a:avLst/>
@@ -2632,18 +5591,18 @@
       </p:sp>
       <p:sp>
         <p:nvSpPr>
-          <p:cNvPr id="9" name="PlaceHolder 3"/>
+          <p:cNvPr id="26" name="PlaceHolder 3"/>
           <p:cNvSpPr>
             <a:spLocks noGrp="1"/>
           </p:cNvSpPr>
           <p:nvPr>
-            <p:ph type="dt" idx="4"/>
+            <p:ph type="dt" idx="13"/>
           </p:nvPr>
         </p:nvSpPr>
         <p:spPr>
           <a:xfrm>
             <a:off x="457200" y="6356520"/>
-            <a:ext cx="2133360" cy="364680"/>
+            <a:ext cx="2133000" cy="364320"/>
           </a:xfrm>
           <a:prstGeom prst="rect">
             <a:avLst/>
@@ -2663,6 +5622,9 @@
                 <a:spcPct val="100000"/>
               </a:lnSpc>
               <a:buNone/>
+              <a:tabLst>
+                <a:tab pos="0" algn="l"/>
+              </a:tabLst>
               <a:defRPr lang="en-US" sz="1200" b="0" u="none" strike="noStrike">
                 <a:solidFill>
                   <a:schemeClr val="dk1">
@@ -2681,6 +5643,9 @@
                 <a:spcPct val="100000"/>
               </a:lnSpc>
               <a:buNone/>
+              <a:tabLst>
+                <a:tab pos="0" algn="l"/>
+              </a:tabLst>
             </a:pPr>
             <a:r>
               <a:rPr lang="en-US" sz="1200" b="0" u="none" strike="noStrike">
@@ -2708,18 +5673,18 @@
       </p:sp>
       <p:sp>
         <p:nvSpPr>
-          <p:cNvPr id="10" name="PlaceHolder 4"/>
+          <p:cNvPr id="27" name="PlaceHolder 4"/>
           <p:cNvSpPr>
             <a:spLocks noGrp="1"/>
           </p:cNvSpPr>
           <p:nvPr>
-            <p:ph type="ftr" idx="5"/>
+            <p:ph type="ftr" idx="14"/>
           </p:nvPr>
         </p:nvSpPr>
         <p:spPr>
           <a:xfrm>
             <a:off x="3124080" y="6356520"/>
-            <a:ext cx="2895120" cy="364680"/>
+            <a:ext cx="2894760" cy="364320"/>
           </a:xfrm>
           <a:prstGeom prst="rect">
             <a:avLst/>
@@ -2735,7 +5700,13 @@
           </a:bodyPr>
           <a:lstStyle>
             <a:lvl1pPr indent="0" algn="ctr">
+              <a:lnSpc>
+                <a:spcPct val="100000"/>
+              </a:lnSpc>
               <a:buNone/>
+              <a:tabLst>
+                <a:tab pos="0" algn="l"/>
+              </a:tabLst>
               <a:defRPr lang="en-US" sz="1400" b="0" u="none" strike="noStrike">
                 <a:solidFill>
                   <a:srgbClr val="000000"/>
@@ -2748,7 +5719,13 @@
           </a:lstStyle>
           <a:p>
             <a:pPr indent="0" algn="ctr">
+              <a:lnSpc>
+                <a:spcPct val="100000"/>
+              </a:lnSpc>
               <a:buNone/>
+              <a:tabLst>
+                <a:tab pos="0" algn="l"/>
+              </a:tabLst>
             </a:pPr>
             <a:r>
               <a:rPr lang="en-US" sz="1400" b="0" u="none" strike="noStrike">
@@ -2774,18 +5751,18 @@
       </p:sp>
       <p:sp>
         <p:nvSpPr>
-          <p:cNvPr id="11" name="PlaceHolder 5"/>
+          <p:cNvPr id="28" name="PlaceHolder 5"/>
           <p:cNvSpPr>
             <a:spLocks noGrp="1"/>
           </p:cNvSpPr>
           <p:nvPr>
-            <p:ph type="sldNum" idx="6"/>
+            <p:ph type="sldNum" idx="15"/>
           </p:nvPr>
         </p:nvSpPr>
         <p:spPr>
           <a:xfrm>
             <a:off x="6553080" y="6356520"/>
-            <a:ext cx="2133360" cy="364680"/>
+            <a:ext cx="2133000" cy="364320"/>
           </a:xfrm>
           <a:prstGeom prst="rect">
             <a:avLst/>
@@ -2805,6 +5782,9 @@
                 <a:spcPct val="100000"/>
               </a:lnSpc>
               <a:buNone/>
+              <a:tabLst>
+                <a:tab pos="0" algn="l"/>
+              </a:tabLst>
               <a:defRPr lang="en-US" sz="1200" b="0" u="none" strike="noStrike">
                 <a:solidFill>
                   <a:schemeClr val="dk1">
@@ -2823,8 +5803,11 @@
                 <a:spcPct val="100000"/>
               </a:lnSpc>
               <a:buNone/>
-            </a:pPr>
-            <a:fld id="{C33A6AC5-F384-4F55-B4EE-725EDE6A5F89}" type="slidenum">
+              <a:tabLst>
+                <a:tab pos="0" algn="l"/>
+              </a:tabLst>
+            </a:pPr>
+            <a:fld id="{849AAED8-6098-4E60-891D-962F3548A10F}" type="slidenum">
               <a:rPr lang="en-US" sz="1200" b="0" u="none" strike="noStrike">
                 <a:solidFill>
                   <a:schemeClr val="dk1">
@@ -2853,7 +5836,7 @@
 </p:sldLayout>
 </file>
 
-<file path=ppt/slideLayouts/slideLayout3.xml><?xml version="1.0" encoding="utf-8"?>
+<file path=ppt/slideLayouts/slideLayout6.xml><?xml version="1.0" encoding="utf-8"?>
 <p:sldLayout xmlns:a="http://schemas.openxmlformats.org/drawingml/2006/main" xmlns:p="http://schemas.openxmlformats.org/presentationml/2006/main" xmlns:r="http://schemas.openxmlformats.org/officeDocument/2006/relationships" xmlns:p14="http://schemas.microsoft.com/office/powerpoint/2010/main" xmlns:p15="http://schemas.microsoft.com/office/powerpoint/2012/main" xmlns:mc="http://schemas.openxmlformats.org/markup-compatibility/2006" type="vertTitleAndTx" preserve="1">
   <p:cSld name="Vertical Title and Text">
     <p:bg>
@@ -2879,7 +5862,7 @@
       </p:grpSpPr>
       <p:sp>
         <p:nvSpPr>
-          <p:cNvPr id="12" name="PlaceHolder 1"/>
+          <p:cNvPr id="29" name="PlaceHolder 1"/>
           <p:cNvSpPr>
             <a:spLocks noGrp="1"/>
           </p:cNvSpPr>
@@ -2890,7 +5873,7 @@
         <p:spPr>
           <a:xfrm>
             <a:off x="6629400" y="274680"/>
-            <a:ext cx="2057040" cy="5851080"/>
+            <a:ext cx="2056680" cy="5850720"/>
           </a:xfrm>
           <a:prstGeom prst="rect">
             <a:avLst/>
@@ -2910,6 +5893,9 @@
                 <a:spcPct val="100000"/>
               </a:lnSpc>
               <a:buNone/>
+              <a:tabLst>
+                <a:tab pos="0" algn="l"/>
+              </a:tabLst>
               <a:defRPr lang="en-US" sz="4400" b="0" u="none" strike="noStrike">
                 <a:solidFill>
                   <a:schemeClr val="dk1"/>
@@ -2926,6 +5912,9 @@
                 <a:spcPct val="100000"/>
               </a:lnSpc>
               <a:buNone/>
+              <a:tabLst>
+                <a:tab pos="0" algn="l"/>
+              </a:tabLst>
             </a:pPr>
             <a:r>
               <a:rPr lang="en-US" sz="4400" b="0" u="none" strike="noStrike">
@@ -2951,7 +5940,7 @@
       </p:sp>
       <p:sp>
         <p:nvSpPr>
-          <p:cNvPr id="13" name="PlaceHolder 2"/>
+          <p:cNvPr id="30" name="PlaceHolder 2"/>
           <p:cNvSpPr>
             <a:spLocks noGrp="1"/>
           </p:cNvSpPr>
@@ -2962,7 +5951,7 @@
         <p:spPr>
           <a:xfrm>
             <a:off x="457200" y="274680"/>
-            <a:ext cx="6019560" cy="5851080"/>
+            <a:ext cx="6019200" cy="5850720"/>
           </a:xfrm>
           <a:prstGeom prst="rect">
             <a:avLst/>
@@ -3257,18 +6246,18 @@
       </p:sp>
       <p:sp>
         <p:nvSpPr>
-          <p:cNvPr id="14" name="PlaceHolder 3"/>
+          <p:cNvPr id="31" name="PlaceHolder 3"/>
           <p:cNvSpPr>
             <a:spLocks noGrp="1"/>
           </p:cNvSpPr>
           <p:nvPr>
-            <p:ph type="dt" idx="7"/>
+            <p:ph type="dt" idx="16"/>
           </p:nvPr>
         </p:nvSpPr>
         <p:spPr>
           <a:xfrm>
             <a:off x="457200" y="6356520"/>
-            <a:ext cx="2133360" cy="364680"/>
+            <a:ext cx="2133000" cy="364320"/>
           </a:xfrm>
           <a:prstGeom prst="rect">
             <a:avLst/>
@@ -3288,6 +6277,9 @@
                 <a:spcPct val="100000"/>
               </a:lnSpc>
               <a:buNone/>
+              <a:tabLst>
+                <a:tab pos="0" algn="l"/>
+              </a:tabLst>
               <a:defRPr lang="en-US" sz="1200" b="0" u="none" strike="noStrike">
                 <a:solidFill>
                   <a:schemeClr val="dk1">
@@ -3306,6 +6298,9 @@
                 <a:spcPct val="100000"/>
               </a:lnSpc>
               <a:buNone/>
+              <a:tabLst>
+                <a:tab pos="0" algn="l"/>
+              </a:tabLst>
             </a:pPr>
             <a:r>
               <a:rPr lang="en-US" sz="1200" b="0" u="none" strike="noStrike">
@@ -3333,18 +6328,18 @@
       </p:sp>
       <p:sp>
         <p:nvSpPr>
-          <p:cNvPr id="15" name="PlaceHolder 4"/>
+          <p:cNvPr id="32" name="PlaceHolder 4"/>
           <p:cNvSpPr>
             <a:spLocks noGrp="1"/>
           </p:cNvSpPr>
           <p:nvPr>
-            <p:ph type="ftr" idx="8"/>
+            <p:ph type="ftr" idx="17"/>
           </p:nvPr>
         </p:nvSpPr>
         <p:spPr>
           <a:xfrm>
             <a:off x="3124080" y="6356520"/>
-            <a:ext cx="2895120" cy="364680"/>
+            <a:ext cx="2894760" cy="364320"/>
           </a:xfrm>
           <a:prstGeom prst="rect">
             <a:avLst/>
@@ -3360,7 +6355,13 @@
           </a:bodyPr>
           <a:lstStyle>
             <a:lvl1pPr indent="0" algn="ctr">
+              <a:lnSpc>
+                <a:spcPct val="100000"/>
+              </a:lnSpc>
               <a:buNone/>
+              <a:tabLst>
+                <a:tab pos="0" algn="l"/>
+              </a:tabLst>
               <a:defRPr lang="en-US" sz="1400" b="0" u="none" strike="noStrike">
                 <a:solidFill>
                   <a:srgbClr val="000000"/>
@@ -3373,7 +6374,13 @@
           </a:lstStyle>
           <a:p>
             <a:pPr indent="0" algn="ctr">
+              <a:lnSpc>
+                <a:spcPct val="100000"/>
+              </a:lnSpc>
               <a:buNone/>
+              <a:tabLst>
+                <a:tab pos="0" algn="l"/>
+              </a:tabLst>
             </a:pPr>
             <a:r>
               <a:rPr lang="en-US" sz="1400" b="0" u="none" strike="noStrike">
@@ -3399,18 +6406,18 @@
       </p:sp>
       <p:sp>
         <p:nvSpPr>
-          <p:cNvPr id="16" name="PlaceHolder 5"/>
+          <p:cNvPr id="33" name="PlaceHolder 5"/>
           <p:cNvSpPr>
             <a:spLocks noGrp="1"/>
           </p:cNvSpPr>
           <p:nvPr>
-            <p:ph type="sldNum" idx="9"/>
+            <p:ph type="sldNum" idx="18"/>
           </p:nvPr>
         </p:nvSpPr>
         <p:spPr>
           <a:xfrm>
             <a:off x="6553080" y="6356520"/>
-            <a:ext cx="2133360" cy="364680"/>
+            <a:ext cx="2133000" cy="364320"/>
           </a:xfrm>
           <a:prstGeom prst="rect">
             <a:avLst/>
@@ -3430,6 +6437,9 @@
                 <a:spcPct val="100000"/>
               </a:lnSpc>
               <a:buNone/>
+              <a:tabLst>
+                <a:tab pos="0" algn="l"/>
+              </a:tabLst>
               <a:defRPr lang="en-US" sz="1200" b="0" u="none" strike="noStrike">
                 <a:solidFill>
                   <a:schemeClr val="dk1">
@@ -3448,8 +6458,11 @@
                 <a:spcPct val="100000"/>
               </a:lnSpc>
               <a:buNone/>
-            </a:pPr>
-            <a:fld id="{B40D205A-6061-48E7-A0B8-DFB9B77D2320}" type="slidenum">
+              <a:tabLst>
+                <a:tab pos="0" algn="l"/>
+              </a:tabLst>
+            </a:pPr>
+            <a:fld id="{519A73A9-7981-4AB6-A216-94C35A427ED5}" type="slidenum">
               <a:rPr lang="en-US" sz="1200" b="0" u="none" strike="noStrike">
                 <a:solidFill>
                   <a:schemeClr val="dk1">
@@ -3478,7 +6491,7 @@
 </p:sldLayout>
 </file>
 
-<file path=ppt/slideLayouts/slideLayout4.xml><?xml version="1.0" encoding="utf-8"?>
+<file path=ppt/slideLayouts/slideLayout7.xml><?xml version="1.0" encoding="utf-8"?>
 <p:sldLayout xmlns:a="http://schemas.openxmlformats.org/drawingml/2006/main" xmlns:p="http://schemas.openxmlformats.org/presentationml/2006/main" xmlns:r="http://schemas.openxmlformats.org/officeDocument/2006/relationships" xmlns:p14="http://schemas.microsoft.com/office/powerpoint/2010/main" xmlns:p15="http://schemas.microsoft.com/office/powerpoint/2012/main" xmlns:mc="http://schemas.openxmlformats.org/markup-compatibility/2006" type="obj" preserve="1">
   <p:cSld name="Title and Content">
     <p:bg>
@@ -3504,7 +6517,7 @@
       </p:grpSpPr>
       <p:sp>
         <p:nvSpPr>
-          <p:cNvPr id="17" name="PlaceHolder 1"/>
+          <p:cNvPr id="34" name="PlaceHolder 1"/>
           <p:cNvSpPr>
             <a:spLocks noGrp="1"/>
           </p:cNvSpPr>
@@ -3515,7 +6528,7 @@
         <p:spPr>
           <a:xfrm>
             <a:off x="457200" y="274680"/>
-            <a:ext cx="8229240" cy="1142640"/>
+            <a:ext cx="8228880" cy="1142280"/>
           </a:xfrm>
           <a:prstGeom prst="rect">
             <a:avLst/>
@@ -3535,6 +6548,9 @@
                 <a:spcPct val="100000"/>
               </a:lnSpc>
               <a:buNone/>
+              <a:tabLst>
+                <a:tab pos="0" algn="l"/>
+              </a:tabLst>
               <a:defRPr lang="en-US" sz="4400" b="0" u="none" strike="noStrike">
                 <a:solidFill>
                   <a:schemeClr val="dk1"/>
@@ -3551,6 +6567,9 @@
                 <a:spcPct val="100000"/>
               </a:lnSpc>
               <a:buNone/>
+              <a:tabLst>
+                <a:tab pos="0" algn="l"/>
+              </a:tabLst>
             </a:pPr>
             <a:r>
               <a:rPr lang="en-US" sz="4400" b="0" u="none" strike="noStrike">
@@ -3576,7 +6595,7 @@
       </p:sp>
       <p:sp>
         <p:nvSpPr>
-          <p:cNvPr id="18" name="PlaceHolder 2"/>
+          <p:cNvPr id="35" name="PlaceHolder 2"/>
           <p:cNvSpPr>
             <a:spLocks noGrp="1"/>
           </p:cNvSpPr>
@@ -3587,7 +6606,7 @@
         <p:spPr>
           <a:xfrm>
             <a:off x="457200" y="1600200"/>
-            <a:ext cx="8229240" cy="4525560"/>
+            <a:ext cx="8228880" cy="4525200"/>
           </a:xfrm>
           <a:prstGeom prst="rect">
             <a:avLst/>
@@ -3882,18 +6901,18 @@
       </p:sp>
       <p:sp>
         <p:nvSpPr>
-          <p:cNvPr id="19" name="PlaceHolder 3"/>
+          <p:cNvPr id="36" name="PlaceHolder 3"/>
           <p:cNvSpPr>
             <a:spLocks noGrp="1"/>
           </p:cNvSpPr>
           <p:nvPr>
-            <p:ph type="dt" idx="10"/>
+            <p:ph type="dt" idx="19"/>
           </p:nvPr>
         </p:nvSpPr>
         <p:spPr>
           <a:xfrm>
             <a:off x="457200" y="6356520"/>
-            <a:ext cx="2133360" cy="364680"/>
+            <a:ext cx="2133000" cy="364320"/>
           </a:xfrm>
           <a:prstGeom prst="rect">
             <a:avLst/>
@@ -3913,6 +6932,9 @@
                 <a:spcPct val="100000"/>
               </a:lnSpc>
               <a:buNone/>
+              <a:tabLst>
+                <a:tab pos="0" algn="l"/>
+              </a:tabLst>
               <a:defRPr lang="en-US" sz="1200" b="0" u="none" strike="noStrike">
                 <a:solidFill>
                   <a:schemeClr val="dk1">
@@ -3931,6 +6953,9 @@
                 <a:spcPct val="100000"/>
               </a:lnSpc>
               <a:buNone/>
+              <a:tabLst>
+                <a:tab pos="0" algn="l"/>
+              </a:tabLst>
             </a:pPr>
             <a:r>
               <a:rPr lang="en-US" sz="1200" b="0" u="none" strike="noStrike">
@@ -3958,18 +6983,18 @@
       </p:sp>
       <p:sp>
         <p:nvSpPr>
-          <p:cNvPr id="20" name="PlaceHolder 4"/>
+          <p:cNvPr id="37" name="PlaceHolder 4"/>
           <p:cNvSpPr>
             <a:spLocks noGrp="1"/>
           </p:cNvSpPr>
           <p:nvPr>
-            <p:ph type="ftr" idx="11"/>
+            <p:ph type="ftr" idx="20"/>
           </p:nvPr>
         </p:nvSpPr>
         <p:spPr>
           <a:xfrm>
             <a:off x="3124080" y="6356520"/>
-            <a:ext cx="2895120" cy="364680"/>
+            <a:ext cx="2894760" cy="364320"/>
           </a:xfrm>
           <a:prstGeom prst="rect">
             <a:avLst/>
@@ -3985,7 +7010,13 @@
           </a:bodyPr>
           <a:lstStyle>
             <a:lvl1pPr indent="0" algn="ctr">
+              <a:lnSpc>
+                <a:spcPct val="100000"/>
+              </a:lnSpc>
               <a:buNone/>
+              <a:tabLst>
+                <a:tab pos="0" algn="l"/>
+              </a:tabLst>
               <a:defRPr lang="en-US" sz="1400" b="0" u="none" strike="noStrike">
                 <a:solidFill>
                   <a:srgbClr val="000000"/>
@@ -3998,7 +7029,13 @@
           </a:lstStyle>
           <a:p>
             <a:pPr indent="0" algn="ctr">
+              <a:lnSpc>
+                <a:spcPct val="100000"/>
+              </a:lnSpc>
               <a:buNone/>
+              <a:tabLst>
+                <a:tab pos="0" algn="l"/>
+              </a:tabLst>
             </a:pPr>
             <a:r>
               <a:rPr lang="en-US" sz="1400" b="0" u="none" strike="noStrike">
@@ -4024,18 +7061,18 @@
       </p:sp>
       <p:sp>
         <p:nvSpPr>
-          <p:cNvPr id="21" name="PlaceHolder 5"/>
+          <p:cNvPr id="38" name="PlaceHolder 5"/>
           <p:cNvSpPr>
             <a:spLocks noGrp="1"/>
           </p:cNvSpPr>
           <p:nvPr>
-            <p:ph type="sldNum" idx="12"/>
+            <p:ph type="sldNum" idx="21"/>
           </p:nvPr>
         </p:nvSpPr>
         <p:spPr>
           <a:xfrm>
             <a:off x="6553080" y="6356520"/>
-            <a:ext cx="2133360" cy="364680"/>
+            <a:ext cx="2133000" cy="364320"/>
           </a:xfrm>
           <a:prstGeom prst="rect">
             <a:avLst/>
@@ -4055,6 +7092,9 @@
                 <a:spcPct val="100000"/>
               </a:lnSpc>
               <a:buNone/>
+              <a:tabLst>
+                <a:tab pos="0" algn="l"/>
+              </a:tabLst>
               <a:defRPr lang="en-US" sz="1200" b="0" u="none" strike="noStrike">
                 <a:solidFill>
                   <a:schemeClr val="dk1">
@@ -4073,8 +7113,11 @@
                 <a:spcPct val="100000"/>
               </a:lnSpc>
               <a:buNone/>
-            </a:pPr>
-            <a:fld id="{99DC1CAA-6E74-490C-959B-5DBBAEA2927B}" type="slidenum">
+              <a:tabLst>
+                <a:tab pos="0" algn="l"/>
+              </a:tabLst>
+            </a:pPr>
+            <a:fld id="{B27A9AFF-2048-4E9C-9B85-46C63A71849B}" type="slidenum">
               <a:rPr lang="en-US" sz="1200" b="0" u="none" strike="noStrike">
                 <a:solidFill>
                   <a:schemeClr val="dk1">
@@ -4103,7 +7146,7 @@
 </p:sldLayout>
 </file>
 
-<file path=ppt/slideLayouts/slideLayout5.xml><?xml version="1.0" encoding="utf-8"?>
+<file path=ppt/slideLayouts/slideLayout8.xml><?xml version="1.0" encoding="utf-8"?>
 <p:sldLayout xmlns:a="http://schemas.openxmlformats.org/drawingml/2006/main" xmlns:p="http://schemas.openxmlformats.org/presentationml/2006/main" xmlns:r="http://schemas.openxmlformats.org/officeDocument/2006/relationships" xmlns:p14="http://schemas.microsoft.com/office/powerpoint/2010/main" xmlns:p15="http://schemas.microsoft.com/office/powerpoint/2012/main" xmlns:mc="http://schemas.openxmlformats.org/markup-compatibility/2006" type="blank" preserve="1">
   <p:cSld name="Section Header">
     <p:bg>
@@ -4129,7 +7172,7 @@
       </p:grpSpPr>
       <p:sp>
         <p:nvSpPr>
-          <p:cNvPr id="22" name="PlaceHolder 1"/>
+          <p:cNvPr id="39" name="PlaceHolder 1"/>
           <p:cNvSpPr>
             <a:spLocks noGrp="1"/>
           </p:cNvSpPr>
@@ -4140,7 +7183,7 @@
         <p:spPr>
           <a:xfrm>
             <a:off x="722160" y="4406760"/>
-            <a:ext cx="7772040" cy="1361880"/>
+            <a:ext cx="7771680" cy="1361520"/>
           </a:xfrm>
           <a:prstGeom prst="rect">
             <a:avLst/>
@@ -4160,6 +7203,9 @@
                 <a:spcPct val="100000"/>
               </a:lnSpc>
               <a:buNone/>
+              <a:tabLst>
+                <a:tab pos="0" algn="l"/>
+              </a:tabLst>
               <a:defRPr lang="en-US" sz="4000" b="1" u="none" strike="noStrike" cap="all">
                 <a:solidFill>
                   <a:schemeClr val="dk1"/>
@@ -4176,6 +7222,9 @@
                 <a:spcPct val="100000"/>
               </a:lnSpc>
               <a:buNone/>
+              <a:tabLst>
+                <a:tab pos="0" algn="l"/>
+              </a:tabLst>
             </a:pPr>
             <a:r>
               <a:rPr lang="en-US" sz="4000" b="1" u="none" strike="noStrike" cap="all">
@@ -4201,7 +7250,7 @@
       </p:sp>
       <p:sp>
         <p:nvSpPr>
-          <p:cNvPr id="23" name="PlaceHolder 2"/>
+          <p:cNvPr id="40" name="PlaceHolder 2"/>
           <p:cNvSpPr>
             <a:spLocks noGrp="1"/>
           </p:cNvSpPr>
@@ -4212,7 +7261,7 @@
         <p:spPr>
           <a:xfrm>
             <a:off x="722160" y="2906640"/>
-            <a:ext cx="7772040" cy="1499760"/>
+            <a:ext cx="7771680" cy="1499400"/>
           </a:xfrm>
           <a:prstGeom prst="rect">
             <a:avLst/>
@@ -4291,18 +7340,18 @@
       </p:sp>
       <p:sp>
         <p:nvSpPr>
-          <p:cNvPr id="24" name="PlaceHolder 3"/>
+          <p:cNvPr id="41" name="PlaceHolder 3"/>
           <p:cNvSpPr>
             <a:spLocks noGrp="1"/>
           </p:cNvSpPr>
           <p:nvPr>
-            <p:ph type="dt" idx="13"/>
+            <p:ph type="dt" idx="22"/>
           </p:nvPr>
         </p:nvSpPr>
         <p:spPr>
           <a:xfrm>
             <a:off x="457200" y="6356520"/>
-            <a:ext cx="2133360" cy="364680"/>
+            <a:ext cx="2133000" cy="364320"/>
           </a:xfrm>
           <a:prstGeom prst="rect">
             <a:avLst/>
@@ -4322,6 +7371,9 @@
                 <a:spcPct val="100000"/>
               </a:lnSpc>
               <a:buNone/>
+              <a:tabLst>
+                <a:tab pos="0" algn="l"/>
+              </a:tabLst>
               <a:defRPr lang="en-US" sz="1200" b="0" u="none" strike="noStrike">
                 <a:solidFill>
                   <a:schemeClr val="dk1">
@@ -4340,6 +7392,9 @@
                 <a:spcPct val="100000"/>
               </a:lnSpc>
               <a:buNone/>
+              <a:tabLst>
+                <a:tab pos="0" algn="l"/>
+              </a:tabLst>
             </a:pPr>
             <a:r>
               <a:rPr lang="en-US" sz="1200" b="0" u="none" strike="noStrike">
@@ -4367,18 +7422,18 @@
       </p:sp>
       <p:sp>
         <p:nvSpPr>
-          <p:cNvPr id="25" name="PlaceHolder 4"/>
+          <p:cNvPr id="42" name="PlaceHolder 4"/>
           <p:cNvSpPr>
             <a:spLocks noGrp="1"/>
           </p:cNvSpPr>
           <p:nvPr>
-            <p:ph type="ftr" idx="14"/>
+            <p:ph type="ftr" idx="23"/>
           </p:nvPr>
         </p:nvSpPr>
         <p:spPr>
           <a:xfrm>
             <a:off x="3124080" y="6356520"/>
-            <a:ext cx="2895120" cy="364680"/>
+            <a:ext cx="2894760" cy="364320"/>
           </a:xfrm>
           <a:prstGeom prst="rect">
             <a:avLst/>
@@ -4394,7 +7449,13 @@
           </a:bodyPr>
           <a:lstStyle>
             <a:lvl1pPr indent="0" algn="ctr">
+              <a:lnSpc>
+                <a:spcPct val="100000"/>
+              </a:lnSpc>
               <a:buNone/>
+              <a:tabLst>
+                <a:tab pos="0" algn="l"/>
+              </a:tabLst>
               <a:defRPr lang="en-US" sz="1400" b="0" u="none" strike="noStrike">
                 <a:solidFill>
                   <a:srgbClr val="000000"/>
@@ -4407,7 +7468,13 @@
           </a:lstStyle>
           <a:p>
             <a:pPr indent="0" algn="ctr">
+              <a:lnSpc>
+                <a:spcPct val="100000"/>
+              </a:lnSpc>
               <a:buNone/>
+              <a:tabLst>
+                <a:tab pos="0" algn="l"/>
+              </a:tabLst>
             </a:pPr>
             <a:r>
               <a:rPr lang="en-US" sz="1400" b="0" u="none" strike="noStrike">
@@ -4433,18 +7500,18 @@
       </p:sp>
       <p:sp>
         <p:nvSpPr>
-          <p:cNvPr id="26" name="PlaceHolder 5"/>
+          <p:cNvPr id="43" name="PlaceHolder 5"/>
           <p:cNvSpPr>
             <a:spLocks noGrp="1"/>
           </p:cNvSpPr>
           <p:nvPr>
-            <p:ph type="sldNum" idx="15"/>
+            <p:ph type="sldNum" idx="24"/>
           </p:nvPr>
         </p:nvSpPr>
         <p:spPr>
           <a:xfrm>
             <a:off x="6553080" y="6356520"/>
-            <a:ext cx="2133360" cy="364680"/>
+            <a:ext cx="2133000" cy="364320"/>
           </a:xfrm>
           <a:prstGeom prst="rect">
             <a:avLst/>
@@ -4464,6 +7531,9 @@
                 <a:spcPct val="100000"/>
               </a:lnSpc>
               <a:buNone/>
+              <a:tabLst>
+                <a:tab pos="0" algn="l"/>
+              </a:tabLst>
               <a:defRPr lang="en-US" sz="1200" b="0" u="none" strike="noStrike">
                 <a:solidFill>
                   <a:schemeClr val="dk1">
@@ -4482,8 +7552,11 @@
                 <a:spcPct val="100000"/>
               </a:lnSpc>
               <a:buNone/>
-            </a:pPr>
-            <a:fld id="{D8FB03FE-A1C4-4C3C-B6B1-D6C6F8A650C5}" type="slidenum">
+              <a:tabLst>
+                <a:tab pos="0" algn="l"/>
+              </a:tabLst>
+            </a:pPr>
+            <a:fld id="{8274A14C-2C11-46AA-AF9F-D5AC97EB4DDC}" type="slidenum">
               <a:rPr lang="en-US" sz="1200" b="0" u="none" strike="noStrike">
                 <a:solidFill>
                   <a:schemeClr val="dk1">
@@ -4512,7 +7585,7 @@
 </p:sldLayout>
 </file>
 
-<file path=ppt/slideLayouts/slideLayout6.xml><?xml version="1.0" encoding="utf-8"?>
+<file path=ppt/slideLayouts/slideLayout9.xml><?xml version="1.0" encoding="utf-8"?>
 <p:sldLayout xmlns:a="http://schemas.openxmlformats.org/drawingml/2006/main" xmlns:p="http://schemas.openxmlformats.org/presentationml/2006/main" xmlns:r="http://schemas.openxmlformats.org/officeDocument/2006/relationships" xmlns:p14="http://schemas.microsoft.com/office/powerpoint/2010/main" xmlns:p15="http://schemas.microsoft.com/office/powerpoint/2012/main" xmlns:mc="http://schemas.openxmlformats.org/markup-compatibility/2006" type="twoObj" preserve="1">
   <p:cSld name="Two Content">
     <p:bg>
@@ -4538,7 +7611,7 @@
       </p:grpSpPr>
       <p:sp>
         <p:nvSpPr>
-          <p:cNvPr id="27" name="PlaceHolder 1"/>
+          <p:cNvPr id="44" name="PlaceHolder 1"/>
           <p:cNvSpPr>
             <a:spLocks noGrp="1"/>
           </p:cNvSpPr>
@@ -4549,7 +7622,7 @@
         <p:spPr>
           <a:xfrm>
             <a:off x="457200" y="274680"/>
-            <a:ext cx="8229240" cy="1142640"/>
+            <a:ext cx="8228880" cy="1142280"/>
           </a:xfrm>
           <a:prstGeom prst="rect">
             <a:avLst/>
@@ -4569,6 +7642,9 @@
                 <a:spcPct val="100000"/>
               </a:lnSpc>
               <a:buNone/>
+              <a:tabLst>
+                <a:tab pos="0" algn="l"/>
+              </a:tabLst>
               <a:defRPr lang="en-US" sz="4400" b="0" u="none" strike="noStrike">
                 <a:solidFill>
                   <a:schemeClr val="dk1"/>
@@ -4585,6 +7661,9 @@
                 <a:spcPct val="100000"/>
               </a:lnSpc>
               <a:buNone/>
+              <a:tabLst>
+                <a:tab pos="0" algn="l"/>
+              </a:tabLst>
             </a:pPr>
             <a:r>
               <a:rPr lang="en-US" sz="4400" b="0" u="none" strike="noStrike">
@@ -4610,7 +7689,7 @@
       </p:sp>
       <p:sp>
         <p:nvSpPr>
-          <p:cNvPr id="28" name="PlaceHolder 2"/>
+          <p:cNvPr id="45" name="PlaceHolder 2"/>
           <p:cNvSpPr>
             <a:spLocks noGrp="1"/>
           </p:cNvSpPr>
@@ -4621,7 +7700,7 @@
         <p:spPr>
           <a:xfrm>
             <a:off x="457200" y="1600200"/>
-            <a:ext cx="4038120" cy="4525560"/>
+            <a:ext cx="4037760" cy="4525200"/>
           </a:xfrm>
           <a:prstGeom prst="rect">
             <a:avLst/>
@@ -4916,7 +7995,7 @@
       </p:sp>
       <p:sp>
         <p:nvSpPr>
-          <p:cNvPr id="29" name="PlaceHolder 3"/>
+          <p:cNvPr id="46" name="PlaceHolder 3"/>
           <p:cNvSpPr>
             <a:spLocks noGrp="1"/>
           </p:cNvSpPr>
@@ -4927,7 +8006,7 @@
         <p:spPr>
           <a:xfrm>
             <a:off x="4648320" y="1600200"/>
-            <a:ext cx="4038120" cy="4525560"/>
+            <a:ext cx="4037760" cy="4525200"/>
           </a:xfrm>
           <a:prstGeom prst="rect">
             <a:avLst/>
@@ -5222,18 +8301,18 @@
       </p:sp>
       <p:sp>
         <p:nvSpPr>
-          <p:cNvPr id="30" name="PlaceHolder 4"/>
+          <p:cNvPr id="47" name="PlaceHolder 4"/>
           <p:cNvSpPr>
             <a:spLocks noGrp="1"/>
           </p:cNvSpPr>
           <p:nvPr>
-            <p:ph type="dt" idx="16"/>
+            <p:ph type="dt" idx="25"/>
           </p:nvPr>
         </p:nvSpPr>
         <p:spPr>
           <a:xfrm>
             <a:off x="457200" y="6356520"/>
-            <a:ext cx="2133360" cy="364680"/>
+            <a:ext cx="2133000" cy="364320"/>
           </a:xfrm>
           <a:prstGeom prst="rect">
             <a:avLst/>
@@ -5253,6 +8332,9 @@
                 <a:spcPct val="100000"/>
               </a:lnSpc>
               <a:buNone/>
+              <a:tabLst>
+                <a:tab pos="0" algn="l"/>
+              </a:tabLst>
               <a:defRPr lang="en-US" sz="1200" b="0" u="none" strike="noStrike">
                 <a:solidFill>
                   <a:schemeClr val="dk1">
@@ -5271,6 +8353,9 @@
                 <a:spcPct val="100000"/>
               </a:lnSpc>
               <a:buNone/>
+              <a:tabLst>
+                <a:tab pos="0" algn="l"/>
+              </a:tabLst>
             </a:pPr>
             <a:r>
               <a:rPr lang="en-US" sz="1200" b="0" u="none" strike="noStrike">
@@ -5298,18 +8383,18 @@
       </p:sp>
       <p:sp>
         <p:nvSpPr>
-          <p:cNvPr id="31" name="PlaceHolder 5"/>
+          <p:cNvPr id="48" name="PlaceHolder 5"/>
           <p:cNvSpPr>
             <a:spLocks noGrp="1"/>
           </p:cNvSpPr>
           <p:nvPr>
-            <p:ph type="ftr" idx="17"/>
+            <p:ph type="ftr" idx="26"/>
           </p:nvPr>
         </p:nvSpPr>
         <p:spPr>
           <a:xfrm>
             <a:off x="3124080" y="6356520"/>
-            <a:ext cx="2895120" cy="364680"/>
+            <a:ext cx="2894760" cy="364320"/>
           </a:xfrm>
           <a:prstGeom prst="rect">
             <a:avLst/>
@@ -5325,7 +8410,13 @@
           </a:bodyPr>
           <a:lstStyle>
             <a:lvl1pPr indent="0" algn="ctr">
+              <a:lnSpc>
+                <a:spcPct val="100000"/>
+              </a:lnSpc>
               <a:buNone/>
+              <a:tabLst>
+                <a:tab pos="0" algn="l"/>
+              </a:tabLst>
               <a:defRPr lang="en-US" sz="1400" b="0" u="none" strike="noStrike">
                 <a:solidFill>
                   <a:srgbClr val="000000"/>
@@ -5338,7 +8429,13 @@
           </a:lstStyle>
           <a:p>
             <a:pPr indent="0" algn="ctr">
+              <a:lnSpc>
+                <a:spcPct val="100000"/>
+              </a:lnSpc>
               <a:buNone/>
+              <a:tabLst>
+                <a:tab pos="0" algn="l"/>
+              </a:tabLst>
             </a:pPr>
             <a:r>
               <a:rPr lang="en-US" sz="1400" b="0" u="none" strike="noStrike">
@@ -5364,18 +8461,18 @@
       </p:sp>
       <p:sp>
         <p:nvSpPr>
-          <p:cNvPr id="32" name="PlaceHolder 6"/>
+          <p:cNvPr id="49" name="PlaceHolder 6"/>
           <p:cNvSpPr>
             <a:spLocks noGrp="1"/>
           </p:cNvSpPr>
           <p:nvPr>
-            <p:ph type="sldNum" idx="18"/>
+            <p:ph type="sldNum" idx="27"/>
           </p:nvPr>
         </p:nvSpPr>
         <p:spPr>
           <a:xfrm>
             <a:off x="6553080" y="6356520"/>
-            <a:ext cx="2133360" cy="364680"/>
+            <a:ext cx="2133000" cy="364320"/>
           </a:xfrm>
           <a:prstGeom prst="rect">
             <a:avLst/>
@@ -5395,6 +8492,9 @@
                 <a:spcPct val="100000"/>
               </a:lnSpc>
               <a:buNone/>
+              <a:tabLst>
+                <a:tab pos="0" algn="l"/>
+              </a:tabLst>
               <a:defRPr lang="en-US" sz="1200" b="0" u="none" strike="noStrike">
                 <a:solidFill>
                   <a:schemeClr val="dk1">
@@ -5413,8 +8513,11 @@
                 <a:spcPct val="100000"/>
               </a:lnSpc>
               <a:buNone/>
-            </a:pPr>
-            <a:fld id="{E819E25E-1B7C-4793-A723-3F41DBEFFD57}" type="slidenum">
+              <a:tabLst>
+                <a:tab pos="0" algn="l"/>
+              </a:tabLst>
+            </a:pPr>
+            <a:fld id="{D4E29EF1-3E5F-4BE9-85AE-9D46A81E0544}" type="slidenum">
               <a:rPr lang="en-US" sz="1200" b="0" u="none" strike="noStrike">
                 <a:solidFill>
                   <a:schemeClr val="dk1">
@@ -5434,2569 +8537,6 @@
               <a:effectLst/>
               <a:uFillTx/>
               <a:latin typeface="Times New Roman"/>
-            </a:endParaRPr>
-          </a:p>
-        </p:txBody>
-      </p:sp>
-    </p:spTree>
-  </p:cSld>
-</p:sldLayout>
-</file>
-
-<file path=ppt/slideLayouts/slideLayout7.xml><?xml version="1.0" encoding="utf-8"?>
-<p:sldLayout xmlns:a="http://schemas.openxmlformats.org/drawingml/2006/main" xmlns:p="http://schemas.openxmlformats.org/presentationml/2006/main" xmlns:r="http://schemas.openxmlformats.org/officeDocument/2006/relationships" xmlns:p14="http://schemas.microsoft.com/office/powerpoint/2010/main" xmlns:p15="http://schemas.microsoft.com/office/powerpoint/2012/main" xmlns:mc="http://schemas.openxmlformats.org/markup-compatibility/2006" type="blank" preserve="1">
-  <p:cSld name="Comparison">
-    <p:bg>
-      <p:bgPr>
-        <a:solidFill>
-          <a:srgbClr val="FFFFFF"/>
-        </a:solidFill>
-      </p:bgPr>
-    </p:bg>
-    <p:spTree>
-      <p:nvGrpSpPr>
-        <p:cNvPr id="1" name=""/>
-        <p:cNvGrpSpPr/>
-        <p:nvPr/>
-      </p:nvGrpSpPr>
-      <p:grpSpPr>
-        <a:xfrm>
-          <a:off x="0" y="0"/>
-          <a:ext cx="0" cy="0"/>
-          <a:chOff x="0" y="0"/>
-          <a:chExt cx="0" cy="0"/>
-        </a:xfrm>
-      </p:grpSpPr>
-      <p:sp>
-        <p:nvSpPr>
-          <p:cNvPr id="33" name="PlaceHolder 1"/>
-          <p:cNvSpPr>
-            <a:spLocks noGrp="1"/>
-          </p:cNvSpPr>
-          <p:nvPr>
-            <p:ph type="title"/>
-          </p:nvPr>
-        </p:nvSpPr>
-        <p:spPr>
-          <a:xfrm>
-            <a:off x="457200" y="274680"/>
-            <a:ext cx="8229240" cy="1142640"/>
-          </a:xfrm>
-          <a:prstGeom prst="rect">
-            <a:avLst/>
-          </a:prstGeom>
-          <a:noFill/>
-          <a:ln w="0">
-            <a:noFill/>
-          </a:ln>
-        </p:spPr>
-        <p:txBody>
-          <a:bodyPr lIns="91440" tIns="45720" rIns="91440" bIns="45720" anchor="ctr">
-            <a:noAutofit/>
-          </a:bodyPr>
-          <a:lstStyle>
-            <a:lvl1pPr indent="0" algn="ctr" defTabSz="457200">
-              <a:lnSpc>
-                <a:spcPct val="100000"/>
-              </a:lnSpc>
-              <a:buNone/>
-              <a:defRPr lang="en-US" sz="4400" b="0" u="none" strike="noStrike">
-                <a:solidFill>
-                  <a:schemeClr val="dk1"/>
-                </a:solidFill>
-                <a:effectLst/>
-                <a:uFillTx/>
-                <a:latin typeface="Calibri"/>
-              </a:defRPr>
-            </a:lvl1pPr>
-          </a:lstStyle>
-          <a:p>
-            <a:pPr indent="0" algn="ctr" defTabSz="457200">
-              <a:lnSpc>
-                <a:spcPct val="100000"/>
-              </a:lnSpc>
-              <a:buNone/>
-            </a:pPr>
-            <a:r>
-              <a:rPr lang="en-US" sz="4400" b="0" u="none" strike="noStrike">
-                <a:solidFill>
-                  <a:schemeClr val="dk1"/>
-                </a:solidFill>
-                <a:effectLst/>
-                <a:uFillTx/>
-                <a:latin typeface="Calibri"/>
-              </a:rPr>
-              <a:t>Click to edit Master title style</a:t>
-            </a:r>
-            <a:endParaRPr lang="en-US" sz="4400" b="0" u="none" strike="noStrike">
-              <a:solidFill>
-                <a:schemeClr val="dk1"/>
-              </a:solidFill>
-              <a:effectLst/>
-              <a:uFillTx/>
-              <a:latin typeface="Calibri"/>
-            </a:endParaRPr>
-          </a:p>
-        </p:txBody>
-      </p:sp>
-      <p:sp>
-        <p:nvSpPr>
-          <p:cNvPr id="34" name="PlaceHolder 2"/>
-          <p:cNvSpPr>
-            <a:spLocks noGrp="1"/>
-          </p:cNvSpPr>
-          <p:nvPr>
-            <p:ph type="body"/>
-          </p:nvPr>
-        </p:nvSpPr>
-        <p:spPr>
-          <a:xfrm>
-            <a:off x="457200" y="1535040"/>
-            <a:ext cx="4039920" cy="639360"/>
-          </a:xfrm>
-          <a:prstGeom prst="rect">
-            <a:avLst/>
-          </a:prstGeom>
-          <a:noFill/>
-          <a:ln w="0">
-            <a:noFill/>
-          </a:ln>
-        </p:spPr>
-        <p:txBody>
-          <a:bodyPr lIns="91440" tIns="45720" rIns="91440" bIns="45720" anchor="b">
-            <a:noAutofit/>
-          </a:bodyPr>
-          <a:lstStyle>
-            <a:lvl1pPr indent="0" algn="l" defTabSz="457200">
-              <a:lnSpc>
-                <a:spcPct val="100000"/>
-              </a:lnSpc>
-              <a:spcBef>
-                <a:spcPts val="479"/>
-              </a:spcBef>
-              <a:buNone/>
-              <a:tabLst>
-                <a:tab pos="0" algn="l"/>
-              </a:tabLst>
-              <a:defRPr lang="en-US" sz="2400" b="1" u="none" strike="noStrike">
-                <a:solidFill>
-                  <a:schemeClr val="dk1"/>
-                </a:solidFill>
-                <a:effectLst/>
-                <a:uFillTx/>
-                <a:latin typeface="Calibri"/>
-              </a:defRPr>
-            </a:lvl1pPr>
-          </a:lstStyle>
-          <a:p>
-            <a:pPr indent="0" algn="l" defTabSz="457200">
-              <a:lnSpc>
-                <a:spcPct val="100000"/>
-              </a:lnSpc>
-              <a:spcBef>
-                <a:spcPts val="479"/>
-              </a:spcBef>
-              <a:buNone/>
-              <a:tabLst>
-                <a:tab pos="0" algn="l"/>
-              </a:tabLst>
-            </a:pPr>
-            <a:r>
-              <a:rPr lang="en-US" sz="2400" b="1" u="none" strike="noStrike">
-                <a:solidFill>
-                  <a:schemeClr val="dk1"/>
-                </a:solidFill>
-                <a:effectLst/>
-                <a:uFillTx/>
-                <a:latin typeface="Calibri"/>
-              </a:rPr>
-              <a:t>Click to edit Master text styles</a:t>
-            </a:r>
-            <a:endParaRPr lang="en-US" sz="2400" b="0" u="none" strike="noStrike">
-              <a:solidFill>
-                <a:schemeClr val="dk1"/>
-              </a:solidFill>
-              <a:effectLst/>
-              <a:uFillTx/>
-              <a:latin typeface="Calibri"/>
-            </a:endParaRPr>
-          </a:p>
-        </p:txBody>
-      </p:sp>
-      <p:sp>
-        <p:nvSpPr>
-          <p:cNvPr id="35" name="PlaceHolder 3"/>
-          <p:cNvSpPr>
-            <a:spLocks noGrp="1"/>
-          </p:cNvSpPr>
-          <p:nvPr>
-            <p:ph type="body"/>
-          </p:nvPr>
-        </p:nvSpPr>
-        <p:spPr>
-          <a:xfrm>
-            <a:off x="457200" y="2174760"/>
-            <a:ext cx="4039920" cy="3951000"/>
-          </a:xfrm>
-          <a:prstGeom prst="rect">
-            <a:avLst/>
-          </a:prstGeom>
-          <a:noFill/>
-          <a:ln w="0">
-            <a:noFill/>
-          </a:ln>
-        </p:spPr>
-        <p:txBody>
-          <a:bodyPr lIns="91440" tIns="45720" rIns="91440" bIns="45720" anchor="t">
-            <a:noAutofit/>
-          </a:bodyPr>
-          <a:lstStyle>
-            <a:lvl1pPr algn="l" defTabSz="457200">
-              <a:lnSpc>
-                <a:spcPct val="100000"/>
-              </a:lnSpc>
-              <a:spcBef>
-                <a:spcPts val="479"/>
-              </a:spcBef>
-              <a:buClr>
-                <a:srgbClr val="000000"/>
-              </a:buClr>
-              <a:buFont typeface="Arial"/>
-              <a:buChar char="•"/>
-              <a:tabLst>
-                <a:tab pos="0" algn="l"/>
-              </a:tabLst>
-              <a:defRPr lang="en-US" sz="2400" b="0" u="none" strike="noStrike">
-                <a:solidFill>
-                  <a:schemeClr val="dk1"/>
-                </a:solidFill>
-                <a:effectLst/>
-                <a:uFillTx/>
-                <a:latin typeface="Calibri"/>
-              </a:defRPr>
-            </a:lvl1pPr>
-            <a:lvl2pPr lvl="1" algn="l" defTabSz="457200">
-              <a:lnSpc>
-                <a:spcPct val="100000"/>
-              </a:lnSpc>
-              <a:spcBef>
-                <a:spcPts val="400"/>
-              </a:spcBef>
-              <a:buClr>
-                <a:srgbClr val="000000"/>
-              </a:buClr>
-              <a:buFont typeface="Arial"/>
-              <a:buChar char="–"/>
-              <a:tabLst>
-                <a:tab pos="0" algn="l"/>
-              </a:tabLst>
-              <a:defRPr lang="en-US" sz="2000" b="0" u="none" strike="noStrike">
-                <a:solidFill>
-                  <a:schemeClr val="dk1"/>
-                </a:solidFill>
-                <a:effectLst/>
-                <a:uFillTx/>
-                <a:latin typeface="Calibri"/>
-              </a:defRPr>
-            </a:lvl2pPr>
-            <a:lvl3pPr lvl="2" algn="l" defTabSz="457200">
-              <a:lnSpc>
-                <a:spcPct val="100000"/>
-              </a:lnSpc>
-              <a:spcBef>
-                <a:spcPts val="360"/>
-              </a:spcBef>
-              <a:buClr>
-                <a:srgbClr val="000000"/>
-              </a:buClr>
-              <a:buFont typeface="Arial"/>
-              <a:buChar char="•"/>
-              <a:tabLst>
-                <a:tab pos="0" algn="l"/>
-              </a:tabLst>
-              <a:defRPr lang="en-US" sz="1800" b="0" u="none" strike="noStrike">
-                <a:solidFill>
-                  <a:schemeClr val="dk1"/>
-                </a:solidFill>
-                <a:effectLst/>
-                <a:uFillTx/>
-                <a:latin typeface="Calibri"/>
-              </a:defRPr>
-            </a:lvl3pPr>
-            <a:lvl4pPr lvl="3" algn="l" defTabSz="457200">
-              <a:lnSpc>
-                <a:spcPct val="100000"/>
-              </a:lnSpc>
-              <a:spcBef>
-                <a:spcPts val="320"/>
-              </a:spcBef>
-              <a:buClr>
-                <a:srgbClr val="000000"/>
-              </a:buClr>
-              <a:buFont typeface="Arial"/>
-              <a:buChar char="–"/>
-              <a:tabLst>
-                <a:tab pos="0" algn="l"/>
-              </a:tabLst>
-              <a:defRPr lang="en-US" sz="1600" b="0" u="none" strike="noStrike">
-                <a:solidFill>
-                  <a:schemeClr val="dk1"/>
-                </a:solidFill>
-                <a:effectLst/>
-                <a:uFillTx/>
-                <a:latin typeface="Calibri"/>
-              </a:defRPr>
-            </a:lvl4pPr>
-            <a:lvl5pPr lvl="4" algn="l" defTabSz="457200">
-              <a:lnSpc>
-                <a:spcPct val="100000"/>
-              </a:lnSpc>
-              <a:spcBef>
-                <a:spcPts val="320"/>
-              </a:spcBef>
-              <a:buClr>
-                <a:srgbClr val="000000"/>
-              </a:buClr>
-              <a:buFont typeface="Arial"/>
-              <a:buChar char="»"/>
-              <a:tabLst>
-                <a:tab pos="0" algn="l"/>
-              </a:tabLst>
-              <a:defRPr lang="en-US" sz="1600" b="0" u="none" strike="noStrike">
-                <a:solidFill>
-                  <a:schemeClr val="dk1"/>
-                </a:solidFill>
-                <a:effectLst/>
-                <a:uFillTx/>
-                <a:latin typeface="Calibri"/>
-              </a:defRPr>
-            </a:lvl5pPr>
-          </a:lstStyle>
-          <a:p>
-            <a:pPr marL="343080" indent="-343080" algn="l" defTabSz="457200">
-              <a:lnSpc>
-                <a:spcPct val="100000"/>
-              </a:lnSpc>
-              <a:spcBef>
-                <a:spcPts val="479"/>
-              </a:spcBef>
-              <a:buClr>
-                <a:srgbClr val="000000"/>
-              </a:buClr>
-              <a:buFont typeface="Arial"/>
-              <a:buChar char="•"/>
-              <a:tabLst>
-                <a:tab pos="0" algn="l"/>
-              </a:tabLst>
-            </a:pPr>
-            <a:r>
-              <a:rPr lang="en-US" sz="2400" b="0" u="none" strike="noStrike">
-                <a:solidFill>
-                  <a:schemeClr val="dk1"/>
-                </a:solidFill>
-                <a:effectLst/>
-                <a:uFillTx/>
-                <a:latin typeface="Calibri"/>
-              </a:rPr>
-              <a:t>Click to edit Master text styles</a:t>
-            </a:r>
-            <a:endParaRPr lang="en-US" sz="2400" b="0" u="none" strike="noStrike">
-              <a:solidFill>
-                <a:schemeClr val="dk1"/>
-              </a:solidFill>
-              <a:effectLst/>
-              <a:uFillTx/>
-              <a:latin typeface="Calibri"/>
-            </a:endParaRPr>
-          </a:p>
-          <a:p>
-            <a:pPr marL="743040" lvl="1" indent="-285840" algn="l" defTabSz="457200">
-              <a:lnSpc>
-                <a:spcPct val="100000"/>
-              </a:lnSpc>
-              <a:spcBef>
-                <a:spcPts val="400"/>
-              </a:spcBef>
-              <a:buClr>
-                <a:srgbClr val="000000"/>
-              </a:buClr>
-              <a:buFont typeface="Arial"/>
-              <a:buChar char="–"/>
-              <a:tabLst>
-                <a:tab pos="0" algn="l"/>
-              </a:tabLst>
-            </a:pPr>
-            <a:r>
-              <a:rPr lang="en-US" sz="2000" b="0" u="none" strike="noStrike">
-                <a:solidFill>
-                  <a:schemeClr val="dk1"/>
-                </a:solidFill>
-                <a:effectLst/>
-                <a:uFillTx/>
-                <a:latin typeface="Calibri"/>
-              </a:rPr>
-              <a:t>Second level</a:t>
-            </a:r>
-            <a:endParaRPr lang="en-US" sz="2000" b="0" u="none" strike="noStrike">
-              <a:solidFill>
-                <a:schemeClr val="dk1"/>
-              </a:solidFill>
-              <a:effectLst/>
-              <a:uFillTx/>
-              <a:latin typeface="Calibri"/>
-            </a:endParaRPr>
-          </a:p>
-          <a:p>
-            <a:pPr marL="1143000" lvl="2" indent="-228600" algn="l" defTabSz="457200">
-              <a:lnSpc>
-                <a:spcPct val="100000"/>
-              </a:lnSpc>
-              <a:spcBef>
-                <a:spcPts val="360"/>
-              </a:spcBef>
-              <a:buClr>
-                <a:srgbClr val="000000"/>
-              </a:buClr>
-              <a:buFont typeface="Arial"/>
-              <a:buChar char="•"/>
-              <a:tabLst>
-                <a:tab pos="0" algn="l"/>
-              </a:tabLst>
-            </a:pPr>
-            <a:r>
-              <a:rPr lang="en-US" sz="1800" b="0" u="none" strike="noStrike">
-                <a:solidFill>
-                  <a:schemeClr val="dk1"/>
-                </a:solidFill>
-                <a:effectLst/>
-                <a:uFillTx/>
-                <a:latin typeface="Calibri"/>
-              </a:rPr>
-              <a:t>Third level</a:t>
-            </a:r>
-            <a:endParaRPr lang="en-US" sz="1800" b="0" u="none" strike="noStrike">
-              <a:solidFill>
-                <a:schemeClr val="dk1"/>
-              </a:solidFill>
-              <a:effectLst/>
-              <a:uFillTx/>
-              <a:latin typeface="Calibri"/>
-            </a:endParaRPr>
-          </a:p>
-          <a:p>
-            <a:pPr marL="1600200" lvl="3" indent="-228600" algn="l" defTabSz="457200">
-              <a:lnSpc>
-                <a:spcPct val="100000"/>
-              </a:lnSpc>
-              <a:spcBef>
-                <a:spcPts val="320"/>
-              </a:spcBef>
-              <a:buClr>
-                <a:srgbClr val="000000"/>
-              </a:buClr>
-              <a:buFont typeface="Arial"/>
-              <a:buChar char="–"/>
-              <a:tabLst>
-                <a:tab pos="0" algn="l"/>
-              </a:tabLst>
-            </a:pPr>
-            <a:r>
-              <a:rPr lang="en-US" sz="1600" b="0" u="none" strike="noStrike">
-                <a:solidFill>
-                  <a:schemeClr val="dk1"/>
-                </a:solidFill>
-                <a:effectLst/>
-                <a:uFillTx/>
-                <a:latin typeface="Calibri"/>
-              </a:rPr>
-              <a:t>Fourth level</a:t>
-            </a:r>
-            <a:endParaRPr lang="en-US" sz="1600" b="0" u="none" strike="noStrike">
-              <a:solidFill>
-                <a:schemeClr val="dk1"/>
-              </a:solidFill>
-              <a:effectLst/>
-              <a:uFillTx/>
-              <a:latin typeface="Calibri"/>
-            </a:endParaRPr>
-          </a:p>
-          <a:p>
-            <a:pPr marL="2057400" lvl="4" indent="-228600" algn="l" defTabSz="457200">
-              <a:lnSpc>
-                <a:spcPct val="100000"/>
-              </a:lnSpc>
-              <a:spcBef>
-                <a:spcPts val="320"/>
-              </a:spcBef>
-              <a:buClr>
-                <a:srgbClr val="000000"/>
-              </a:buClr>
-              <a:buFont typeface="Arial"/>
-              <a:buChar char="»"/>
-              <a:tabLst>
-                <a:tab pos="0" algn="l"/>
-              </a:tabLst>
-            </a:pPr>
-            <a:r>
-              <a:rPr lang="en-US" sz="1600" b="0" u="none" strike="noStrike">
-                <a:solidFill>
-                  <a:schemeClr val="dk1"/>
-                </a:solidFill>
-                <a:effectLst/>
-                <a:uFillTx/>
-                <a:latin typeface="Calibri"/>
-              </a:rPr>
-              <a:t>Fifth level</a:t>
-            </a:r>
-            <a:endParaRPr lang="en-US" sz="1600" b="0" u="none" strike="noStrike">
-              <a:solidFill>
-                <a:schemeClr val="dk1"/>
-              </a:solidFill>
-              <a:effectLst/>
-              <a:uFillTx/>
-              <a:latin typeface="Calibri"/>
-            </a:endParaRPr>
-          </a:p>
-        </p:txBody>
-      </p:sp>
-      <p:sp>
-        <p:nvSpPr>
-          <p:cNvPr id="36" name="PlaceHolder 4"/>
-          <p:cNvSpPr>
-            <a:spLocks noGrp="1"/>
-          </p:cNvSpPr>
-          <p:nvPr>
-            <p:ph type="body"/>
-          </p:nvPr>
-        </p:nvSpPr>
-        <p:spPr>
-          <a:xfrm>
-            <a:off x="4645080" y="1535040"/>
-            <a:ext cx="4041360" cy="639360"/>
-          </a:xfrm>
-          <a:prstGeom prst="rect">
-            <a:avLst/>
-          </a:prstGeom>
-          <a:noFill/>
-          <a:ln w="0">
-            <a:noFill/>
-          </a:ln>
-        </p:spPr>
-        <p:txBody>
-          <a:bodyPr lIns="91440" tIns="45720" rIns="91440" bIns="45720" anchor="b">
-            <a:noAutofit/>
-          </a:bodyPr>
-          <a:lstStyle>
-            <a:lvl1pPr indent="0" algn="l" defTabSz="457200">
-              <a:lnSpc>
-                <a:spcPct val="100000"/>
-              </a:lnSpc>
-              <a:spcBef>
-                <a:spcPts val="479"/>
-              </a:spcBef>
-              <a:buNone/>
-              <a:tabLst>
-                <a:tab pos="0" algn="l"/>
-              </a:tabLst>
-              <a:defRPr lang="en-US" sz="2400" b="1" u="none" strike="noStrike">
-                <a:solidFill>
-                  <a:schemeClr val="dk1"/>
-                </a:solidFill>
-                <a:effectLst/>
-                <a:uFillTx/>
-                <a:latin typeface="Calibri"/>
-              </a:defRPr>
-            </a:lvl1pPr>
-          </a:lstStyle>
-          <a:p>
-            <a:pPr indent="0" algn="l" defTabSz="457200">
-              <a:lnSpc>
-                <a:spcPct val="100000"/>
-              </a:lnSpc>
-              <a:spcBef>
-                <a:spcPts val="479"/>
-              </a:spcBef>
-              <a:buNone/>
-              <a:tabLst>
-                <a:tab pos="0" algn="l"/>
-              </a:tabLst>
-            </a:pPr>
-            <a:r>
-              <a:rPr lang="en-US" sz="2400" b="1" u="none" strike="noStrike">
-                <a:solidFill>
-                  <a:schemeClr val="dk1"/>
-                </a:solidFill>
-                <a:effectLst/>
-                <a:uFillTx/>
-                <a:latin typeface="Calibri"/>
-              </a:rPr>
-              <a:t>Click to edit Master text styles</a:t>
-            </a:r>
-            <a:endParaRPr lang="en-US" sz="2400" b="0" u="none" strike="noStrike">
-              <a:solidFill>
-                <a:schemeClr val="dk1"/>
-              </a:solidFill>
-              <a:effectLst/>
-              <a:uFillTx/>
-              <a:latin typeface="Calibri"/>
-            </a:endParaRPr>
-          </a:p>
-        </p:txBody>
-      </p:sp>
-      <p:sp>
-        <p:nvSpPr>
-          <p:cNvPr id="37" name="PlaceHolder 5"/>
-          <p:cNvSpPr>
-            <a:spLocks noGrp="1"/>
-          </p:cNvSpPr>
-          <p:nvPr>
-            <p:ph type="body"/>
-          </p:nvPr>
-        </p:nvSpPr>
-        <p:spPr>
-          <a:xfrm>
-            <a:off x="4645080" y="2174760"/>
-            <a:ext cx="4041360" cy="3951000"/>
-          </a:xfrm>
-          <a:prstGeom prst="rect">
-            <a:avLst/>
-          </a:prstGeom>
-          <a:noFill/>
-          <a:ln w="0">
-            <a:noFill/>
-          </a:ln>
-        </p:spPr>
-        <p:txBody>
-          <a:bodyPr lIns="91440" tIns="45720" rIns="91440" bIns="45720" anchor="t">
-            <a:noAutofit/>
-          </a:bodyPr>
-          <a:lstStyle>
-            <a:lvl1pPr algn="l" defTabSz="457200">
-              <a:lnSpc>
-                <a:spcPct val="100000"/>
-              </a:lnSpc>
-              <a:spcBef>
-                <a:spcPts val="479"/>
-              </a:spcBef>
-              <a:buClr>
-                <a:srgbClr val="000000"/>
-              </a:buClr>
-              <a:buFont typeface="Arial"/>
-              <a:buChar char="•"/>
-              <a:tabLst>
-                <a:tab pos="0" algn="l"/>
-              </a:tabLst>
-              <a:defRPr lang="en-US" sz="2400" b="0" u="none" strike="noStrike">
-                <a:solidFill>
-                  <a:schemeClr val="dk1"/>
-                </a:solidFill>
-                <a:effectLst/>
-                <a:uFillTx/>
-                <a:latin typeface="Calibri"/>
-              </a:defRPr>
-            </a:lvl1pPr>
-            <a:lvl2pPr lvl="1" algn="l" defTabSz="457200">
-              <a:lnSpc>
-                <a:spcPct val="100000"/>
-              </a:lnSpc>
-              <a:spcBef>
-                <a:spcPts val="400"/>
-              </a:spcBef>
-              <a:buClr>
-                <a:srgbClr val="000000"/>
-              </a:buClr>
-              <a:buFont typeface="Arial"/>
-              <a:buChar char="–"/>
-              <a:tabLst>
-                <a:tab pos="0" algn="l"/>
-              </a:tabLst>
-              <a:defRPr lang="en-US" sz="2000" b="0" u="none" strike="noStrike">
-                <a:solidFill>
-                  <a:schemeClr val="dk1"/>
-                </a:solidFill>
-                <a:effectLst/>
-                <a:uFillTx/>
-                <a:latin typeface="Calibri"/>
-              </a:defRPr>
-            </a:lvl2pPr>
-            <a:lvl3pPr lvl="2" algn="l" defTabSz="457200">
-              <a:lnSpc>
-                <a:spcPct val="100000"/>
-              </a:lnSpc>
-              <a:spcBef>
-                <a:spcPts val="360"/>
-              </a:spcBef>
-              <a:buClr>
-                <a:srgbClr val="000000"/>
-              </a:buClr>
-              <a:buFont typeface="Arial"/>
-              <a:buChar char="•"/>
-              <a:tabLst>
-                <a:tab pos="0" algn="l"/>
-              </a:tabLst>
-              <a:defRPr lang="en-US" sz="1800" b="0" u="none" strike="noStrike">
-                <a:solidFill>
-                  <a:schemeClr val="dk1"/>
-                </a:solidFill>
-                <a:effectLst/>
-                <a:uFillTx/>
-                <a:latin typeface="Calibri"/>
-              </a:defRPr>
-            </a:lvl3pPr>
-            <a:lvl4pPr lvl="3" algn="l" defTabSz="457200">
-              <a:lnSpc>
-                <a:spcPct val="100000"/>
-              </a:lnSpc>
-              <a:spcBef>
-                <a:spcPts val="320"/>
-              </a:spcBef>
-              <a:buClr>
-                <a:srgbClr val="000000"/>
-              </a:buClr>
-              <a:buFont typeface="Arial"/>
-              <a:buChar char="–"/>
-              <a:tabLst>
-                <a:tab pos="0" algn="l"/>
-              </a:tabLst>
-              <a:defRPr lang="en-US" sz="1600" b="0" u="none" strike="noStrike">
-                <a:solidFill>
-                  <a:schemeClr val="dk1"/>
-                </a:solidFill>
-                <a:effectLst/>
-                <a:uFillTx/>
-                <a:latin typeface="Calibri"/>
-              </a:defRPr>
-            </a:lvl4pPr>
-            <a:lvl5pPr lvl="4" algn="l" defTabSz="457200">
-              <a:lnSpc>
-                <a:spcPct val="100000"/>
-              </a:lnSpc>
-              <a:spcBef>
-                <a:spcPts val="320"/>
-              </a:spcBef>
-              <a:buClr>
-                <a:srgbClr val="000000"/>
-              </a:buClr>
-              <a:buFont typeface="Arial"/>
-              <a:buChar char="»"/>
-              <a:tabLst>
-                <a:tab pos="0" algn="l"/>
-              </a:tabLst>
-              <a:defRPr lang="en-US" sz="1600" b="0" u="none" strike="noStrike">
-                <a:solidFill>
-                  <a:schemeClr val="dk1"/>
-                </a:solidFill>
-                <a:effectLst/>
-                <a:uFillTx/>
-                <a:latin typeface="Calibri"/>
-              </a:defRPr>
-            </a:lvl5pPr>
-          </a:lstStyle>
-          <a:p>
-            <a:pPr marL="343080" indent="-343080" algn="l" defTabSz="457200">
-              <a:lnSpc>
-                <a:spcPct val="100000"/>
-              </a:lnSpc>
-              <a:spcBef>
-                <a:spcPts val="479"/>
-              </a:spcBef>
-              <a:buClr>
-                <a:srgbClr val="000000"/>
-              </a:buClr>
-              <a:buFont typeface="Arial"/>
-              <a:buChar char="•"/>
-              <a:tabLst>
-                <a:tab pos="0" algn="l"/>
-              </a:tabLst>
-            </a:pPr>
-            <a:r>
-              <a:rPr lang="en-US" sz="2400" b="0" u="none" strike="noStrike">
-                <a:solidFill>
-                  <a:schemeClr val="dk1"/>
-                </a:solidFill>
-                <a:effectLst/>
-                <a:uFillTx/>
-                <a:latin typeface="Calibri"/>
-              </a:rPr>
-              <a:t>Click to edit Master text styles</a:t>
-            </a:r>
-            <a:endParaRPr lang="en-US" sz="2400" b="0" u="none" strike="noStrike">
-              <a:solidFill>
-                <a:schemeClr val="dk1"/>
-              </a:solidFill>
-              <a:effectLst/>
-              <a:uFillTx/>
-              <a:latin typeface="Calibri"/>
-            </a:endParaRPr>
-          </a:p>
-          <a:p>
-            <a:pPr marL="743040" lvl="1" indent="-285840" algn="l" defTabSz="457200">
-              <a:lnSpc>
-                <a:spcPct val="100000"/>
-              </a:lnSpc>
-              <a:spcBef>
-                <a:spcPts val="400"/>
-              </a:spcBef>
-              <a:buClr>
-                <a:srgbClr val="000000"/>
-              </a:buClr>
-              <a:buFont typeface="Arial"/>
-              <a:buChar char="–"/>
-              <a:tabLst>
-                <a:tab pos="0" algn="l"/>
-              </a:tabLst>
-            </a:pPr>
-            <a:r>
-              <a:rPr lang="en-US" sz="2000" b="0" u="none" strike="noStrike">
-                <a:solidFill>
-                  <a:schemeClr val="dk1"/>
-                </a:solidFill>
-                <a:effectLst/>
-                <a:uFillTx/>
-                <a:latin typeface="Calibri"/>
-              </a:rPr>
-              <a:t>Second level</a:t>
-            </a:r>
-            <a:endParaRPr lang="en-US" sz="2000" b="0" u="none" strike="noStrike">
-              <a:solidFill>
-                <a:schemeClr val="dk1"/>
-              </a:solidFill>
-              <a:effectLst/>
-              <a:uFillTx/>
-              <a:latin typeface="Calibri"/>
-            </a:endParaRPr>
-          </a:p>
-          <a:p>
-            <a:pPr marL="1143000" lvl="2" indent="-228600" algn="l" defTabSz="457200">
-              <a:lnSpc>
-                <a:spcPct val="100000"/>
-              </a:lnSpc>
-              <a:spcBef>
-                <a:spcPts val="360"/>
-              </a:spcBef>
-              <a:buClr>
-                <a:srgbClr val="000000"/>
-              </a:buClr>
-              <a:buFont typeface="Arial"/>
-              <a:buChar char="•"/>
-              <a:tabLst>
-                <a:tab pos="0" algn="l"/>
-              </a:tabLst>
-            </a:pPr>
-            <a:r>
-              <a:rPr lang="en-US" sz="1800" b="0" u="none" strike="noStrike">
-                <a:solidFill>
-                  <a:schemeClr val="dk1"/>
-                </a:solidFill>
-                <a:effectLst/>
-                <a:uFillTx/>
-                <a:latin typeface="Calibri"/>
-              </a:rPr>
-              <a:t>Third level</a:t>
-            </a:r>
-            <a:endParaRPr lang="en-US" sz="1800" b="0" u="none" strike="noStrike">
-              <a:solidFill>
-                <a:schemeClr val="dk1"/>
-              </a:solidFill>
-              <a:effectLst/>
-              <a:uFillTx/>
-              <a:latin typeface="Calibri"/>
-            </a:endParaRPr>
-          </a:p>
-          <a:p>
-            <a:pPr marL="1600200" lvl="3" indent="-228600" algn="l" defTabSz="457200">
-              <a:lnSpc>
-                <a:spcPct val="100000"/>
-              </a:lnSpc>
-              <a:spcBef>
-                <a:spcPts val="320"/>
-              </a:spcBef>
-              <a:buClr>
-                <a:srgbClr val="000000"/>
-              </a:buClr>
-              <a:buFont typeface="Arial"/>
-              <a:buChar char="–"/>
-              <a:tabLst>
-                <a:tab pos="0" algn="l"/>
-              </a:tabLst>
-            </a:pPr>
-            <a:r>
-              <a:rPr lang="en-US" sz="1600" b="0" u="none" strike="noStrike">
-                <a:solidFill>
-                  <a:schemeClr val="dk1"/>
-                </a:solidFill>
-                <a:effectLst/>
-                <a:uFillTx/>
-                <a:latin typeface="Calibri"/>
-              </a:rPr>
-              <a:t>Fourth level</a:t>
-            </a:r>
-            <a:endParaRPr lang="en-US" sz="1600" b="0" u="none" strike="noStrike">
-              <a:solidFill>
-                <a:schemeClr val="dk1"/>
-              </a:solidFill>
-              <a:effectLst/>
-              <a:uFillTx/>
-              <a:latin typeface="Calibri"/>
-            </a:endParaRPr>
-          </a:p>
-          <a:p>
-            <a:pPr marL="2057400" lvl="4" indent="-228600" algn="l" defTabSz="457200">
-              <a:lnSpc>
-                <a:spcPct val="100000"/>
-              </a:lnSpc>
-              <a:spcBef>
-                <a:spcPts val="320"/>
-              </a:spcBef>
-              <a:buClr>
-                <a:srgbClr val="000000"/>
-              </a:buClr>
-              <a:buFont typeface="Arial"/>
-              <a:buChar char="»"/>
-              <a:tabLst>
-                <a:tab pos="0" algn="l"/>
-              </a:tabLst>
-            </a:pPr>
-            <a:r>
-              <a:rPr lang="en-US" sz="1600" b="0" u="none" strike="noStrike">
-                <a:solidFill>
-                  <a:schemeClr val="dk1"/>
-                </a:solidFill>
-                <a:effectLst/>
-                <a:uFillTx/>
-                <a:latin typeface="Calibri"/>
-              </a:rPr>
-              <a:t>Fifth level</a:t>
-            </a:r>
-            <a:endParaRPr lang="en-US" sz="1600" b="0" u="none" strike="noStrike">
-              <a:solidFill>
-                <a:schemeClr val="dk1"/>
-              </a:solidFill>
-              <a:effectLst/>
-              <a:uFillTx/>
-              <a:latin typeface="Calibri"/>
-            </a:endParaRPr>
-          </a:p>
-        </p:txBody>
-      </p:sp>
-      <p:sp>
-        <p:nvSpPr>
-          <p:cNvPr id="38" name="PlaceHolder 6"/>
-          <p:cNvSpPr>
-            <a:spLocks noGrp="1"/>
-          </p:cNvSpPr>
-          <p:nvPr>
-            <p:ph type="dt" idx="19"/>
-          </p:nvPr>
-        </p:nvSpPr>
-        <p:spPr>
-          <a:xfrm>
-            <a:off x="457200" y="6356520"/>
-            <a:ext cx="2133360" cy="364680"/>
-          </a:xfrm>
-          <a:prstGeom prst="rect">
-            <a:avLst/>
-          </a:prstGeom>
-          <a:noFill/>
-          <a:ln w="0">
-            <a:noFill/>
-          </a:ln>
-        </p:spPr>
-        <p:txBody>
-          <a:bodyPr lIns="91440" tIns="45720" rIns="91440" bIns="45720" anchor="ctr">
-            <a:noAutofit/>
-          </a:bodyPr>
-          <a:lstStyle>
-            <a:lvl1pPr indent="0" algn="l" defTabSz="457200">
-              <a:lnSpc>
-                <a:spcPct val="100000"/>
-              </a:lnSpc>
-              <a:buNone/>
-              <a:defRPr lang="en-US" sz="1200" b="0" u="none" strike="noStrike">
-                <a:solidFill>
-                  <a:schemeClr val="dk1">
-                    <a:tint val="75000"/>
-                  </a:schemeClr>
-                </a:solidFill>
-                <a:effectLst/>
-                <a:uFillTx/>
-                <a:latin typeface="Calibri"/>
-              </a:defRPr>
-            </a:lvl1pPr>
-          </a:lstStyle>
-          <a:p>
-            <a:pPr indent="0" algn="l" defTabSz="457200">
-              <a:lnSpc>
-                <a:spcPct val="100000"/>
-              </a:lnSpc>
-              <a:buNone/>
-            </a:pPr>
-            <a:r>
-              <a:rPr lang="en-US" sz="1200" b="0" u="none" strike="noStrike">
-                <a:solidFill>
-                  <a:schemeClr val="dk1">
-                    <a:tint val="75000"/>
-                  </a:schemeClr>
-                </a:solidFill>
-                <a:effectLst/>
-                <a:uFillTx/>
-                <a:latin typeface="Calibri"/>
-              </a:rPr>
-              <a:t>&lt;date/time&gt;</a:t>
-            </a:r>
-            <a:endParaRPr lang="en-US" sz="1200" b="0" u="none" strike="noStrike">
-              <a:solidFill>
-                <a:srgbClr val="000000"/>
-              </a:solidFill>
-              <a:effectLst/>
-              <a:uFillTx/>
-              <a:latin typeface="Times New Roman"/>
-            </a:endParaRPr>
-          </a:p>
-        </p:txBody>
-      </p:sp>
-      <p:sp>
-        <p:nvSpPr>
-          <p:cNvPr id="39" name="PlaceHolder 7"/>
-          <p:cNvSpPr>
-            <a:spLocks noGrp="1"/>
-          </p:cNvSpPr>
-          <p:nvPr>
-            <p:ph type="ftr" idx="20"/>
-          </p:nvPr>
-        </p:nvSpPr>
-        <p:spPr>
-          <a:xfrm>
-            <a:off x="3124080" y="6356520"/>
-            <a:ext cx="2895120" cy="364680"/>
-          </a:xfrm>
-          <a:prstGeom prst="rect">
-            <a:avLst/>
-          </a:prstGeom>
-          <a:noFill/>
-          <a:ln w="0">
-            <a:noFill/>
-          </a:ln>
-        </p:spPr>
-        <p:txBody>
-          <a:bodyPr lIns="91440" tIns="45720" rIns="91440" bIns="45720" anchor="ctr">
-            <a:noAutofit/>
-          </a:bodyPr>
-          <a:lstStyle>
-            <a:lvl1pPr indent="0" algn="ctr">
-              <a:buNone/>
-              <a:defRPr lang="en-US" sz="1400" b="0" u="none" strike="noStrike">
-                <a:solidFill>
-                  <a:srgbClr val="000000"/>
-                </a:solidFill>
-                <a:effectLst/>
-                <a:uFillTx/>
-                <a:latin typeface="Times New Roman"/>
-              </a:defRPr>
-            </a:lvl1pPr>
-          </a:lstStyle>
-          <a:p>
-            <a:pPr indent="0" algn="ctr">
-              <a:buNone/>
-            </a:pPr>
-            <a:r>
-              <a:rPr lang="en-US" sz="1400" b="0" u="none" strike="noStrike">
-                <a:solidFill>
-                  <a:srgbClr val="000000"/>
-                </a:solidFill>
-                <a:effectLst/>
-                <a:uFillTx/>
-                <a:latin typeface="Times New Roman"/>
-              </a:rPr>
-              <a:t>&lt;footer&gt;</a:t>
-            </a:r>
-            <a:endParaRPr lang="en-US" sz="1400" b="0" u="none" strike="noStrike">
-              <a:solidFill>
-                <a:srgbClr val="000000"/>
-              </a:solidFill>
-              <a:effectLst/>
-              <a:uFillTx/>
-              <a:latin typeface="Times New Roman"/>
-            </a:endParaRPr>
-          </a:p>
-        </p:txBody>
-      </p:sp>
-      <p:sp>
-        <p:nvSpPr>
-          <p:cNvPr id="40" name="PlaceHolder 8"/>
-          <p:cNvSpPr>
-            <a:spLocks noGrp="1"/>
-          </p:cNvSpPr>
-          <p:nvPr>
-            <p:ph type="sldNum" idx="21"/>
-          </p:nvPr>
-        </p:nvSpPr>
-        <p:spPr>
-          <a:xfrm>
-            <a:off x="6553080" y="6356520"/>
-            <a:ext cx="2133360" cy="364680"/>
-          </a:xfrm>
-          <a:prstGeom prst="rect">
-            <a:avLst/>
-          </a:prstGeom>
-          <a:noFill/>
-          <a:ln w="0">
-            <a:noFill/>
-          </a:ln>
-        </p:spPr>
-        <p:txBody>
-          <a:bodyPr lIns="91440" tIns="45720" rIns="91440" bIns="45720" anchor="ctr">
-            <a:noAutofit/>
-          </a:bodyPr>
-          <a:lstStyle>
-            <a:lvl1pPr indent="0" algn="r" defTabSz="457200">
-              <a:lnSpc>
-                <a:spcPct val="100000"/>
-              </a:lnSpc>
-              <a:buNone/>
-              <a:defRPr lang="en-US" sz="1200" b="0" u="none" strike="noStrike">
-                <a:solidFill>
-                  <a:schemeClr val="dk1">
-                    <a:tint val="75000"/>
-                  </a:schemeClr>
-                </a:solidFill>
-                <a:effectLst/>
-                <a:uFillTx/>
-                <a:latin typeface="Calibri"/>
-              </a:defRPr>
-            </a:lvl1pPr>
-          </a:lstStyle>
-          <a:p>
-            <a:pPr indent="0" algn="r" defTabSz="457200">
-              <a:lnSpc>
-                <a:spcPct val="100000"/>
-              </a:lnSpc>
-              <a:buNone/>
-            </a:pPr>
-            <a:fld id="{E0A9AFA9-9665-4E19-B9B7-B827B85E8D12}" type="slidenum">
-              <a:rPr lang="en-US" sz="1200" b="0" u="none" strike="noStrike">
-                <a:solidFill>
-                  <a:schemeClr val="dk1">
-                    <a:tint val="75000"/>
-                  </a:schemeClr>
-                </a:solidFill>
-                <a:effectLst/>
-                <a:uFillTx/>
-                <a:latin typeface="Calibri"/>
-              </a:rPr>
-              <a:t>&lt;number&gt;</a:t>
-            </a:fld>
-            <a:endParaRPr lang="en-US" sz="1200" b="0" u="none" strike="noStrike">
-              <a:solidFill>
-                <a:srgbClr val="000000"/>
-              </a:solidFill>
-              <a:effectLst/>
-              <a:uFillTx/>
-              <a:latin typeface="Times New Roman"/>
-            </a:endParaRPr>
-          </a:p>
-        </p:txBody>
-      </p:sp>
-    </p:spTree>
-  </p:cSld>
-</p:sldLayout>
-</file>
-
-<file path=ppt/slideLayouts/slideLayout8.xml><?xml version="1.0" encoding="utf-8"?>
-<p:sldLayout xmlns:a="http://schemas.openxmlformats.org/drawingml/2006/main" xmlns:p="http://schemas.openxmlformats.org/presentationml/2006/main" xmlns:r="http://schemas.openxmlformats.org/officeDocument/2006/relationships" xmlns:p14="http://schemas.microsoft.com/office/powerpoint/2010/main" xmlns:p15="http://schemas.microsoft.com/office/powerpoint/2012/main" xmlns:mc="http://schemas.openxmlformats.org/markup-compatibility/2006" type="titleOnly" preserve="1">
-  <p:cSld name="Title Only">
-    <p:bg>
-      <p:bgPr>
-        <a:solidFill>
-          <a:srgbClr val="FFFFFF"/>
-        </a:solidFill>
-      </p:bgPr>
-    </p:bg>
-    <p:spTree>
-      <p:nvGrpSpPr>
-        <p:cNvPr id="1" name=""/>
-        <p:cNvGrpSpPr/>
-        <p:nvPr/>
-      </p:nvGrpSpPr>
-      <p:grpSpPr>
-        <a:xfrm>
-          <a:off x="0" y="0"/>
-          <a:ext cx="0" cy="0"/>
-          <a:chOff x="0" y="0"/>
-          <a:chExt cx="0" cy="0"/>
-        </a:xfrm>
-      </p:grpSpPr>
-      <p:sp>
-        <p:nvSpPr>
-          <p:cNvPr id="41" name="PlaceHolder 1"/>
-          <p:cNvSpPr>
-            <a:spLocks noGrp="1"/>
-          </p:cNvSpPr>
-          <p:nvPr>
-            <p:ph type="title"/>
-          </p:nvPr>
-        </p:nvSpPr>
-        <p:spPr>
-          <a:xfrm>
-            <a:off x="457200" y="274680"/>
-            <a:ext cx="8229240" cy="1142640"/>
-          </a:xfrm>
-          <a:prstGeom prst="rect">
-            <a:avLst/>
-          </a:prstGeom>
-          <a:noFill/>
-          <a:ln w="0">
-            <a:noFill/>
-          </a:ln>
-        </p:spPr>
-        <p:txBody>
-          <a:bodyPr lIns="91440" tIns="45720" rIns="91440" bIns="45720" anchor="ctr">
-            <a:noAutofit/>
-          </a:bodyPr>
-          <a:lstStyle>
-            <a:lvl1pPr indent="0" algn="ctr" defTabSz="457200">
-              <a:lnSpc>
-                <a:spcPct val="100000"/>
-              </a:lnSpc>
-              <a:buNone/>
-              <a:defRPr lang="en-US" sz="4400" b="0" u="none" strike="noStrike">
-                <a:solidFill>
-                  <a:schemeClr val="dk1"/>
-                </a:solidFill>
-                <a:effectLst/>
-                <a:uFillTx/>
-                <a:latin typeface="Calibri"/>
-              </a:defRPr>
-            </a:lvl1pPr>
-          </a:lstStyle>
-          <a:p>
-            <a:pPr indent="0" algn="ctr" defTabSz="457200">
-              <a:lnSpc>
-                <a:spcPct val="100000"/>
-              </a:lnSpc>
-              <a:buNone/>
-            </a:pPr>
-            <a:r>
-              <a:rPr lang="en-US" sz="4400" b="0" u="none" strike="noStrike">
-                <a:solidFill>
-                  <a:schemeClr val="dk1"/>
-                </a:solidFill>
-                <a:effectLst/>
-                <a:uFillTx/>
-                <a:latin typeface="Calibri"/>
-              </a:rPr>
-              <a:t>Click to edit Master title style</a:t>
-            </a:r>
-            <a:endParaRPr lang="en-US" sz="4400" b="0" u="none" strike="noStrike">
-              <a:solidFill>
-                <a:schemeClr val="dk1"/>
-              </a:solidFill>
-              <a:effectLst/>
-              <a:uFillTx/>
-              <a:latin typeface="Calibri"/>
-            </a:endParaRPr>
-          </a:p>
-        </p:txBody>
-      </p:sp>
-      <p:sp>
-        <p:nvSpPr>
-          <p:cNvPr id="42" name="PlaceHolder 2"/>
-          <p:cNvSpPr>
-            <a:spLocks noGrp="1"/>
-          </p:cNvSpPr>
-          <p:nvPr>
-            <p:ph type="dt" idx="22"/>
-          </p:nvPr>
-        </p:nvSpPr>
-        <p:spPr>
-          <a:xfrm>
-            <a:off x="457200" y="6356520"/>
-            <a:ext cx="2133360" cy="364680"/>
-          </a:xfrm>
-          <a:prstGeom prst="rect">
-            <a:avLst/>
-          </a:prstGeom>
-          <a:noFill/>
-          <a:ln w="0">
-            <a:noFill/>
-          </a:ln>
-        </p:spPr>
-        <p:txBody>
-          <a:bodyPr lIns="91440" tIns="45720" rIns="91440" bIns="45720" anchor="ctr">
-            <a:noAutofit/>
-          </a:bodyPr>
-          <a:lstStyle>
-            <a:lvl1pPr indent="0" algn="l" defTabSz="457200">
-              <a:lnSpc>
-                <a:spcPct val="100000"/>
-              </a:lnSpc>
-              <a:buNone/>
-              <a:defRPr lang="en-US" sz="1200" b="0" u="none" strike="noStrike">
-                <a:solidFill>
-                  <a:schemeClr val="dk1">
-                    <a:tint val="75000"/>
-                  </a:schemeClr>
-                </a:solidFill>
-                <a:effectLst/>
-                <a:uFillTx/>
-                <a:latin typeface="Calibri"/>
-              </a:defRPr>
-            </a:lvl1pPr>
-          </a:lstStyle>
-          <a:p>
-            <a:pPr indent="0" algn="l" defTabSz="457200">
-              <a:lnSpc>
-                <a:spcPct val="100000"/>
-              </a:lnSpc>
-              <a:buNone/>
-            </a:pPr>
-            <a:r>
-              <a:rPr lang="en-US" sz="1200" b="0" u="none" strike="noStrike">
-                <a:solidFill>
-                  <a:schemeClr val="dk1">
-                    <a:tint val="75000"/>
-                  </a:schemeClr>
-                </a:solidFill>
-                <a:effectLst/>
-                <a:uFillTx/>
-                <a:latin typeface="Calibri"/>
-              </a:rPr>
-              <a:t>&lt;date/time&gt;</a:t>
-            </a:r>
-            <a:endParaRPr lang="en-US" sz="1200" b="0" u="none" strike="noStrike">
-              <a:solidFill>
-                <a:srgbClr val="000000"/>
-              </a:solidFill>
-              <a:effectLst/>
-              <a:uFillTx/>
-              <a:latin typeface="Times New Roman"/>
-            </a:endParaRPr>
-          </a:p>
-        </p:txBody>
-      </p:sp>
-      <p:sp>
-        <p:nvSpPr>
-          <p:cNvPr id="43" name="PlaceHolder 3"/>
-          <p:cNvSpPr>
-            <a:spLocks noGrp="1"/>
-          </p:cNvSpPr>
-          <p:nvPr>
-            <p:ph type="ftr" idx="23"/>
-          </p:nvPr>
-        </p:nvSpPr>
-        <p:spPr>
-          <a:xfrm>
-            <a:off x="3124080" y="6356520"/>
-            <a:ext cx="2895120" cy="364680"/>
-          </a:xfrm>
-          <a:prstGeom prst="rect">
-            <a:avLst/>
-          </a:prstGeom>
-          <a:noFill/>
-          <a:ln w="0">
-            <a:noFill/>
-          </a:ln>
-        </p:spPr>
-        <p:txBody>
-          <a:bodyPr lIns="91440" tIns="45720" rIns="91440" bIns="45720" anchor="ctr">
-            <a:noAutofit/>
-          </a:bodyPr>
-          <a:lstStyle>
-            <a:lvl1pPr indent="0" algn="ctr">
-              <a:buNone/>
-              <a:defRPr lang="en-US" sz="1400" b="0" u="none" strike="noStrike">
-                <a:solidFill>
-                  <a:srgbClr val="000000"/>
-                </a:solidFill>
-                <a:effectLst/>
-                <a:uFillTx/>
-                <a:latin typeface="Times New Roman"/>
-              </a:defRPr>
-            </a:lvl1pPr>
-          </a:lstStyle>
-          <a:p>
-            <a:pPr indent="0" algn="ctr">
-              <a:buNone/>
-            </a:pPr>
-            <a:r>
-              <a:rPr lang="en-US" sz="1400" b="0" u="none" strike="noStrike">
-                <a:solidFill>
-                  <a:srgbClr val="000000"/>
-                </a:solidFill>
-                <a:effectLst/>
-                <a:uFillTx/>
-                <a:latin typeface="Times New Roman"/>
-              </a:rPr>
-              <a:t>&lt;footer&gt;</a:t>
-            </a:r>
-            <a:endParaRPr lang="en-US" sz="1400" b="0" u="none" strike="noStrike">
-              <a:solidFill>
-                <a:srgbClr val="000000"/>
-              </a:solidFill>
-              <a:effectLst/>
-              <a:uFillTx/>
-              <a:latin typeface="Times New Roman"/>
-            </a:endParaRPr>
-          </a:p>
-        </p:txBody>
-      </p:sp>
-      <p:sp>
-        <p:nvSpPr>
-          <p:cNvPr id="44" name="PlaceHolder 4"/>
-          <p:cNvSpPr>
-            <a:spLocks noGrp="1"/>
-          </p:cNvSpPr>
-          <p:nvPr>
-            <p:ph type="sldNum" idx="24"/>
-          </p:nvPr>
-        </p:nvSpPr>
-        <p:spPr>
-          <a:xfrm>
-            <a:off x="6553080" y="6356520"/>
-            <a:ext cx="2133360" cy="364680"/>
-          </a:xfrm>
-          <a:prstGeom prst="rect">
-            <a:avLst/>
-          </a:prstGeom>
-          <a:noFill/>
-          <a:ln w="0">
-            <a:noFill/>
-          </a:ln>
-        </p:spPr>
-        <p:txBody>
-          <a:bodyPr lIns="91440" tIns="45720" rIns="91440" bIns="45720" anchor="ctr">
-            <a:noAutofit/>
-          </a:bodyPr>
-          <a:lstStyle>
-            <a:lvl1pPr indent="0" algn="r" defTabSz="457200">
-              <a:lnSpc>
-                <a:spcPct val="100000"/>
-              </a:lnSpc>
-              <a:buNone/>
-              <a:defRPr lang="en-US" sz="1200" b="0" u="none" strike="noStrike">
-                <a:solidFill>
-                  <a:schemeClr val="dk1">
-                    <a:tint val="75000"/>
-                  </a:schemeClr>
-                </a:solidFill>
-                <a:effectLst/>
-                <a:uFillTx/>
-                <a:latin typeface="Calibri"/>
-              </a:defRPr>
-            </a:lvl1pPr>
-          </a:lstStyle>
-          <a:p>
-            <a:pPr indent="0" algn="r" defTabSz="457200">
-              <a:lnSpc>
-                <a:spcPct val="100000"/>
-              </a:lnSpc>
-              <a:buNone/>
-            </a:pPr>
-            <a:fld id="{24312AE1-FCC0-4AB2-A547-440FE5710DF9}" type="slidenum">
-              <a:rPr lang="en-US" sz="1200" b="0" u="none" strike="noStrike">
-                <a:solidFill>
-                  <a:schemeClr val="dk1">
-                    <a:tint val="75000"/>
-                  </a:schemeClr>
-                </a:solidFill>
-                <a:effectLst/>
-                <a:uFillTx/>
-                <a:latin typeface="Calibri"/>
-              </a:rPr>
-              <a:t>&lt;number&gt;</a:t>
-            </a:fld>
-            <a:endParaRPr lang="en-US" sz="1200" b="0" u="none" strike="noStrike">
-              <a:solidFill>
-                <a:srgbClr val="000000"/>
-              </a:solidFill>
-              <a:effectLst/>
-              <a:uFillTx/>
-              <a:latin typeface="Times New Roman"/>
-            </a:endParaRPr>
-          </a:p>
-        </p:txBody>
-      </p:sp>
-      <p:sp>
-        <p:nvSpPr>
-          <p:cNvPr id="45" name="PlaceHolder 5"/>
-          <p:cNvSpPr>
-            <a:spLocks noGrp="1"/>
-          </p:cNvSpPr>
-          <p:nvPr>
-            <p:ph type="body"/>
-          </p:nvPr>
-        </p:nvSpPr>
-        <p:spPr>
-          <a:xfrm>
-            <a:off x="609480" y="1604520"/>
-            <a:ext cx="10972080" cy="3977280"/>
-          </a:xfrm>
-          <a:prstGeom prst="rect">
-            <a:avLst/>
-          </a:prstGeom>
-          <a:noFill/>
-          <a:ln w="0">
-            <a:noFill/>
-          </a:ln>
-        </p:spPr>
-        <p:txBody>
-          <a:bodyPr lIns="0" tIns="0" rIns="0" bIns="0" anchor="t">
-            <a:normAutofit/>
-          </a:bodyPr>
-          <a:lstStyle>
-            <a:lvl1pPr algn="l" defTabSz="457200">
-              <a:spcBef>
-                <a:spcPts val="641"/>
-              </a:spcBef>
-              <a:buClr>
-                <a:srgbClr val="000000"/>
-              </a:buClr>
-              <a:buFont typeface="Arial"/>
-              <a:buChar char="•"/>
-              <a:defRPr lang="en-US" sz="3200" b="0" u="none" strike="noStrike">
-                <a:solidFill>
-                  <a:schemeClr val="dk1"/>
-                </a:solidFill>
-                <a:effectLst/>
-                <a:uFillTx/>
-                <a:latin typeface="Calibri"/>
-              </a:defRPr>
-            </a:lvl1pPr>
-            <a:lvl2pPr lvl="1" algn="l" defTabSz="457200">
-              <a:spcBef>
-                <a:spcPts val="561"/>
-              </a:spcBef>
-              <a:buClr>
-                <a:srgbClr val="000000"/>
-              </a:buClr>
-              <a:buSzPct val="75000"/>
-              <a:buFont typeface="Symbol" charset="2"/>
-              <a:buChar char=""/>
-              <a:defRPr lang="en-US" sz="2800" b="0" u="none" strike="noStrike">
-                <a:solidFill>
-                  <a:schemeClr val="dk1"/>
-                </a:solidFill>
-                <a:effectLst/>
-                <a:uFillTx/>
-                <a:latin typeface="Calibri"/>
-              </a:defRPr>
-            </a:lvl2pPr>
-            <a:lvl3pPr lvl="2" algn="l" defTabSz="457200">
-              <a:spcBef>
-                <a:spcPts val="479"/>
-              </a:spcBef>
-              <a:buClr>
-                <a:srgbClr val="000000"/>
-              </a:buClr>
-              <a:buSzPct val="45000"/>
-              <a:buFont typeface="Wingdings" charset="2"/>
-              <a:buChar char=""/>
-              <a:defRPr lang="en-US" sz="2400" b="0" u="none" strike="noStrike">
-                <a:solidFill>
-                  <a:schemeClr val="dk1"/>
-                </a:solidFill>
-                <a:effectLst/>
-                <a:uFillTx/>
-                <a:latin typeface="Calibri"/>
-              </a:defRPr>
-            </a:lvl3pPr>
-            <a:lvl4pPr lvl="3" algn="l" defTabSz="457200">
-              <a:spcBef>
-                <a:spcPts val="400"/>
-              </a:spcBef>
-              <a:buClr>
-                <a:srgbClr val="000000"/>
-              </a:buClr>
-              <a:buSzPct val="75000"/>
-              <a:buFont typeface="Symbol" charset="2"/>
-              <a:buChar char=""/>
-              <a:defRPr lang="en-US" sz="2000" b="0" u="none" strike="noStrike">
-                <a:solidFill>
-                  <a:schemeClr val="dk1"/>
-                </a:solidFill>
-                <a:effectLst/>
-                <a:uFillTx/>
-                <a:latin typeface="Calibri"/>
-              </a:defRPr>
-            </a:lvl4pPr>
-            <a:lvl5pPr lvl="4" algn="l" defTabSz="457200">
-              <a:spcBef>
-                <a:spcPts val="400"/>
-              </a:spcBef>
-              <a:buClr>
-                <a:srgbClr val="000000"/>
-              </a:buClr>
-              <a:buSzPct val="45000"/>
-              <a:buFont typeface="Wingdings" charset="2"/>
-              <a:buChar char=""/>
-              <a:defRPr lang="en-US" sz="2000" b="0" u="none" strike="noStrike">
-                <a:solidFill>
-                  <a:schemeClr val="dk1"/>
-                </a:solidFill>
-                <a:effectLst/>
-                <a:uFillTx/>
-                <a:latin typeface="Calibri"/>
-              </a:defRPr>
-            </a:lvl5pPr>
-            <a:lvl6pPr lvl="5" algn="l" defTabSz="457200">
-              <a:spcBef>
-                <a:spcPts val="283"/>
-              </a:spcBef>
-              <a:buClr>
-                <a:srgbClr val="000000"/>
-              </a:buClr>
-              <a:buSzPct val="45000"/>
-              <a:buFont typeface="Wingdings" charset="2"/>
-              <a:buChar char=""/>
-              <a:defRPr lang="en-US" sz="2000" b="0" u="none" strike="noStrike">
-                <a:solidFill>
-                  <a:schemeClr val="dk1"/>
-                </a:solidFill>
-                <a:effectLst/>
-                <a:uFillTx/>
-                <a:latin typeface="Calibri"/>
-              </a:defRPr>
-            </a:lvl6pPr>
-            <a:lvl7pPr lvl="6" algn="l" defTabSz="457200">
-              <a:spcBef>
-                <a:spcPts val="283"/>
-              </a:spcBef>
-              <a:buClr>
-                <a:srgbClr val="000000"/>
-              </a:buClr>
-              <a:buSzPct val="45000"/>
-              <a:buFont typeface="Wingdings" charset="2"/>
-              <a:buChar char=""/>
-              <a:defRPr lang="en-US" sz="2000" b="0" u="none" strike="noStrike">
-                <a:solidFill>
-                  <a:schemeClr val="dk1"/>
-                </a:solidFill>
-                <a:effectLst/>
-                <a:uFillTx/>
-                <a:latin typeface="Calibri"/>
-              </a:defRPr>
-            </a:lvl7pPr>
-          </a:lstStyle>
-          <a:p>
-            <a:pPr marL="343080" indent="-343080" algn="l" defTabSz="457200">
-              <a:spcBef>
-                <a:spcPts val="641"/>
-              </a:spcBef>
-              <a:buClr>
-                <a:srgbClr val="000000"/>
-              </a:buClr>
-              <a:buFont typeface="Arial"/>
-              <a:buChar char="•"/>
-            </a:pPr>
-            <a:r>
-              <a:rPr lang="en-US" sz="3200" b="0" u="none" strike="noStrike">
-                <a:solidFill>
-                  <a:schemeClr val="dk1"/>
-                </a:solidFill>
-                <a:effectLst/>
-                <a:uFillTx/>
-                <a:latin typeface="Calibri"/>
-              </a:rPr>
-              <a:t>Click to edit the outline text format</a:t>
-            </a:r>
-            <a:endParaRPr lang="en-US" sz="3200" b="0" u="none" strike="noStrike">
-              <a:solidFill>
-                <a:schemeClr val="dk1"/>
-              </a:solidFill>
-              <a:effectLst/>
-              <a:uFillTx/>
-              <a:latin typeface="Calibri"/>
-            </a:endParaRPr>
-          </a:p>
-          <a:p>
-            <a:pPr marL="864000" lvl="1" indent="-324000" algn="l" defTabSz="457200">
-              <a:spcBef>
-                <a:spcPts val="561"/>
-              </a:spcBef>
-              <a:buClr>
-                <a:srgbClr val="000000"/>
-              </a:buClr>
-              <a:buSzPct val="75000"/>
-              <a:buFont typeface="Symbol" charset="2"/>
-              <a:buChar char=""/>
-            </a:pPr>
-            <a:r>
-              <a:rPr lang="en-US" sz="2800" b="0" u="none" strike="noStrike">
-                <a:solidFill>
-                  <a:schemeClr val="dk1"/>
-                </a:solidFill>
-                <a:effectLst/>
-                <a:uFillTx/>
-                <a:latin typeface="Calibri"/>
-              </a:rPr>
-              <a:t>Second Outline Level</a:t>
-            </a:r>
-            <a:endParaRPr lang="en-US" sz="2800" b="0" u="none" strike="noStrike">
-              <a:solidFill>
-                <a:schemeClr val="dk1"/>
-              </a:solidFill>
-              <a:effectLst/>
-              <a:uFillTx/>
-              <a:latin typeface="Calibri"/>
-            </a:endParaRPr>
-          </a:p>
-          <a:p>
-            <a:pPr marL="1296000" lvl="2" indent="-288000" algn="l" defTabSz="457200">
-              <a:spcBef>
-                <a:spcPts val="479"/>
-              </a:spcBef>
-              <a:buClr>
-                <a:srgbClr val="000000"/>
-              </a:buClr>
-              <a:buSzPct val="45000"/>
-              <a:buFont typeface="Wingdings" charset="2"/>
-              <a:buChar char=""/>
-            </a:pPr>
-            <a:r>
-              <a:rPr lang="en-US" sz="2400" b="0" u="none" strike="noStrike">
-                <a:solidFill>
-                  <a:schemeClr val="dk1"/>
-                </a:solidFill>
-                <a:effectLst/>
-                <a:uFillTx/>
-                <a:latin typeface="Calibri"/>
-              </a:rPr>
-              <a:t>Third Outline Level</a:t>
-            </a:r>
-            <a:endParaRPr lang="en-US" sz="2400" b="0" u="none" strike="noStrike">
-              <a:solidFill>
-                <a:schemeClr val="dk1"/>
-              </a:solidFill>
-              <a:effectLst/>
-              <a:uFillTx/>
-              <a:latin typeface="Calibri"/>
-            </a:endParaRPr>
-          </a:p>
-          <a:p>
-            <a:pPr marL="1728000" lvl="3" indent="-216000" algn="l" defTabSz="457200">
-              <a:spcBef>
-                <a:spcPts val="400"/>
-              </a:spcBef>
-              <a:buClr>
-                <a:srgbClr val="000000"/>
-              </a:buClr>
-              <a:buSzPct val="75000"/>
-              <a:buFont typeface="Symbol" charset="2"/>
-              <a:buChar char=""/>
-            </a:pPr>
-            <a:r>
-              <a:rPr lang="en-US" sz="2000" b="0" u="none" strike="noStrike">
-                <a:solidFill>
-                  <a:schemeClr val="dk1"/>
-                </a:solidFill>
-                <a:effectLst/>
-                <a:uFillTx/>
-                <a:latin typeface="Calibri"/>
-              </a:rPr>
-              <a:t>Fourth Outline Level</a:t>
-            </a:r>
-            <a:endParaRPr lang="en-US" sz="2000" b="0" u="none" strike="noStrike">
-              <a:solidFill>
-                <a:schemeClr val="dk1"/>
-              </a:solidFill>
-              <a:effectLst/>
-              <a:uFillTx/>
-              <a:latin typeface="Calibri"/>
-            </a:endParaRPr>
-          </a:p>
-          <a:p>
-            <a:pPr marL="2160000" lvl="4" indent="-216000" algn="l" defTabSz="457200">
-              <a:spcBef>
-                <a:spcPts val="400"/>
-              </a:spcBef>
-              <a:buClr>
-                <a:srgbClr val="000000"/>
-              </a:buClr>
-              <a:buSzPct val="45000"/>
-              <a:buFont typeface="Wingdings" charset="2"/>
-              <a:buChar char=""/>
-            </a:pPr>
-            <a:r>
-              <a:rPr lang="en-US" sz="2000" b="0" u="none" strike="noStrike">
-                <a:solidFill>
-                  <a:schemeClr val="dk1"/>
-                </a:solidFill>
-                <a:effectLst/>
-                <a:uFillTx/>
-                <a:latin typeface="Calibri"/>
-              </a:rPr>
-              <a:t>Fifth Outline Level</a:t>
-            </a:r>
-            <a:endParaRPr lang="en-US" sz="2000" b="0" u="none" strike="noStrike">
-              <a:solidFill>
-                <a:schemeClr val="dk1"/>
-              </a:solidFill>
-              <a:effectLst/>
-              <a:uFillTx/>
-              <a:latin typeface="Calibri"/>
-            </a:endParaRPr>
-          </a:p>
-          <a:p>
-            <a:pPr marL="2592000" lvl="5" indent="-216000" algn="l" defTabSz="457200">
-              <a:spcBef>
-                <a:spcPts val="283"/>
-              </a:spcBef>
-              <a:buClr>
-                <a:srgbClr val="000000"/>
-              </a:buClr>
-              <a:buSzPct val="45000"/>
-              <a:buFont typeface="Wingdings" charset="2"/>
-              <a:buChar char=""/>
-            </a:pPr>
-            <a:r>
-              <a:rPr lang="en-US" sz="2000" b="0" u="none" strike="noStrike">
-                <a:solidFill>
-                  <a:schemeClr val="dk1"/>
-                </a:solidFill>
-                <a:effectLst/>
-                <a:uFillTx/>
-                <a:latin typeface="Calibri"/>
-              </a:rPr>
-              <a:t>Sixth Outline Level</a:t>
-            </a:r>
-            <a:endParaRPr lang="en-US" sz="2000" b="0" u="none" strike="noStrike">
-              <a:solidFill>
-                <a:schemeClr val="dk1"/>
-              </a:solidFill>
-              <a:effectLst/>
-              <a:uFillTx/>
-              <a:latin typeface="Calibri"/>
-            </a:endParaRPr>
-          </a:p>
-          <a:p>
-            <a:pPr marL="3024000" lvl="6" indent="-216000" algn="l" defTabSz="457200">
-              <a:spcBef>
-                <a:spcPts val="283"/>
-              </a:spcBef>
-              <a:buClr>
-                <a:srgbClr val="000000"/>
-              </a:buClr>
-              <a:buSzPct val="45000"/>
-              <a:buFont typeface="Wingdings" charset="2"/>
-              <a:buChar char=""/>
-            </a:pPr>
-            <a:r>
-              <a:rPr lang="en-US" sz="2000" b="0" u="none" strike="noStrike">
-                <a:solidFill>
-                  <a:schemeClr val="dk1"/>
-                </a:solidFill>
-                <a:effectLst/>
-                <a:uFillTx/>
-                <a:latin typeface="Calibri"/>
-              </a:rPr>
-              <a:t>Seventh Outline Level</a:t>
-            </a:r>
-            <a:endParaRPr lang="en-US" sz="2000" b="0" u="none" strike="noStrike">
-              <a:solidFill>
-                <a:schemeClr val="dk1"/>
-              </a:solidFill>
-              <a:effectLst/>
-              <a:uFillTx/>
-              <a:latin typeface="Calibri"/>
-            </a:endParaRPr>
-          </a:p>
-        </p:txBody>
-      </p:sp>
-    </p:spTree>
-  </p:cSld>
-</p:sldLayout>
-</file>
-
-<file path=ppt/slideLayouts/slideLayout9.xml><?xml version="1.0" encoding="utf-8"?>
-<p:sldLayout xmlns:a="http://schemas.openxmlformats.org/drawingml/2006/main" xmlns:p="http://schemas.openxmlformats.org/presentationml/2006/main" xmlns:r="http://schemas.openxmlformats.org/officeDocument/2006/relationships" xmlns:p14="http://schemas.microsoft.com/office/powerpoint/2010/main" xmlns:p15="http://schemas.microsoft.com/office/powerpoint/2012/main" xmlns:mc="http://schemas.openxmlformats.org/markup-compatibility/2006" type="blank" preserve="1">
-  <p:cSld name="Blank">
-    <p:bg>
-      <p:bgPr>
-        <a:solidFill>
-          <a:srgbClr val="FFFFFF"/>
-        </a:solidFill>
-      </p:bgPr>
-    </p:bg>
-    <p:spTree>
-      <p:nvGrpSpPr>
-        <p:cNvPr id="1" name=""/>
-        <p:cNvGrpSpPr/>
-        <p:nvPr/>
-      </p:nvGrpSpPr>
-      <p:grpSpPr>
-        <a:xfrm>
-          <a:off x="0" y="0"/>
-          <a:ext cx="0" cy="0"/>
-          <a:chOff x="0" y="0"/>
-          <a:chExt cx="0" cy="0"/>
-        </a:xfrm>
-      </p:grpSpPr>
-      <p:sp>
-        <p:nvSpPr>
-          <p:cNvPr id="46" name="PlaceHolder 1"/>
-          <p:cNvSpPr>
-            <a:spLocks noGrp="1"/>
-          </p:cNvSpPr>
-          <p:nvPr>
-            <p:ph type="dt" idx="25"/>
-          </p:nvPr>
-        </p:nvSpPr>
-        <p:spPr>
-          <a:xfrm>
-            <a:off x="457200" y="6356520"/>
-            <a:ext cx="2133360" cy="364680"/>
-          </a:xfrm>
-          <a:prstGeom prst="rect">
-            <a:avLst/>
-          </a:prstGeom>
-          <a:noFill/>
-          <a:ln w="0">
-            <a:noFill/>
-          </a:ln>
-        </p:spPr>
-        <p:txBody>
-          <a:bodyPr lIns="91440" tIns="45720" rIns="91440" bIns="45720" anchor="ctr">
-            <a:noAutofit/>
-          </a:bodyPr>
-          <a:lstStyle>
-            <a:lvl1pPr indent="0" algn="l" defTabSz="457200">
-              <a:lnSpc>
-                <a:spcPct val="100000"/>
-              </a:lnSpc>
-              <a:buNone/>
-              <a:defRPr lang="en-US" sz="1200" b="0" u="none" strike="noStrike">
-                <a:solidFill>
-                  <a:schemeClr val="dk1">
-                    <a:tint val="75000"/>
-                  </a:schemeClr>
-                </a:solidFill>
-                <a:effectLst/>
-                <a:uFillTx/>
-                <a:latin typeface="Calibri"/>
-              </a:defRPr>
-            </a:lvl1pPr>
-          </a:lstStyle>
-          <a:p>
-            <a:pPr indent="0" algn="l" defTabSz="457200">
-              <a:lnSpc>
-                <a:spcPct val="100000"/>
-              </a:lnSpc>
-              <a:buNone/>
-            </a:pPr>
-            <a:r>
-              <a:rPr lang="en-US" sz="1200" b="0" u="none" strike="noStrike">
-                <a:solidFill>
-                  <a:schemeClr val="dk1">
-                    <a:tint val="75000"/>
-                  </a:schemeClr>
-                </a:solidFill>
-                <a:effectLst/>
-                <a:uFillTx/>
-                <a:latin typeface="Calibri"/>
-              </a:rPr>
-              <a:t>&lt;date/time&gt;</a:t>
-            </a:r>
-            <a:endParaRPr lang="en-US" sz="1200" b="0" u="none" strike="noStrike">
-              <a:solidFill>
-                <a:srgbClr val="000000"/>
-              </a:solidFill>
-              <a:effectLst/>
-              <a:uFillTx/>
-              <a:latin typeface="Times New Roman"/>
-            </a:endParaRPr>
-          </a:p>
-        </p:txBody>
-      </p:sp>
-      <p:sp>
-        <p:nvSpPr>
-          <p:cNvPr id="47" name="PlaceHolder 2"/>
-          <p:cNvSpPr>
-            <a:spLocks noGrp="1"/>
-          </p:cNvSpPr>
-          <p:nvPr>
-            <p:ph type="ftr" idx="26"/>
-          </p:nvPr>
-        </p:nvSpPr>
-        <p:spPr>
-          <a:xfrm>
-            <a:off x="3124080" y="6356520"/>
-            <a:ext cx="2895120" cy="364680"/>
-          </a:xfrm>
-          <a:prstGeom prst="rect">
-            <a:avLst/>
-          </a:prstGeom>
-          <a:noFill/>
-          <a:ln w="0">
-            <a:noFill/>
-          </a:ln>
-        </p:spPr>
-        <p:txBody>
-          <a:bodyPr lIns="91440" tIns="45720" rIns="91440" bIns="45720" anchor="ctr">
-            <a:noAutofit/>
-          </a:bodyPr>
-          <a:lstStyle>
-            <a:lvl1pPr indent="0" algn="ctr">
-              <a:buNone/>
-              <a:defRPr lang="en-US" sz="1400" b="0" u="none" strike="noStrike">
-                <a:solidFill>
-                  <a:srgbClr val="000000"/>
-                </a:solidFill>
-                <a:effectLst/>
-                <a:uFillTx/>
-                <a:latin typeface="Times New Roman"/>
-              </a:defRPr>
-            </a:lvl1pPr>
-          </a:lstStyle>
-          <a:p>
-            <a:pPr indent="0" algn="ctr">
-              <a:buNone/>
-            </a:pPr>
-            <a:r>
-              <a:rPr lang="en-US" sz="1400" b="0" u="none" strike="noStrike">
-                <a:solidFill>
-                  <a:srgbClr val="000000"/>
-                </a:solidFill>
-                <a:effectLst/>
-                <a:uFillTx/>
-                <a:latin typeface="Times New Roman"/>
-              </a:rPr>
-              <a:t>&lt;footer&gt;</a:t>
-            </a:r>
-            <a:endParaRPr lang="en-US" sz="1400" b="0" u="none" strike="noStrike">
-              <a:solidFill>
-                <a:srgbClr val="000000"/>
-              </a:solidFill>
-              <a:effectLst/>
-              <a:uFillTx/>
-              <a:latin typeface="Times New Roman"/>
-            </a:endParaRPr>
-          </a:p>
-        </p:txBody>
-      </p:sp>
-      <p:sp>
-        <p:nvSpPr>
-          <p:cNvPr id="48" name="PlaceHolder 3"/>
-          <p:cNvSpPr>
-            <a:spLocks noGrp="1"/>
-          </p:cNvSpPr>
-          <p:nvPr>
-            <p:ph type="sldNum" idx="27"/>
-          </p:nvPr>
-        </p:nvSpPr>
-        <p:spPr>
-          <a:xfrm>
-            <a:off x="6553080" y="6356520"/>
-            <a:ext cx="2133360" cy="364680"/>
-          </a:xfrm>
-          <a:prstGeom prst="rect">
-            <a:avLst/>
-          </a:prstGeom>
-          <a:noFill/>
-          <a:ln w="0">
-            <a:noFill/>
-          </a:ln>
-        </p:spPr>
-        <p:txBody>
-          <a:bodyPr lIns="91440" tIns="45720" rIns="91440" bIns="45720" anchor="ctr">
-            <a:noAutofit/>
-          </a:bodyPr>
-          <a:lstStyle>
-            <a:lvl1pPr indent="0" algn="r" defTabSz="457200">
-              <a:lnSpc>
-                <a:spcPct val="100000"/>
-              </a:lnSpc>
-              <a:buNone/>
-              <a:defRPr lang="en-US" sz="1200" b="0" u="none" strike="noStrike">
-                <a:solidFill>
-                  <a:schemeClr val="dk1">
-                    <a:tint val="75000"/>
-                  </a:schemeClr>
-                </a:solidFill>
-                <a:effectLst/>
-                <a:uFillTx/>
-                <a:latin typeface="Calibri"/>
-              </a:defRPr>
-            </a:lvl1pPr>
-          </a:lstStyle>
-          <a:p>
-            <a:pPr indent="0" algn="r" defTabSz="457200">
-              <a:lnSpc>
-                <a:spcPct val="100000"/>
-              </a:lnSpc>
-              <a:buNone/>
-            </a:pPr>
-            <a:fld id="{A501C725-43BA-40C2-BF2A-8F32D1A39373}" type="slidenum">
-              <a:rPr lang="en-US" sz="1200" b="0" u="none" strike="noStrike">
-                <a:solidFill>
-                  <a:schemeClr val="dk1">
-                    <a:tint val="75000"/>
-                  </a:schemeClr>
-                </a:solidFill>
-                <a:effectLst/>
-                <a:uFillTx/>
-                <a:latin typeface="Calibri"/>
-              </a:rPr>
-              <a:t>&lt;number&gt;</a:t>
-            </a:fld>
-            <a:endParaRPr lang="en-US" sz="1200" b="0" u="none" strike="noStrike">
-              <a:solidFill>
-                <a:srgbClr val="000000"/>
-              </a:solidFill>
-              <a:effectLst/>
-              <a:uFillTx/>
-              <a:latin typeface="Times New Roman"/>
-            </a:endParaRPr>
-          </a:p>
-        </p:txBody>
-      </p:sp>
-      <p:sp>
-        <p:nvSpPr>
-          <p:cNvPr id="49" name="PlaceHolder 4"/>
-          <p:cNvSpPr>
-            <a:spLocks noGrp="1"/>
-          </p:cNvSpPr>
-          <p:nvPr>
-            <p:ph type="title"/>
-          </p:nvPr>
-        </p:nvSpPr>
-        <p:spPr>
-          <a:xfrm>
-            <a:off x="609480" y="273600"/>
-            <a:ext cx="10972080" cy="1144800"/>
-          </a:xfrm>
-          <a:prstGeom prst="rect">
-            <a:avLst/>
-          </a:prstGeom>
-          <a:noFill/>
-          <a:ln w="0">
-            <a:noFill/>
-          </a:ln>
-        </p:spPr>
-        <p:txBody>
-          <a:bodyPr lIns="0" tIns="0" rIns="0" bIns="0" anchor="ctr">
-            <a:noAutofit/>
-          </a:bodyPr>
-          <a:lstStyle>
-            <a:lvl1pPr indent="0" algn="ctr" defTabSz="457200">
-              <a:buNone/>
-              <a:defRPr lang="en-US" sz="4400" b="0" u="none" strike="noStrike">
-                <a:solidFill>
-                  <a:schemeClr val="dk1"/>
-                </a:solidFill>
-                <a:effectLst/>
-                <a:uFillTx/>
-                <a:latin typeface="Calibri"/>
-              </a:defRPr>
-            </a:lvl1pPr>
-          </a:lstStyle>
-          <a:p>
-            <a:pPr indent="0" algn="ctr" defTabSz="457200">
-              <a:buNone/>
-            </a:pPr>
-            <a:r>
-              <a:rPr lang="en-US" sz="4400" b="0" u="none" strike="noStrike">
-                <a:solidFill>
-                  <a:schemeClr val="dk1"/>
-                </a:solidFill>
-                <a:effectLst/>
-                <a:uFillTx/>
-                <a:latin typeface="Calibri"/>
-              </a:rPr>
-              <a:t>Click to edit the title text format</a:t>
-            </a:r>
-            <a:endParaRPr lang="en-US" sz="4400" b="0" u="none" strike="noStrike">
-              <a:solidFill>
-                <a:schemeClr val="dk1"/>
-              </a:solidFill>
-              <a:effectLst/>
-              <a:uFillTx/>
-              <a:latin typeface="Calibri"/>
-            </a:endParaRPr>
-          </a:p>
-        </p:txBody>
-      </p:sp>
-      <p:sp>
-        <p:nvSpPr>
-          <p:cNvPr id="50" name="PlaceHolder 5"/>
-          <p:cNvSpPr>
-            <a:spLocks noGrp="1"/>
-          </p:cNvSpPr>
-          <p:nvPr>
-            <p:ph type="body"/>
-          </p:nvPr>
-        </p:nvSpPr>
-        <p:spPr>
-          <a:xfrm>
-            <a:off x="609480" y="1604520"/>
-            <a:ext cx="10972080" cy="3977280"/>
-          </a:xfrm>
-          <a:prstGeom prst="rect">
-            <a:avLst/>
-          </a:prstGeom>
-          <a:noFill/>
-          <a:ln w="0">
-            <a:noFill/>
-          </a:ln>
-        </p:spPr>
-        <p:txBody>
-          <a:bodyPr lIns="0" tIns="0" rIns="0" bIns="0" anchor="t">
-            <a:normAutofit/>
-          </a:bodyPr>
-          <a:lstStyle>
-            <a:lvl1pPr algn="l" defTabSz="457200">
-              <a:spcBef>
-                <a:spcPts val="641"/>
-              </a:spcBef>
-              <a:buClr>
-                <a:srgbClr val="000000"/>
-              </a:buClr>
-              <a:buFont typeface="Arial"/>
-              <a:buChar char="•"/>
-              <a:defRPr lang="en-US" sz="3200" b="0" u="none" strike="noStrike">
-                <a:solidFill>
-                  <a:schemeClr val="dk1"/>
-                </a:solidFill>
-                <a:effectLst/>
-                <a:uFillTx/>
-                <a:latin typeface="Calibri"/>
-              </a:defRPr>
-            </a:lvl1pPr>
-            <a:lvl2pPr lvl="1" algn="l" defTabSz="457200">
-              <a:spcBef>
-                <a:spcPts val="561"/>
-              </a:spcBef>
-              <a:buClr>
-                <a:srgbClr val="000000"/>
-              </a:buClr>
-              <a:buSzPct val="75000"/>
-              <a:buFont typeface="Symbol" charset="2"/>
-              <a:buChar char=""/>
-              <a:defRPr lang="en-US" sz="2800" b="0" u="none" strike="noStrike">
-                <a:solidFill>
-                  <a:schemeClr val="dk1"/>
-                </a:solidFill>
-                <a:effectLst/>
-                <a:uFillTx/>
-                <a:latin typeface="Calibri"/>
-              </a:defRPr>
-            </a:lvl2pPr>
-            <a:lvl3pPr lvl="2" algn="l" defTabSz="457200">
-              <a:spcBef>
-                <a:spcPts val="479"/>
-              </a:spcBef>
-              <a:buClr>
-                <a:srgbClr val="000000"/>
-              </a:buClr>
-              <a:buSzPct val="45000"/>
-              <a:buFont typeface="Wingdings" charset="2"/>
-              <a:buChar char=""/>
-              <a:defRPr lang="en-US" sz="2400" b="0" u="none" strike="noStrike">
-                <a:solidFill>
-                  <a:schemeClr val="dk1"/>
-                </a:solidFill>
-                <a:effectLst/>
-                <a:uFillTx/>
-                <a:latin typeface="Calibri"/>
-              </a:defRPr>
-            </a:lvl3pPr>
-            <a:lvl4pPr lvl="3" algn="l" defTabSz="457200">
-              <a:spcBef>
-                <a:spcPts val="400"/>
-              </a:spcBef>
-              <a:buClr>
-                <a:srgbClr val="000000"/>
-              </a:buClr>
-              <a:buSzPct val="75000"/>
-              <a:buFont typeface="Symbol" charset="2"/>
-              <a:buChar char=""/>
-              <a:defRPr lang="en-US" sz="2000" b="0" u="none" strike="noStrike">
-                <a:solidFill>
-                  <a:schemeClr val="dk1"/>
-                </a:solidFill>
-                <a:effectLst/>
-                <a:uFillTx/>
-                <a:latin typeface="Calibri"/>
-              </a:defRPr>
-            </a:lvl4pPr>
-            <a:lvl5pPr lvl="4" algn="l" defTabSz="457200">
-              <a:spcBef>
-                <a:spcPts val="400"/>
-              </a:spcBef>
-              <a:buClr>
-                <a:srgbClr val="000000"/>
-              </a:buClr>
-              <a:buSzPct val="45000"/>
-              <a:buFont typeface="Wingdings" charset="2"/>
-              <a:buChar char=""/>
-              <a:defRPr lang="en-US" sz="2000" b="0" u="none" strike="noStrike">
-                <a:solidFill>
-                  <a:schemeClr val="dk1"/>
-                </a:solidFill>
-                <a:effectLst/>
-                <a:uFillTx/>
-                <a:latin typeface="Calibri"/>
-              </a:defRPr>
-            </a:lvl5pPr>
-            <a:lvl6pPr lvl="5" algn="l" defTabSz="457200">
-              <a:spcBef>
-                <a:spcPts val="283"/>
-              </a:spcBef>
-              <a:buClr>
-                <a:srgbClr val="000000"/>
-              </a:buClr>
-              <a:buSzPct val="45000"/>
-              <a:buFont typeface="Wingdings" charset="2"/>
-              <a:buChar char=""/>
-              <a:defRPr lang="en-US" sz="2000" b="0" u="none" strike="noStrike">
-                <a:solidFill>
-                  <a:schemeClr val="dk1"/>
-                </a:solidFill>
-                <a:effectLst/>
-                <a:uFillTx/>
-                <a:latin typeface="Calibri"/>
-              </a:defRPr>
-            </a:lvl6pPr>
-            <a:lvl7pPr lvl="6" algn="l" defTabSz="457200">
-              <a:spcBef>
-                <a:spcPts val="283"/>
-              </a:spcBef>
-              <a:buClr>
-                <a:srgbClr val="000000"/>
-              </a:buClr>
-              <a:buSzPct val="45000"/>
-              <a:buFont typeface="Wingdings" charset="2"/>
-              <a:buChar char=""/>
-              <a:defRPr lang="en-US" sz="2000" b="0" u="none" strike="noStrike">
-                <a:solidFill>
-                  <a:schemeClr val="dk1"/>
-                </a:solidFill>
-                <a:effectLst/>
-                <a:uFillTx/>
-                <a:latin typeface="Calibri"/>
-              </a:defRPr>
-            </a:lvl7pPr>
-          </a:lstStyle>
-          <a:p>
-            <a:pPr marL="343080" indent="-343080" algn="l" defTabSz="457200">
-              <a:spcBef>
-                <a:spcPts val="641"/>
-              </a:spcBef>
-              <a:buClr>
-                <a:srgbClr val="000000"/>
-              </a:buClr>
-              <a:buFont typeface="Arial"/>
-              <a:buChar char="•"/>
-            </a:pPr>
-            <a:r>
-              <a:rPr lang="en-US" sz="3200" b="0" u="none" strike="noStrike">
-                <a:solidFill>
-                  <a:schemeClr val="dk1"/>
-                </a:solidFill>
-                <a:effectLst/>
-                <a:uFillTx/>
-                <a:latin typeface="Calibri"/>
-              </a:rPr>
-              <a:t>Click to edit the outline text format</a:t>
-            </a:r>
-            <a:endParaRPr lang="en-US" sz="3200" b="0" u="none" strike="noStrike">
-              <a:solidFill>
-                <a:schemeClr val="dk1"/>
-              </a:solidFill>
-              <a:effectLst/>
-              <a:uFillTx/>
-              <a:latin typeface="Calibri"/>
-            </a:endParaRPr>
-          </a:p>
-          <a:p>
-            <a:pPr marL="864000" lvl="1" indent="-324000" algn="l" defTabSz="457200">
-              <a:spcBef>
-                <a:spcPts val="561"/>
-              </a:spcBef>
-              <a:buClr>
-                <a:srgbClr val="000000"/>
-              </a:buClr>
-              <a:buSzPct val="75000"/>
-              <a:buFont typeface="Symbol" charset="2"/>
-              <a:buChar char=""/>
-            </a:pPr>
-            <a:r>
-              <a:rPr lang="en-US" sz="2800" b="0" u="none" strike="noStrike">
-                <a:solidFill>
-                  <a:schemeClr val="dk1"/>
-                </a:solidFill>
-                <a:effectLst/>
-                <a:uFillTx/>
-                <a:latin typeface="Calibri"/>
-              </a:rPr>
-              <a:t>Second Outline Level</a:t>
-            </a:r>
-            <a:endParaRPr lang="en-US" sz="2800" b="0" u="none" strike="noStrike">
-              <a:solidFill>
-                <a:schemeClr val="dk1"/>
-              </a:solidFill>
-              <a:effectLst/>
-              <a:uFillTx/>
-              <a:latin typeface="Calibri"/>
-            </a:endParaRPr>
-          </a:p>
-          <a:p>
-            <a:pPr marL="1296000" lvl="2" indent="-288000" algn="l" defTabSz="457200">
-              <a:spcBef>
-                <a:spcPts val="479"/>
-              </a:spcBef>
-              <a:buClr>
-                <a:srgbClr val="000000"/>
-              </a:buClr>
-              <a:buSzPct val="45000"/>
-              <a:buFont typeface="Wingdings" charset="2"/>
-              <a:buChar char=""/>
-            </a:pPr>
-            <a:r>
-              <a:rPr lang="en-US" sz="2400" b="0" u="none" strike="noStrike">
-                <a:solidFill>
-                  <a:schemeClr val="dk1"/>
-                </a:solidFill>
-                <a:effectLst/>
-                <a:uFillTx/>
-                <a:latin typeface="Calibri"/>
-              </a:rPr>
-              <a:t>Third Outline Level</a:t>
-            </a:r>
-            <a:endParaRPr lang="en-US" sz="2400" b="0" u="none" strike="noStrike">
-              <a:solidFill>
-                <a:schemeClr val="dk1"/>
-              </a:solidFill>
-              <a:effectLst/>
-              <a:uFillTx/>
-              <a:latin typeface="Calibri"/>
-            </a:endParaRPr>
-          </a:p>
-          <a:p>
-            <a:pPr marL="1728000" lvl="3" indent="-216000" algn="l" defTabSz="457200">
-              <a:spcBef>
-                <a:spcPts val="400"/>
-              </a:spcBef>
-              <a:buClr>
-                <a:srgbClr val="000000"/>
-              </a:buClr>
-              <a:buSzPct val="75000"/>
-              <a:buFont typeface="Symbol" charset="2"/>
-              <a:buChar char=""/>
-            </a:pPr>
-            <a:r>
-              <a:rPr lang="en-US" sz="2000" b="0" u="none" strike="noStrike">
-                <a:solidFill>
-                  <a:schemeClr val="dk1"/>
-                </a:solidFill>
-                <a:effectLst/>
-                <a:uFillTx/>
-                <a:latin typeface="Calibri"/>
-              </a:rPr>
-              <a:t>Fourth Outline Level</a:t>
-            </a:r>
-            <a:endParaRPr lang="en-US" sz="2000" b="0" u="none" strike="noStrike">
-              <a:solidFill>
-                <a:schemeClr val="dk1"/>
-              </a:solidFill>
-              <a:effectLst/>
-              <a:uFillTx/>
-              <a:latin typeface="Calibri"/>
-            </a:endParaRPr>
-          </a:p>
-          <a:p>
-            <a:pPr marL="2160000" lvl="4" indent="-216000" algn="l" defTabSz="457200">
-              <a:spcBef>
-                <a:spcPts val="400"/>
-              </a:spcBef>
-              <a:buClr>
-                <a:srgbClr val="000000"/>
-              </a:buClr>
-              <a:buSzPct val="45000"/>
-              <a:buFont typeface="Wingdings" charset="2"/>
-              <a:buChar char=""/>
-            </a:pPr>
-            <a:r>
-              <a:rPr lang="en-US" sz="2000" b="0" u="none" strike="noStrike">
-                <a:solidFill>
-                  <a:schemeClr val="dk1"/>
-                </a:solidFill>
-                <a:effectLst/>
-                <a:uFillTx/>
-                <a:latin typeface="Calibri"/>
-              </a:rPr>
-              <a:t>Fifth Outline Level</a:t>
-            </a:r>
-            <a:endParaRPr lang="en-US" sz="2000" b="0" u="none" strike="noStrike">
-              <a:solidFill>
-                <a:schemeClr val="dk1"/>
-              </a:solidFill>
-              <a:effectLst/>
-              <a:uFillTx/>
-              <a:latin typeface="Calibri"/>
-            </a:endParaRPr>
-          </a:p>
-          <a:p>
-            <a:pPr marL="2592000" lvl="5" indent="-216000" algn="l" defTabSz="457200">
-              <a:spcBef>
-                <a:spcPts val="283"/>
-              </a:spcBef>
-              <a:buClr>
-                <a:srgbClr val="000000"/>
-              </a:buClr>
-              <a:buSzPct val="45000"/>
-              <a:buFont typeface="Wingdings" charset="2"/>
-              <a:buChar char=""/>
-            </a:pPr>
-            <a:r>
-              <a:rPr lang="en-US" sz="2000" b="0" u="none" strike="noStrike">
-                <a:solidFill>
-                  <a:schemeClr val="dk1"/>
-                </a:solidFill>
-                <a:effectLst/>
-                <a:uFillTx/>
-                <a:latin typeface="Calibri"/>
-              </a:rPr>
-              <a:t>Sixth Outline Level</a:t>
-            </a:r>
-            <a:endParaRPr lang="en-US" sz="2000" b="0" u="none" strike="noStrike">
-              <a:solidFill>
-                <a:schemeClr val="dk1"/>
-              </a:solidFill>
-              <a:effectLst/>
-              <a:uFillTx/>
-              <a:latin typeface="Calibri"/>
-            </a:endParaRPr>
-          </a:p>
-          <a:p>
-            <a:pPr marL="3024000" lvl="6" indent="-216000" algn="l" defTabSz="457200">
-              <a:spcBef>
-                <a:spcPts val="283"/>
-              </a:spcBef>
-              <a:buClr>
-                <a:srgbClr val="000000"/>
-              </a:buClr>
-              <a:buSzPct val="45000"/>
-              <a:buFont typeface="Wingdings" charset="2"/>
-              <a:buChar char=""/>
-            </a:pPr>
-            <a:r>
-              <a:rPr lang="en-US" sz="2000" b="0" u="none" strike="noStrike">
-                <a:solidFill>
-                  <a:schemeClr val="dk1"/>
-                </a:solidFill>
-                <a:effectLst/>
-                <a:uFillTx/>
-                <a:latin typeface="Calibri"/>
-              </a:rPr>
-              <a:t>Seventh Outline Level</a:t>
-            </a:r>
-            <a:endParaRPr lang="en-US" sz="2000" b="0" u="none" strike="noStrike">
-              <a:solidFill>
-                <a:schemeClr val="dk1"/>
-              </a:solidFill>
-              <a:effectLst/>
-              <a:uFillTx/>
-              <a:latin typeface="Calibri"/>
             </a:endParaRPr>
           </a:p>
         </p:txBody>
@@ -8081,7 +8621,7 @@
         <p:spPr>
           <a:xfrm>
             <a:off x="0" y="324360"/>
-            <a:ext cx="12191400" cy="6076440"/>
+            <a:ext cx="12191040" cy="6076080"/>
           </a:xfrm>
           <a:prstGeom prst="rect">
             <a:avLst/>
@@ -8101,7 +8641,7 @@
         <p:spPr>
           <a:xfrm>
             <a:off x="914400" y="1828800"/>
-            <a:ext cx="10362600" cy="2523240"/>
+            <a:ext cx="10362240" cy="2522520"/>
           </a:xfrm>
           <a:prstGeom prst="rect">
             <a:avLst/>
@@ -8253,7 +8793,7 @@
         <p:spPr>
           <a:xfrm>
             <a:off x="731520" y="0"/>
-            <a:ext cx="10515240" cy="578160"/>
+            <a:ext cx="10514880" cy="577440"/>
           </a:xfrm>
           <a:prstGeom prst="rect">
             <a:avLst/>
@@ -8310,7 +8850,7 @@
         <p:spPr>
           <a:xfrm>
             <a:off x="731520" y="731520"/>
-            <a:ext cx="10728360" cy="36360"/>
+            <a:ext cx="10728000" cy="36000"/>
           </a:xfrm>
           <a:prstGeom prst="rect">
             <a:avLst/>
@@ -8376,7 +8916,7 @@
         <p:spPr>
           <a:xfrm>
             <a:off x="1143000" y="2978280"/>
-            <a:ext cx="9963720" cy="3879720"/>
+            <a:ext cx="9963360" cy="3879360"/>
           </a:xfrm>
           <a:prstGeom prst="rect">
             <a:avLst/>
@@ -8396,7 +8936,7 @@
         <p:spPr>
           <a:xfrm>
             <a:off x="731520" y="960120"/>
-            <a:ext cx="10728360" cy="2193120"/>
+            <a:ext cx="10728000" cy="2192400"/>
           </a:xfrm>
           <a:prstGeom prst="rect">
             <a:avLst/>
@@ -8543,7 +9083,7 @@
         <p:spPr>
           <a:xfrm>
             <a:off x="457200" y="914400"/>
-            <a:ext cx="11201400" cy="2286000"/>
+            <a:ext cx="11201040" cy="2285640"/>
           </a:xfrm>
           <a:prstGeom prst="roundRect">
             <a:avLst>
@@ -8630,7 +9170,7 @@
         <p:spPr>
           <a:xfrm>
             <a:off x="731520" y="457200"/>
-            <a:ext cx="10515240" cy="578160"/>
+            <a:ext cx="10514880" cy="577440"/>
           </a:xfrm>
           <a:prstGeom prst="rect">
             <a:avLst/>
@@ -8687,7 +9227,7 @@
         <p:spPr>
           <a:xfrm>
             <a:off x="731520" y="1188720"/>
-            <a:ext cx="10728360" cy="36360"/>
+            <a:ext cx="10728000" cy="36000"/>
           </a:xfrm>
           <a:prstGeom prst="rect">
             <a:avLst/>
@@ -8746,7 +9286,7 @@
         <p:spPr>
           <a:xfrm>
             <a:off x="457200" y="1600200"/>
-            <a:ext cx="11201400" cy="2971800"/>
+            <a:ext cx="11201040" cy="2971440"/>
           </a:xfrm>
           <a:prstGeom prst="roundRect">
             <a:avLst>
@@ -8795,7 +9335,7 @@
         <p:spPr>
           <a:xfrm>
             <a:off x="731520" y="1645920"/>
-            <a:ext cx="10728360" cy="2772000"/>
+            <a:ext cx="10728000" cy="2771280"/>
           </a:xfrm>
           <a:prstGeom prst="rect">
             <a:avLst/>
@@ -9038,7 +9578,7 @@
         <p:spPr>
           <a:xfrm>
             <a:off x="731520" y="457200"/>
-            <a:ext cx="10515240" cy="578160"/>
+            <a:ext cx="10514880" cy="577440"/>
           </a:xfrm>
           <a:prstGeom prst="rect">
             <a:avLst/>
@@ -9095,7 +9635,7 @@
         <p:spPr>
           <a:xfrm>
             <a:off x="731520" y="1188720"/>
-            <a:ext cx="10728360" cy="36360"/>
+            <a:ext cx="10728000" cy="36000"/>
           </a:xfrm>
           <a:prstGeom prst="rect">
             <a:avLst/>
@@ -9154,7 +9694,7 @@
         <p:spPr>
           <a:xfrm>
             <a:off x="457200" y="1600200"/>
-            <a:ext cx="11201400" cy="2971800"/>
+            <a:ext cx="11201040" cy="2971440"/>
           </a:xfrm>
           <a:prstGeom prst="roundRect">
             <a:avLst>
@@ -9203,7 +9743,7 @@
         <p:spPr>
           <a:xfrm>
             <a:off x="731520" y="1645920"/>
-            <a:ext cx="10728360" cy="2894040"/>
+            <a:ext cx="10728000" cy="2893320"/>
           </a:xfrm>
           <a:prstGeom prst="rect">
             <a:avLst/>
@@ -9245,7 +9785,7 @@
             </a:r>
             <a:endParaRPr lang="en-US" sz="1800" b="0" u="none" strike="noStrike">
               <a:solidFill>
-                <a:srgbClr val="FFFFFF"/>
+                <a:srgbClr val="000000"/>
               </a:solidFill>
               <a:effectLst/>
               <a:uFillTx/>
@@ -9274,7 +9814,7 @@
             </a:r>
             <a:endParaRPr lang="en-US" sz="1800" b="0" u="none" strike="noStrike">
               <a:solidFill>
-                <a:srgbClr val="FFFFFF"/>
+                <a:srgbClr val="000000"/>
               </a:solidFill>
               <a:effectLst/>
               <a:uFillTx/>
@@ -9303,7 +9843,7 @@
             </a:r>
             <a:endParaRPr lang="en-US" sz="1800" b="0" u="none" strike="noStrike">
               <a:solidFill>
-                <a:srgbClr val="FFFFFF"/>
+                <a:srgbClr val="000000"/>
               </a:solidFill>
               <a:effectLst/>
               <a:uFillTx/>
@@ -9332,7 +9872,7 @@
             </a:r>
             <a:endParaRPr lang="en-US" sz="1800" b="0" u="none" strike="noStrike">
               <a:solidFill>
-                <a:srgbClr val="FFFFFF"/>
+                <a:srgbClr val="000000"/>
               </a:solidFill>
               <a:effectLst/>
               <a:uFillTx/>
@@ -9361,7 +9901,7 @@
             </a:r>
             <a:endParaRPr lang="en-US" sz="1800" b="0" u="none" strike="noStrike">
               <a:solidFill>
-                <a:srgbClr val="FFFFFF"/>
+                <a:srgbClr val="000000"/>
               </a:solidFill>
               <a:effectLst/>
               <a:uFillTx/>
@@ -9417,7 +9957,7 @@
         <p:spPr>
           <a:xfrm>
             <a:off x="731520" y="457200"/>
-            <a:ext cx="10515240" cy="578160"/>
+            <a:ext cx="10514880" cy="577440"/>
           </a:xfrm>
           <a:prstGeom prst="rect">
             <a:avLst/>
@@ -9474,7 +10014,7 @@
         <p:spPr>
           <a:xfrm>
             <a:off x="731520" y="1188720"/>
-            <a:ext cx="10728360" cy="36360"/>
+            <a:ext cx="10728000" cy="36000"/>
           </a:xfrm>
           <a:prstGeom prst="rect">
             <a:avLst/>
@@ -9533,7 +10073,7 @@
         <p:spPr>
           <a:xfrm>
             <a:off x="457200" y="1600200"/>
-            <a:ext cx="11201400" cy="3657600"/>
+            <a:ext cx="11201040" cy="3657240"/>
           </a:xfrm>
           <a:prstGeom prst="roundRect">
             <a:avLst>
@@ -9582,7 +10122,7 @@
         <p:spPr>
           <a:xfrm>
             <a:off x="731520" y="1645920"/>
-            <a:ext cx="10728360" cy="3442680"/>
+            <a:ext cx="10728000" cy="3441960"/>
           </a:xfrm>
           <a:prstGeom prst="rect">
             <a:avLst/>
@@ -9624,7 +10164,7 @@
             </a:r>
             <a:endParaRPr lang="en-US" sz="1800" b="0" u="none" strike="noStrike">
               <a:solidFill>
-                <a:srgbClr val="FFFFFF"/>
+                <a:srgbClr val="000000"/>
               </a:solidFill>
               <a:effectLst/>
               <a:uFillTx/>
@@ -9653,7 +10193,7 @@
             </a:r>
             <a:endParaRPr lang="en-US" sz="1800" b="0" u="none" strike="noStrike">
               <a:solidFill>
-                <a:srgbClr val="FFFFFF"/>
+                <a:srgbClr val="000000"/>
               </a:solidFill>
               <a:effectLst/>
               <a:uFillTx/>
@@ -9682,7 +10222,7 @@
             </a:r>
             <a:endParaRPr lang="en-US" sz="1800" b="0" u="none" strike="noStrike">
               <a:solidFill>
-                <a:srgbClr val="FFFFFF"/>
+                <a:srgbClr val="000000"/>
               </a:solidFill>
               <a:effectLst/>
               <a:uFillTx/>
@@ -9711,7 +10251,7 @@
             </a:r>
             <a:endParaRPr lang="en-US" sz="1800" b="0" u="none" strike="noStrike">
               <a:solidFill>
-                <a:srgbClr val="FFFFFF"/>
+                <a:srgbClr val="000000"/>
               </a:solidFill>
               <a:effectLst/>
               <a:uFillTx/>
@@ -9740,7 +10280,7 @@
             </a:r>
             <a:endParaRPr lang="en-US" sz="1800" b="0" u="none" strike="noStrike">
               <a:solidFill>
-                <a:srgbClr val="FFFFFF"/>
+                <a:srgbClr val="000000"/>
               </a:solidFill>
               <a:effectLst/>
               <a:uFillTx/>
@@ -9796,7 +10336,7 @@
         <p:spPr>
           <a:xfrm>
             <a:off x="731520" y="457200"/>
-            <a:ext cx="10515240" cy="578160"/>
+            <a:ext cx="10514880" cy="577440"/>
           </a:xfrm>
           <a:prstGeom prst="rect">
             <a:avLst/>
@@ -9825,7 +10365,7 @@
             <a:r>
               <a:rPr lang="en-US" sz="3200" b="1" u="none" strike="noStrike">
                 <a:solidFill>
-                  <a:srgbClr val="121E31"/>
+                  <a:srgbClr val="B2B2B2"/>
                 </a:solidFill>
                 <a:effectLst/>
                 <a:uFillTx/>
@@ -9835,7 +10375,7 @@
             </a:r>
             <a:endParaRPr lang="en-US" sz="3200" b="0" u="none" strike="noStrike">
               <a:solidFill>
-                <a:srgbClr val="FFFFFF"/>
+                <a:srgbClr val="B2B2B2"/>
               </a:solidFill>
               <a:effectLst/>
               <a:uFillTx/>
@@ -9853,7 +10393,7 @@
         <p:spPr>
           <a:xfrm>
             <a:off x="731520" y="1188720"/>
-            <a:ext cx="10728360" cy="36360"/>
+            <a:ext cx="10728000" cy="36000"/>
           </a:xfrm>
           <a:prstGeom prst="rect">
             <a:avLst/>
@@ -9912,7 +10452,7 @@
         <p:spPr>
           <a:xfrm>
             <a:off x="457200" y="1600200"/>
-            <a:ext cx="11201400" cy="3200400"/>
+            <a:ext cx="11201040" cy="3200040"/>
           </a:xfrm>
           <a:prstGeom prst="roundRect">
             <a:avLst>
@@ -9961,7 +10501,7 @@
         <p:spPr>
           <a:xfrm>
             <a:off x="731520" y="1645920"/>
-            <a:ext cx="10728360" cy="2894040"/>
+            <a:ext cx="10728000" cy="2893320"/>
           </a:xfrm>
           <a:prstGeom prst="rect">
             <a:avLst/>
@@ -10180,7 +10720,7 @@
         <p:spPr>
           <a:xfrm>
             <a:off x="360" y="360000"/>
-            <a:ext cx="12191400" cy="5583600"/>
+            <a:ext cx="12191040" cy="5583240"/>
           </a:xfrm>
           <a:prstGeom prst="rect">
             <a:avLst/>
@@ -10200,7 +10740,7 @@
         <p:spPr>
           <a:xfrm>
             <a:off x="731520" y="457200"/>
-            <a:ext cx="10515240" cy="578160"/>
+            <a:ext cx="10514880" cy="577440"/>
           </a:xfrm>
           <a:prstGeom prst="rect">
             <a:avLst/>
@@ -10257,7 +10797,7 @@
         <p:spPr>
           <a:xfrm>
             <a:off x="731520" y="1188720"/>
-            <a:ext cx="10728360" cy="36360"/>
+            <a:ext cx="10728000" cy="36000"/>
           </a:xfrm>
           <a:prstGeom prst="rect">
             <a:avLst/>
@@ -10316,7 +10856,7 @@
         <p:spPr>
           <a:xfrm>
             <a:off x="457200" y="1600200"/>
-            <a:ext cx="11201400" cy="3200400"/>
+            <a:ext cx="11201040" cy="3200040"/>
           </a:xfrm>
           <a:prstGeom prst="roundRect">
             <a:avLst>
@@ -10365,7 +10905,7 @@
         <p:spPr>
           <a:xfrm>
             <a:off x="731520" y="1645920"/>
-            <a:ext cx="10728360" cy="2772000"/>
+            <a:ext cx="10728000" cy="2771280"/>
           </a:xfrm>
           <a:prstGeom prst="rect">
             <a:avLst/>
@@ -10407,7 +10947,7 @@
             </a:r>
             <a:endParaRPr lang="en-US" sz="1800" b="0" u="none" strike="noStrike">
               <a:solidFill>
-                <a:srgbClr val="FFFFFF"/>
+                <a:srgbClr val="000000"/>
               </a:solidFill>
               <a:effectLst/>
               <a:uFillTx/>
@@ -10436,7 +10976,7 @@
             </a:r>
             <a:endParaRPr lang="en-US" sz="1800" b="0" u="none" strike="noStrike">
               <a:solidFill>
-                <a:srgbClr val="FFFFFF"/>
+                <a:srgbClr val="000000"/>
               </a:solidFill>
               <a:effectLst/>
               <a:uFillTx/>
@@ -10465,7 +11005,7 @@
             </a:r>
             <a:endParaRPr lang="en-US" sz="1800" b="0" u="none" strike="noStrike">
               <a:solidFill>
-                <a:srgbClr val="FFFFFF"/>
+                <a:srgbClr val="000000"/>
               </a:solidFill>
               <a:effectLst/>
               <a:uFillTx/>
@@ -10494,7 +11034,7 @@
             </a:r>
             <a:endParaRPr lang="en-US" sz="1800" b="0" u="none" strike="noStrike">
               <a:solidFill>
-                <a:srgbClr val="FFFFFF"/>
+                <a:srgbClr val="000000"/>
               </a:solidFill>
               <a:effectLst/>
               <a:uFillTx/>
@@ -10523,7 +11063,7 @@
             </a:r>
             <a:endParaRPr lang="en-US" sz="1800" b="0" u="none" strike="noStrike">
               <a:solidFill>
-                <a:srgbClr val="FFFFFF"/>
+                <a:srgbClr val="000000"/>
               </a:solidFill>
               <a:effectLst/>
               <a:uFillTx/>
@@ -10552,7 +11092,7 @@
             </a:r>
             <a:endParaRPr lang="en-US" sz="1800" b="0" u="none" strike="noStrike">
               <a:solidFill>
-                <a:srgbClr val="FFFFFF"/>
+                <a:srgbClr val="000000"/>
               </a:solidFill>
               <a:effectLst/>
               <a:uFillTx/>
@@ -10608,7 +11148,7 @@
         <p:spPr>
           <a:xfrm>
             <a:off x="731520" y="457200"/>
-            <a:ext cx="10515240" cy="578160"/>
+            <a:ext cx="10514880" cy="577440"/>
           </a:xfrm>
           <a:prstGeom prst="rect">
             <a:avLst/>
@@ -10665,7 +11205,7 @@
         <p:spPr>
           <a:xfrm>
             <a:off x="731520" y="1188720"/>
-            <a:ext cx="10728360" cy="36360"/>
+            <a:ext cx="10728000" cy="36000"/>
           </a:xfrm>
           <a:prstGeom prst="rect">
             <a:avLst/>
@@ -10724,7 +11264,7 @@
         <p:spPr>
           <a:xfrm>
             <a:off x="457200" y="1371600"/>
-            <a:ext cx="11201400" cy="2286000"/>
+            <a:ext cx="11201040" cy="2285640"/>
           </a:xfrm>
           <a:prstGeom prst="roundRect">
             <a:avLst>
@@ -10773,7 +11313,7 @@
         <p:spPr>
           <a:xfrm>
             <a:off x="731520" y="1645920"/>
-            <a:ext cx="10728360" cy="1644480"/>
+            <a:ext cx="10728000" cy="1643760"/>
           </a:xfrm>
           <a:prstGeom prst="rect">
             <a:avLst/>
@@ -10815,7 +11355,7 @@
             </a:r>
             <a:endParaRPr lang="en-US" sz="1800" b="0" u="none" strike="noStrike">
               <a:solidFill>
-                <a:srgbClr val="FFFFFF"/>
+                <a:srgbClr val="000000"/>
               </a:solidFill>
               <a:effectLst/>
               <a:uFillTx/>
@@ -10844,7 +11384,7 @@
             </a:r>
             <a:endParaRPr lang="en-US" sz="1800" b="0" u="none" strike="noStrike">
               <a:solidFill>
-                <a:srgbClr val="FFFFFF"/>
+                <a:srgbClr val="000000"/>
               </a:solidFill>
               <a:effectLst/>
               <a:uFillTx/>
@@ -10873,7 +11413,7 @@
             </a:r>
             <a:endParaRPr lang="en-US" sz="1800" b="0" u="none" strike="noStrike">
               <a:solidFill>
-                <a:srgbClr val="FFFFFF"/>
+                <a:srgbClr val="000000"/>
               </a:solidFill>
               <a:effectLst/>
               <a:uFillTx/>
@@ -10902,7 +11442,7 @@
             </a:r>
             <a:endParaRPr lang="en-US" sz="1800" b="0" u="none" strike="noStrike">
               <a:solidFill>
-                <a:srgbClr val="FFFFFF"/>
+                <a:srgbClr val="000000"/>
               </a:solidFill>
               <a:effectLst/>
               <a:uFillTx/>
